--- a/docs/fitness_gym_defense_presentation.pptx
+++ b/docs/fitness_gym_defense_presentation.pptx
@@ -20,6 +20,12 @@
     <p:sldId id="268" r:id="rId15"/>
     <p:sldId id="269" r:id="rId16"/>
     <p:sldId id="270" r:id="rId17"/>
+    <p:sldId id="271" r:id="rId18"/>
+    <p:sldId id="272" r:id="rId19"/>
+    <p:sldId id="273" r:id="rId20"/>
+    <p:sldId id="274" r:id="rId21"/>
+    <p:sldId id="275" r:id="rId22"/>
+    <p:sldId id="276" r:id="rId23"/>
   </p:sldIdLst>
   <p:sldSz cx="12192000" cy="6858000"/>
   <p:notesSz cx="7559675" cy="10691813"/>
@@ -95,6 +101,9 @@
           <a:lstStyle>
             <a:lvl1pPr indent="0" algn="ctr">
               <a:buNone/>
+              <a:tabLst>
+                <a:tab pos="0" algn="l"/>
+              </a:tabLst>
               <a:defRPr lang="ru-RU" sz="4400" b="0" u="none" strike="noStrike">
                 <a:solidFill>
                   <a:srgbClr val="000000"/>
@@ -108,6 +117,9 @@
           <a:p>
             <a:pPr indent="0" algn="ctr">
               <a:buNone/>
+              <a:tabLst>
+                <a:tab pos="0" algn="l"/>
+              </a:tabLst>
             </a:pPr>
             <a:r>
               <a:rPr lang="ru-RU" sz="4400" b="0" u="none" strike="noStrike">
@@ -294,7 +306,7 @@
             </a:lvl7pPr>
           </a:lstStyle>
           <a:p>
-            <a:pPr marL="432000" indent="-324000" algn="l">
+            <a:pPr indent="-324000" algn="l">
               <a:spcBef>
                 <a:spcPts val="1417"/>
               </a:spcBef>
@@ -560,8 +572,8 @@
         </p:nvSpPr>
         <p:spPr>
           <a:xfrm>
-            <a:off x="0" y="0"/>
-            <a:ext cx="12191760" cy="6857640"/>
+            <a:off x="720" y="-180000"/>
+            <a:ext cx="12191400" cy="6857280"/>
           </a:xfrm>
           <a:prstGeom prst="rect">
             <a:avLst/>
@@ -607,7 +619,7 @@
         <p:spPr>
           <a:xfrm>
             <a:off x="0" y="0"/>
-            <a:ext cx="12191760" cy="959760"/>
+            <a:ext cx="12191400" cy="959400"/>
           </a:xfrm>
           <a:prstGeom prst="rect">
             <a:avLst/>
@@ -653,7 +665,7 @@
         <p:spPr>
           <a:xfrm>
             <a:off x="0" y="960120"/>
-            <a:ext cx="164160" cy="5897520"/>
+            <a:ext cx="163800" cy="5897160"/>
           </a:xfrm>
           <a:prstGeom prst="rect">
             <a:avLst/>
@@ -675,7 +687,7 @@
           <a:fontRef idx="minor"/>
         </p:style>
         <p:txBody>
-          <a:bodyPr lIns="90000" tIns="45000" rIns="90000" bIns="45000" anchor="t">
+          <a:bodyPr lIns="82080" tIns="45000" rIns="82080" bIns="45000" anchor="t">
             <a:noAutofit/>
           </a:bodyPr>
           <a:p>
@@ -692,14 +704,14 @@
       </p:sp>
       <p:sp>
         <p:nvSpPr>
-          <p:cNvPr id="7" name="Title"/>
-          <p:cNvSpPr/>
-          <p:nvPr/>
-        </p:nvSpPr>
-        <p:spPr>
-          <a:xfrm>
-            <a:off x="502920" y="201240"/>
-            <a:ext cx="11017080" cy="658080"/>
+          <p:cNvPr id="7" name="HeaderTitle"/>
+          <p:cNvSpPr/>
+          <p:nvPr/>
+        </p:nvSpPr>
+        <p:spPr>
+          <a:xfrm>
+            <a:off x="640080" y="201240"/>
+            <a:ext cx="9874800" cy="474840"/>
           </a:xfrm>
           <a:prstGeom prst="rect">
             <a:avLst/>
@@ -729,7 +741,7 @@
               </a:tabLst>
             </a:pPr>
             <a:r>
-              <a:rPr lang="ru-RU" sz="3300" b="0" u="none" strike="noStrike">
+              <a:rPr lang="ru-RU" sz="2350" b="0" u="none" strike="noStrike">
                 <a:solidFill>
                   <a:srgbClr val="FFFFFF"/>
                 </a:solidFill>
@@ -737,29 +749,29 @@
                 <a:uFillTx/>
                 <a:latin typeface="Arial"/>
               </a:rPr>
-              <a:t>Разработка и тестирование ИС для управления фитнес-клубом</a:t>
-            </a:r>
-            <a:endParaRPr lang="ru-RU" sz="3300" b="0" u="none" strike="noStrike">
-              <a:solidFill>
-                <a:srgbClr val="000000"/>
-              </a:solidFill>
-              <a:effectLst/>
-              <a:uFillTx/>
-              <a:latin typeface="Arial"/>
-            </a:endParaRPr>
-          </a:p>
-        </p:txBody>
-      </p:sp>
-      <p:sp>
-        <p:nvSpPr>
-          <p:cNvPr id="8" name="Subtitle"/>
-          <p:cNvSpPr/>
-          <p:nvPr/>
-        </p:nvSpPr>
-        <p:spPr>
-          <a:xfrm>
-            <a:off x="731520" y="1417320"/>
-            <a:ext cx="5943240" cy="1325520"/>
+              <a:t>Выпускная квалификационная работа</a:t>
+            </a:r>
+            <a:endParaRPr lang="ru-RU" sz="2350" b="0" u="none" strike="noStrike">
+              <a:solidFill>
+                <a:srgbClr val="000000"/>
+              </a:solidFill>
+              <a:effectLst/>
+              <a:uFillTx/>
+              <a:latin typeface="Arial"/>
+            </a:endParaRPr>
+          </a:p>
+        </p:txBody>
+      </p:sp>
+      <p:sp>
+        <p:nvSpPr>
+          <p:cNvPr id="8" name="MainTitle"/>
+          <p:cNvSpPr/>
+          <p:nvPr/>
+        </p:nvSpPr>
+        <p:spPr>
+          <a:xfrm>
+            <a:off x="777240" y="1234440"/>
+            <a:ext cx="10202760" cy="1782360"/>
           </a:xfrm>
           <a:prstGeom prst="roundRect">
             <a:avLst>
@@ -796,7 +808,7 @@
               </a:tabLst>
             </a:pPr>
             <a:r>
-              <a:rPr lang="ru-RU" sz="3300" b="0" u="none" strike="noStrike">
+              <a:rPr lang="ru-RU" sz="2550" b="0" u="none" strike="noStrike">
                 <a:solidFill>
                   <a:srgbClr val="102A43"/>
                 </a:solidFill>
@@ -804,9 +816,67 @@
                 <a:uFillTx/>
                 <a:latin typeface="Arial"/>
               </a:rPr>
-              <a:t>Информационная система для записи на тренировки, учета абонементов, администрирования и аналитики фитнес-клуба</a:t>
-            </a:r>
-            <a:endParaRPr lang="ru-RU" sz="3300" b="0" u="none" strike="noStrike">
+              <a:t>Отладка и тестирование информационной системы</a:t>
+            </a:r>
+            <a:endParaRPr lang="ru-RU" sz="2550" b="0" u="none" strike="noStrike">
+              <a:solidFill>
+                <a:srgbClr val="000000"/>
+              </a:solidFill>
+              <a:effectLst/>
+              <a:uFillTx/>
+              <a:latin typeface="Arial"/>
+            </a:endParaRPr>
+          </a:p>
+          <a:p>
+            <a:pPr>
+              <a:lnSpc>
+                <a:spcPct val="100000"/>
+              </a:lnSpc>
+              <a:tabLst>
+                <a:tab pos="0" algn="l"/>
+              </a:tabLst>
+            </a:pPr>
+            <a:r>
+              <a:rPr lang="ru-RU" sz="2550" b="0" u="none" strike="noStrike">
+                <a:solidFill>
+                  <a:srgbClr val="102A43"/>
+                </a:solidFill>
+                <a:effectLst/>
+                <a:uFillTx/>
+                <a:latin typeface="Arial"/>
+              </a:rPr>
+              <a:t>для учета клиентов фитнес-клуба</a:t>
+            </a:r>
+            <a:endParaRPr lang="ru-RU" sz="2550" b="0" u="none" strike="noStrike">
+              <a:solidFill>
+                <a:srgbClr val="000000"/>
+              </a:solidFill>
+              <a:effectLst/>
+              <a:uFillTx/>
+              <a:latin typeface="Arial"/>
+            </a:endParaRPr>
+          </a:p>
+          <a:p>
+            <a:pPr>
+              <a:lnSpc>
+                <a:spcPct val="100000"/>
+              </a:lnSpc>
+              <a:tabLst>
+                <a:tab pos="0" algn="l"/>
+              </a:tabLst>
+            </a:pPr>
+            <a:r>
+              <a:rPr lang="ru-RU" sz="2550" b="0" u="none" strike="noStrike">
+                <a:solidFill>
+                  <a:srgbClr val="102A43"/>
+                </a:solidFill>
+                <a:effectLst/>
+                <a:uFillTx/>
+                <a:latin typeface="Arial"/>
+              </a:rPr>
+              <a:t>с интеграцией мобильных приложений</a:t>
+            </a:r>
+            <a:endParaRPr lang="ru-RU" sz="2550" b="0" u="none" strike="noStrike">
               <a:solidFill>
                 <a:srgbClr val="000000"/>
               </a:solidFill>
@@ -825,8 +895,8 @@
         </p:nvSpPr>
         <p:spPr>
           <a:xfrm>
-            <a:off x="777240" y="3063240"/>
-            <a:ext cx="3245760" cy="959760"/>
+            <a:off x="777240" y="3240000"/>
+            <a:ext cx="3245400" cy="1260000"/>
           </a:xfrm>
           <a:prstGeom prst="roundRect">
             <a:avLst>
@@ -854,7 +924,7 @@
             <a:noAutofit/>
           </a:bodyPr>
           <a:p>
-            <a:pPr indent="-180000">
+            <a:pPr marL="216000" indent="-180000">
               <a:lnSpc>
                 <a:spcPct val="100000"/>
               </a:lnSpc>
@@ -885,7 +955,7 @@
             </a:endParaRPr>
           </a:p>
           <a:p>
-            <a:pPr indent="-180000">
+            <a:pPr marL="216000" indent="-180000">
               <a:lnSpc>
                 <a:spcPct val="100000"/>
               </a:lnSpc>
@@ -925,8 +995,8 @@
         </p:nvSpPr>
         <p:spPr>
           <a:xfrm>
-            <a:off x="4297680" y="3063240"/>
-            <a:ext cx="3245760" cy="959760"/>
+            <a:off x="4297680" y="3249000"/>
+            <a:ext cx="3245400" cy="1250640"/>
           </a:xfrm>
           <a:prstGeom prst="roundRect">
             <a:avLst>
@@ -954,7 +1024,7 @@
             <a:noAutofit/>
           </a:bodyPr>
           <a:p>
-            <a:pPr indent="-180000">
+            <a:pPr marL="216000" indent="-180000">
               <a:lnSpc>
                 <a:spcPct val="100000"/>
               </a:lnSpc>
@@ -985,7 +1055,7 @@
             </a:endParaRPr>
           </a:p>
           <a:p>
-            <a:pPr indent="-180000">
+            <a:pPr marL="216000" indent="-180000">
               <a:lnSpc>
                 <a:spcPct val="100000"/>
               </a:lnSpc>
@@ -1025,8 +1095,8 @@
         </p:nvSpPr>
         <p:spPr>
           <a:xfrm>
-            <a:off x="7818120" y="3063240"/>
-            <a:ext cx="3245760" cy="959760"/>
+            <a:off x="7818120" y="3240000"/>
+            <a:ext cx="3245400" cy="1260000"/>
           </a:xfrm>
           <a:prstGeom prst="roundRect">
             <a:avLst>
@@ -1054,7 +1124,7 @@
             <a:noAutofit/>
           </a:bodyPr>
           <a:p>
-            <a:pPr indent="-180000">
+            <a:pPr marL="216000" indent="-180000">
               <a:lnSpc>
                 <a:spcPct val="100000"/>
               </a:lnSpc>
@@ -1085,7 +1155,7 @@
             </a:endParaRPr>
           </a:p>
           <a:p>
-            <a:pPr indent="-180000">
+            <a:pPr marL="216000" indent="-180000">
               <a:lnSpc>
                 <a:spcPct val="100000"/>
               </a:lnSpc>
@@ -1125,8 +1195,8 @@
         </p:nvSpPr>
         <p:spPr>
           <a:xfrm>
-            <a:off x="777240" y="4572000"/>
-            <a:ext cx="9875160" cy="822600"/>
+            <a:off x="777240" y="4709160"/>
+            <a:ext cx="10382760" cy="870480"/>
           </a:xfrm>
           <a:prstGeom prst="roundRect">
             <a:avLst>
@@ -1163,7 +1233,7 @@
               </a:tabLst>
             </a:pPr>
             <a:r>
-              <a:rPr lang="ru-RU" sz="3300" b="0" u="none" strike="noStrike">
+              <a:rPr lang="ru-RU" sz="2200" b="0" u="none" strike="noStrike">
                 <a:solidFill>
                   <a:srgbClr val="1E3A8A"/>
                 </a:solidFill>
@@ -1171,9 +1241,9 @@
                 <a:uFillTx/>
                 <a:latin typeface="Arial"/>
               </a:rPr>
-              <a:t>ВКР по специальности 09.02.07 Информационные системы и программирование</a:t>
-            </a:r>
-            <a:endParaRPr lang="ru-RU" sz="3300" b="0" u="none" strike="noStrike">
+              <a:t>Специальность 09.02.07 Информационные системы и программирование</a:t>
+            </a:r>
+            <a:endParaRPr lang="ru-RU" sz="2200" b="0" u="none" strike="noStrike">
               <a:solidFill>
                 <a:srgbClr val="000000"/>
               </a:solidFill>
@@ -1193,7 +1263,7 @@
         <p:spPr>
           <a:xfrm>
             <a:off x="10625400" y="6473880"/>
-            <a:ext cx="639720" cy="228240"/>
+            <a:ext cx="639360" cy="227880"/>
           </a:xfrm>
           <a:prstGeom prst="rect">
             <a:avLst/>
@@ -1283,14 +1353,14 @@
       </p:grpSpPr>
       <p:sp>
         <p:nvSpPr>
-          <p:cNvPr id="66" name="Background"/>
+          <p:cNvPr id="68" name="Background"/>
           <p:cNvSpPr/>
           <p:nvPr/>
         </p:nvSpPr>
         <p:spPr>
           <a:xfrm>
             <a:off x="0" y="0"/>
-            <a:ext cx="12191760" cy="6857640"/>
+            <a:ext cx="12191400" cy="6857280"/>
           </a:xfrm>
           <a:prstGeom prst="rect">
             <a:avLst/>
@@ -1329,14 +1399,14 @@
       </p:sp>
       <p:sp>
         <p:nvSpPr>
-          <p:cNvPr id="67" name="Header"/>
+          <p:cNvPr id="69" name="Header"/>
           <p:cNvSpPr/>
           <p:nvPr/>
         </p:nvSpPr>
         <p:spPr>
           <a:xfrm>
             <a:off x="0" y="0"/>
-            <a:ext cx="12191760" cy="959760"/>
+            <a:ext cx="12191400" cy="959400"/>
           </a:xfrm>
           <a:prstGeom prst="rect">
             <a:avLst/>
@@ -1375,14 +1445,14 @@
       </p:sp>
       <p:sp>
         <p:nvSpPr>
-          <p:cNvPr id="68" name="Accent"/>
+          <p:cNvPr id="70" name="Accent"/>
           <p:cNvSpPr/>
           <p:nvPr/>
         </p:nvSpPr>
         <p:spPr>
           <a:xfrm>
             <a:off x="0" y="960120"/>
-            <a:ext cx="164160" cy="5897520"/>
+            <a:ext cx="163800" cy="5897160"/>
           </a:xfrm>
           <a:prstGeom prst="rect">
             <a:avLst/>
@@ -1404,7 +1474,7 @@
           <a:fontRef idx="minor"/>
         </p:style>
         <p:txBody>
-          <a:bodyPr lIns="90000" tIns="45000" rIns="90000" bIns="45000" anchor="t">
+          <a:bodyPr lIns="82080" tIns="45000" rIns="82080" bIns="45000" anchor="t">
             <a:noAutofit/>
           </a:bodyPr>
           <a:p>
@@ -1421,14 +1491,14 @@
       </p:sp>
       <p:sp>
         <p:nvSpPr>
-          <p:cNvPr id="69" name="Title"/>
+          <p:cNvPr id="71" name="Title"/>
           <p:cNvSpPr/>
           <p:nvPr/>
         </p:nvSpPr>
         <p:spPr>
           <a:xfrm>
             <a:off x="502920" y="201240"/>
-            <a:ext cx="10881000" cy="658080"/>
+            <a:ext cx="10880640" cy="657720"/>
           </a:xfrm>
           <a:prstGeom prst="rect">
             <a:avLst/>
@@ -1466,7 +1536,7 @@
                 <a:uFillTx/>
                 <a:latin typeface="Arial"/>
               </a:rPr>
-              <a:t>Административный сценарий</a:t>
+              <a:t>Пользовательский сценарий</a:t>
             </a:r>
             <a:endParaRPr lang="ru-RU" sz="3300" b="0" u="none" strike="noStrike">
               <a:solidFill>
@@ -1481,14 +1551,14 @@
       </p:sp>
       <p:sp>
         <p:nvSpPr>
-          <p:cNvPr id="70" name="Content"/>
+          <p:cNvPr id="72" name="Content"/>
           <p:cNvSpPr/>
           <p:nvPr/>
         </p:nvSpPr>
         <p:spPr>
           <a:xfrm>
             <a:off x="685800" y="1234440"/>
-            <a:ext cx="5531760" cy="4891680"/>
+            <a:ext cx="10194840" cy="4891320"/>
           </a:xfrm>
           <a:prstGeom prst="roundRect">
             <a:avLst>
@@ -1516,7 +1586,7 @@
             <a:noAutofit/>
           </a:bodyPr>
           <a:p>
-            <a:pPr indent="-180000">
+            <a:pPr marL="216000" indent="-180000">
               <a:lnSpc>
                 <a:spcPct val="100000"/>
               </a:lnSpc>
@@ -1535,7 +1605,7 @@
                 <a:uFillTx/>
                 <a:latin typeface="Arial"/>
               </a:rPr>
-              <a:t>Вход администратора</a:t>
+              <a:t>Регистрация и вход</a:t>
             </a:r>
             <a:endParaRPr lang="ru-RU" sz="2150" b="0" u="none" strike="noStrike">
               <a:solidFill>
@@ -1547,7 +1617,7 @@
             </a:endParaRPr>
           </a:p>
           <a:p>
-            <a:pPr indent="-180000">
+            <a:pPr marL="216000" indent="-180000">
               <a:lnSpc>
                 <a:spcPct val="100000"/>
               </a:lnSpc>
@@ -1566,7 +1636,7 @@
                 <a:uFillTx/>
                 <a:latin typeface="Arial"/>
               </a:rPr>
-              <a:t>Управление тренерами</a:t>
+              <a:t>Просмотр расписания</a:t>
             </a:r>
             <a:endParaRPr lang="ru-RU" sz="2150" b="0" u="none" strike="noStrike">
               <a:solidFill>
@@ -1578,7 +1648,7 @@
             </a:endParaRPr>
           </a:p>
           <a:p>
-            <a:pPr indent="-180000">
+            <a:pPr marL="216000" indent="-180000">
               <a:lnSpc>
                 <a:spcPct val="100000"/>
               </a:lnSpc>
@@ -1597,7 +1667,7 @@
                 <a:uFillTx/>
                 <a:latin typeface="Arial"/>
               </a:rPr>
-              <a:t>Управление типами тренировок</a:t>
+              <a:t>Фильтрация тренировок</a:t>
             </a:r>
             <a:endParaRPr lang="ru-RU" sz="2150" b="0" u="none" strike="noStrike">
               <a:solidFill>
@@ -1609,7 +1679,7 @@
             </a:endParaRPr>
           </a:p>
           <a:p>
-            <a:pPr indent="-180000">
+            <a:pPr marL="216000" indent="-180000">
               <a:lnSpc>
                 <a:spcPct val="100000"/>
               </a:lnSpc>
@@ -1628,7 +1698,7 @@
                 <a:uFillTx/>
                 <a:latin typeface="Arial"/>
               </a:rPr>
-              <a:t>Формирование расписания</a:t>
+              <a:t>Просмотр карточки тренера</a:t>
             </a:r>
             <a:endParaRPr lang="ru-RU" sz="2150" b="0" u="none" strike="noStrike">
               <a:solidFill>
@@ -1640,7 +1710,7 @@
             </a:endParaRPr>
           </a:p>
           <a:p>
-            <a:pPr indent="-180000">
+            <a:pPr marL="216000" indent="-180000">
               <a:lnSpc>
                 <a:spcPct val="100000"/>
               </a:lnSpc>
@@ -1659,7 +1729,7 @@
                 <a:uFillTx/>
                 <a:latin typeface="Arial"/>
               </a:rPr>
-              <a:t>Управление пользователями</a:t>
+              <a:t>Запись на занятие</a:t>
             </a:r>
             <a:endParaRPr lang="ru-RU" sz="2150" b="0" u="none" strike="noStrike">
               <a:solidFill>
@@ -1671,7 +1741,7 @@
             </a:endParaRPr>
           </a:p>
           <a:p>
-            <a:pPr indent="-180000">
+            <a:pPr marL="216000" indent="-180000">
               <a:lnSpc>
                 <a:spcPct val="100000"/>
               </a:lnSpc>
@@ -1690,7 +1760,7 @@
                 <a:uFillTx/>
                 <a:latin typeface="Arial"/>
               </a:rPr>
-              <a:t>Управление абонементами</a:t>
+              <a:t>Просмотр личного расписания</a:t>
             </a:r>
             <a:endParaRPr lang="ru-RU" sz="2150" b="0" u="none" strike="noStrike">
               <a:solidFill>
@@ -1702,7 +1772,7 @@
             </a:endParaRPr>
           </a:p>
           <a:p>
-            <a:pPr indent="-180000">
+            <a:pPr marL="216000" indent="-180000">
               <a:lnSpc>
                 <a:spcPct val="100000"/>
               </a:lnSpc>
@@ -1721,7 +1791,7 @@
                 <a:uFillTx/>
                 <a:latin typeface="Arial"/>
               </a:rPr>
-              <a:t>Просмотр аналитики</a:t>
+              <a:t>Работа с абонементом</a:t>
             </a:r>
             <a:endParaRPr lang="ru-RU" sz="2150" b="0" u="none" strike="noStrike">
               <a:solidFill>
@@ -1736,78 +1806,6 @@
       </p:sp>
       <p:sp>
         <p:nvSpPr>
-          <p:cNvPr id="71" name="ImageFrame"/>
-          <p:cNvSpPr/>
-          <p:nvPr/>
-        </p:nvSpPr>
-        <p:spPr>
-          <a:xfrm>
-            <a:off x="6400800" y="1207080"/>
-            <a:ext cx="4891680" cy="4800240"/>
-          </a:xfrm>
-          <a:prstGeom prst="roundRect">
-            <a:avLst>
-              <a:gd name="adj" fmla="val 16667"/>
-            </a:avLst>
-          </a:prstGeom>
-          <a:solidFill>
-            <a:srgbClr val="FFFFFF"/>
-          </a:solidFill>
-          <a:ln w="12700">
-            <a:solidFill>
-              <a:srgbClr val="CBD5E1"/>
-            </a:solidFill>
-            <a:round/>
-          </a:ln>
-        </p:spPr>
-        <p:style>
-          <a:lnRef idx="0"/>
-          <a:fillRef idx="0"/>
-          <a:effectRef idx="0"/>
-          <a:fontRef idx="minor"/>
-        </p:style>
-        <p:txBody>
-          <a:bodyPr lIns="90000" tIns="45000" rIns="90000" bIns="45000" anchor="t">
-            <a:noAutofit/>
-          </a:bodyPr>
-          <a:p>
-            <a:endParaRPr lang="ru-RU" sz="1800" b="0" u="none" strike="noStrike">
-              <a:solidFill>
-                <a:srgbClr val="000000"/>
-              </a:solidFill>
-              <a:effectLst/>
-              <a:uFillTx/>
-              <a:latin typeface="Arial"/>
-            </a:endParaRPr>
-          </a:p>
-        </p:txBody>
-      </p:sp>
-      <p:pic>
-        <p:nvPicPr>
-          <p:cNvPr id="72" name="diagrams/Controllers Class Diagram.png"/>
-          <p:cNvPicPr/>
-          <p:nvPr/>
-        </p:nvPicPr>
-        <p:blipFill>
-          <a:blip r:embed="rId1"/>
-          <a:stretch/>
-        </p:blipFill>
-        <p:spPr>
-          <a:xfrm>
-            <a:off x="6473880" y="1353240"/>
-            <a:ext cx="4754520" cy="2414160"/>
-          </a:xfrm>
-          <a:prstGeom prst="rect">
-            <a:avLst/>
-          </a:prstGeom>
-          <a:noFill/>
-          <a:ln w="0">
-            <a:noFill/>
-          </a:ln>
-        </p:spPr>
-      </p:pic>
-      <p:sp>
-        <p:nvSpPr>
           <p:cNvPr id="73" name="Footer"/>
           <p:cNvSpPr/>
           <p:nvPr/>
@@ -1815,7 +1813,7 @@
         <p:spPr>
           <a:xfrm>
             <a:off x="10625400" y="6473880"/>
-            <a:ext cx="639720" cy="228240"/>
+            <a:ext cx="639360" cy="227880"/>
           </a:xfrm>
           <a:prstGeom prst="rect">
             <a:avLst/>
@@ -1912,7 +1910,7 @@
         <p:spPr>
           <a:xfrm>
             <a:off x="0" y="0"/>
-            <a:ext cx="12191760" cy="6857640"/>
+            <a:ext cx="12191400" cy="6857280"/>
           </a:xfrm>
           <a:prstGeom prst="rect">
             <a:avLst/>
@@ -1958,7 +1956,7 @@
         <p:spPr>
           <a:xfrm>
             <a:off x="0" y="0"/>
-            <a:ext cx="12191760" cy="959760"/>
+            <a:ext cx="12191400" cy="959400"/>
           </a:xfrm>
           <a:prstGeom prst="rect">
             <a:avLst/>
@@ -2004,7 +2002,7 @@
         <p:spPr>
           <a:xfrm>
             <a:off x="0" y="960120"/>
-            <a:ext cx="164160" cy="5897520"/>
+            <a:ext cx="163800" cy="5897160"/>
           </a:xfrm>
           <a:prstGeom prst="rect">
             <a:avLst/>
@@ -2026,7 +2024,7 @@
           <a:fontRef idx="minor"/>
         </p:style>
         <p:txBody>
-          <a:bodyPr lIns="90000" tIns="45000" rIns="90000" bIns="45000" anchor="t">
+          <a:bodyPr lIns="82080" tIns="45000" rIns="82080" bIns="45000" anchor="t">
             <a:noAutofit/>
           </a:bodyPr>
           <a:p>
@@ -2050,7 +2048,7 @@
         <p:spPr>
           <a:xfrm>
             <a:off x="502920" y="201240"/>
-            <a:ext cx="10881000" cy="658080"/>
+            <a:ext cx="10880640" cy="657720"/>
           </a:xfrm>
           <a:prstGeom prst="rect">
             <a:avLst/>
@@ -2088,7 +2086,7 @@
                 <a:uFillTx/>
                 <a:latin typeface="Arial"/>
               </a:rPr>
-              <a:t>Абонементы и уведомления</a:t>
+              <a:t>Административный сценарий</a:t>
             </a:r>
             <a:endParaRPr lang="ru-RU" sz="3300" b="0" u="none" strike="noStrike">
               <a:solidFill>
@@ -2110,7 +2108,7 @@
         <p:spPr>
           <a:xfrm>
             <a:off x="685800" y="1234440"/>
-            <a:ext cx="5531760" cy="4891680"/>
+            <a:ext cx="5531400" cy="4891320"/>
           </a:xfrm>
           <a:prstGeom prst="roundRect">
             <a:avLst>
@@ -2138,7 +2136,7 @@
             <a:noAutofit/>
           </a:bodyPr>
           <a:p>
-            <a:pPr indent="-180000">
+            <a:pPr marL="216000" indent="-180000">
               <a:lnSpc>
                 <a:spcPct val="100000"/>
               </a:lnSpc>
@@ -2157,7 +2155,7 @@
                 <a:uFillTx/>
                 <a:latin typeface="Arial"/>
               </a:rPr>
-              <a:t>Каталог тарифов</a:t>
+              <a:t>Вход администратора</a:t>
             </a:r>
             <a:endParaRPr lang="ru-RU" sz="2150" b="0" u="none" strike="noStrike">
               <a:solidFill>
@@ -2169,7 +2167,7 @@
             </a:endParaRPr>
           </a:p>
           <a:p>
-            <a:pPr indent="-180000">
+            <a:pPr marL="216000" indent="-180000">
               <a:lnSpc>
                 <a:spcPct val="100000"/>
               </a:lnSpc>
@@ -2188,7 +2186,7 @@
                 <a:uFillTx/>
                 <a:latin typeface="Arial"/>
               </a:rPr>
-              <a:t>Покупка абонемента</a:t>
+              <a:t>Управление тренерами</a:t>
             </a:r>
             <a:endParaRPr lang="ru-RU" sz="2150" b="0" u="none" strike="noStrike">
               <a:solidFill>
@@ -2200,7 +2198,7 @@
             </a:endParaRPr>
           </a:p>
           <a:p>
-            <a:pPr indent="-180000">
+            <a:pPr marL="216000" indent="-180000">
               <a:lnSpc>
                 <a:spcPct val="100000"/>
               </a:lnSpc>
@@ -2219,7 +2217,7 @@
                 <a:uFillTx/>
                 <a:latin typeface="Arial"/>
               </a:rPr>
-              <a:t>Расчет срока действия и остатка посещений</a:t>
+              <a:t>Управление типами тренировок</a:t>
             </a:r>
             <a:endParaRPr lang="ru-RU" sz="2150" b="0" u="none" strike="noStrike">
               <a:solidFill>
@@ -2231,7 +2229,7 @@
             </a:endParaRPr>
           </a:p>
           <a:p>
-            <a:pPr indent="-180000">
+            <a:pPr marL="216000" indent="-180000">
               <a:lnSpc>
                 <a:spcPct val="100000"/>
               </a:lnSpc>
@@ -2250,7 +2248,7 @@
                 <a:uFillTx/>
                 <a:latin typeface="Arial"/>
               </a:rPr>
-              <a:t>Продление и заморозка</a:t>
+              <a:t>Формирование расписания</a:t>
             </a:r>
             <a:endParaRPr lang="ru-RU" sz="2150" b="0" u="none" strike="noStrike">
               <a:solidFill>
@@ -2262,7 +2260,7 @@
             </a:endParaRPr>
           </a:p>
           <a:p>
-            <a:pPr indent="-180000">
+            <a:pPr marL="216000" indent="-180000">
               <a:lnSpc>
                 <a:spcPct val="100000"/>
               </a:lnSpc>
@@ -2281,7 +2279,7 @@
                 <a:uFillTx/>
                 <a:latin typeface="Arial"/>
               </a:rPr>
-              <a:t>Уведомления о тренировках и состоянии абонемента</a:t>
+              <a:t>Управление пользователями</a:t>
             </a:r>
             <a:endParaRPr lang="ru-RU" sz="2150" b="0" u="none" strike="noStrike">
               <a:solidFill>
@@ -2292,6 +2290,68 @@
               <a:latin typeface="Arial"/>
             </a:endParaRPr>
           </a:p>
+          <a:p>
+            <a:pPr marL="216000" indent="-180000">
+              <a:lnSpc>
+                <a:spcPct val="100000"/>
+              </a:lnSpc>
+              <a:buClr>
+                <a:srgbClr val="111827"/>
+              </a:buClr>
+              <a:buFont typeface="Symbol" charset="2"/>
+              <a:buChar char=""/>
+            </a:pPr>
+            <a:r>
+              <a:rPr lang="ru-RU" sz="2150" b="0" u="none" strike="noStrike">
+                <a:solidFill>
+                  <a:srgbClr val="111827"/>
+                </a:solidFill>
+                <a:effectLst/>
+                <a:uFillTx/>
+                <a:latin typeface="Arial"/>
+              </a:rPr>
+              <a:t>Управление абонементами</a:t>
+            </a:r>
+            <a:endParaRPr lang="ru-RU" sz="2150" b="0" u="none" strike="noStrike">
+              <a:solidFill>
+                <a:srgbClr val="000000"/>
+              </a:solidFill>
+              <a:effectLst/>
+              <a:uFillTx/>
+              <a:latin typeface="Arial"/>
+            </a:endParaRPr>
+          </a:p>
+          <a:p>
+            <a:pPr marL="216000" indent="-180000">
+              <a:lnSpc>
+                <a:spcPct val="100000"/>
+              </a:lnSpc>
+              <a:buClr>
+                <a:srgbClr val="111827"/>
+              </a:buClr>
+              <a:buFont typeface="Symbol" charset="2"/>
+              <a:buChar char=""/>
+            </a:pPr>
+            <a:r>
+              <a:rPr lang="ru-RU" sz="2150" b="0" u="none" strike="noStrike">
+                <a:solidFill>
+                  <a:srgbClr val="111827"/>
+                </a:solidFill>
+                <a:effectLst/>
+                <a:uFillTx/>
+                <a:latin typeface="Arial"/>
+              </a:rPr>
+              <a:t>Просмотр аналитики</a:t>
+            </a:r>
+            <a:endParaRPr lang="ru-RU" sz="2150" b="0" u="none" strike="noStrike">
+              <a:solidFill>
+                <a:srgbClr val="000000"/>
+              </a:solidFill>
+              <a:effectLst/>
+              <a:uFillTx/>
+              <a:latin typeface="Arial"/>
+            </a:endParaRPr>
+          </a:p>
         </p:txBody>
       </p:sp>
       <p:sp>
@@ -2303,7 +2363,7 @@
         <p:spPr>
           <a:xfrm>
             <a:off x="6400800" y="1207080"/>
-            <a:ext cx="4891680" cy="4800240"/>
+            <a:ext cx="4891320" cy="4799880"/>
           </a:xfrm>
           <a:prstGeom prst="roundRect">
             <a:avLst>
@@ -2344,7 +2404,7 @@
       </p:sp>
       <p:pic>
         <p:nvPicPr>
-          <p:cNvPr id="80" name="diagrams/services_class.png"/>
+          <p:cNvPr id="80" name="diagrams/Controllers Class Diagram.png"/>
           <p:cNvPicPr/>
           <p:nvPr/>
         </p:nvPicPr>
@@ -2354,8 +2414,8 @@
         </p:blipFill>
         <p:spPr>
           <a:xfrm>
-            <a:off x="6473880" y="1353240"/>
-            <a:ext cx="4754520" cy="3236400"/>
+            <a:off x="6480000" y="2340000"/>
+            <a:ext cx="4754160" cy="2413800"/>
           </a:xfrm>
           <a:prstGeom prst="rect">
             <a:avLst/>
@@ -2375,7 +2435,7 @@
         <p:spPr>
           <a:xfrm>
             <a:off x="10625400" y="6473880"/>
-            <a:ext cx="639720" cy="228240"/>
+            <a:ext cx="639360" cy="227880"/>
           </a:xfrm>
           <a:prstGeom prst="rect">
             <a:avLst/>
@@ -2472,7 +2532,7 @@
         <p:spPr>
           <a:xfrm>
             <a:off x="0" y="0"/>
-            <a:ext cx="12191760" cy="6857640"/>
+            <a:ext cx="12191400" cy="6857280"/>
           </a:xfrm>
           <a:prstGeom prst="rect">
             <a:avLst/>
@@ -2518,7 +2578,7 @@
         <p:spPr>
           <a:xfrm>
             <a:off x="0" y="0"/>
-            <a:ext cx="12191760" cy="959760"/>
+            <a:ext cx="12191400" cy="959400"/>
           </a:xfrm>
           <a:prstGeom prst="rect">
             <a:avLst/>
@@ -2564,7 +2624,7 @@
         <p:spPr>
           <a:xfrm>
             <a:off x="0" y="960120"/>
-            <a:ext cx="164160" cy="5897520"/>
+            <a:ext cx="163800" cy="5897160"/>
           </a:xfrm>
           <a:prstGeom prst="rect">
             <a:avLst/>
@@ -2586,7 +2646,7 @@
           <a:fontRef idx="minor"/>
         </p:style>
         <p:txBody>
-          <a:bodyPr lIns="90000" tIns="45000" rIns="90000" bIns="45000" anchor="t">
+          <a:bodyPr lIns="82080" tIns="45000" rIns="82080" bIns="45000" anchor="t">
             <a:noAutofit/>
           </a:bodyPr>
           <a:p>
@@ -2610,7 +2670,7 @@
         <p:spPr>
           <a:xfrm>
             <a:off x="502920" y="201240"/>
-            <a:ext cx="10881000" cy="658080"/>
+            <a:ext cx="10880640" cy="657720"/>
           </a:xfrm>
           <a:prstGeom prst="rect">
             <a:avLst/>
@@ -2648,7 +2708,7 @@
                 <a:uFillTx/>
                 <a:latin typeface="Arial"/>
               </a:rPr>
-              <a:t>Аналитика и отчеты</a:t>
+              <a:t>Интерфейс: главная страница</a:t>
             </a:r>
             <a:endParaRPr lang="ru-RU" sz="3300" b="0" u="none" strike="noStrike">
               <a:solidFill>
@@ -2670,7 +2730,7 @@
         <p:spPr>
           <a:xfrm>
             <a:off x="685800" y="1234440"/>
-            <a:ext cx="10195200" cy="4891680"/>
+            <a:ext cx="5531400" cy="4891320"/>
           </a:xfrm>
           <a:prstGeom prst="roundRect">
             <a:avLst>
@@ -2698,7 +2758,7 @@
             <a:noAutofit/>
           </a:bodyPr>
           <a:p>
-            <a:pPr indent="-180000">
+            <a:pPr marL="216000" indent="-180000">
               <a:lnSpc>
                 <a:spcPct val="100000"/>
               </a:lnSpc>
@@ -2717,7 +2777,7 @@
                 <a:uFillTx/>
                 <a:latin typeface="Arial"/>
               </a:rPr>
-              <a:t>Популярность тренировок</a:t>
+              <a:t>Публичный экран приложения до входа</a:t>
             </a:r>
             <a:endParaRPr lang="ru-RU" sz="2150" b="0" u="none" strike="noStrike">
               <a:solidFill>
@@ -2729,7 +2789,7 @@
             </a:endParaRPr>
           </a:p>
           <a:p>
-            <a:pPr indent="-180000">
+            <a:pPr marL="216000" indent="-180000">
               <a:lnSpc>
                 <a:spcPct val="100000"/>
               </a:lnSpc>
@@ -2748,7 +2808,7 @@
                 <a:uFillTx/>
                 <a:latin typeface="Arial"/>
               </a:rPr>
-              <a:t>Загрузка тренеров</a:t>
+              <a:t>Доступ к тренировкам, входу и регистрации</a:t>
             </a:r>
             <a:endParaRPr lang="ru-RU" sz="2150" b="0" u="none" strike="noStrike">
               <a:solidFill>
@@ -2760,7 +2820,7 @@
             </a:endParaRPr>
           </a:p>
           <a:p>
-            <a:pPr indent="-180000">
+            <a:pPr marL="216000" indent="-180000">
               <a:lnSpc>
                 <a:spcPct val="100000"/>
               </a:lnSpc>
@@ -2779,7 +2839,7 @@
                 <a:uFillTx/>
                 <a:latin typeface="Arial"/>
               </a:rPr>
-              <a:t>Посещаемость</a:t>
+              <a:t>Визуальное представление пользовательского сервиса</a:t>
             </a:r>
             <a:endParaRPr lang="ru-RU" sz="2150" b="0" u="none" strike="noStrike">
               <a:solidFill>
@@ -2790,111 +2850,90 @@
               <a:latin typeface="Arial"/>
             </a:endParaRPr>
           </a:p>
-          <a:p>
-            <a:pPr indent="-180000">
-              <a:lnSpc>
-                <a:spcPct val="100000"/>
-              </a:lnSpc>
-              <a:buClr>
-                <a:srgbClr val="111827"/>
-              </a:buClr>
-              <a:buFont typeface="Symbol" charset="2"/>
-              <a:buChar char=""/>
-            </a:pPr>
-            <a:r>
-              <a:rPr lang="ru-RU" sz="2150" b="0" u="none" strike="noStrike">
-                <a:solidFill>
-                  <a:srgbClr val="111827"/>
-                </a:solidFill>
-                <a:effectLst/>
-                <a:uFillTx/>
-                <a:latin typeface="Arial"/>
-              </a:rPr>
-              <a:t>Выбор периода отчета</a:t>
-            </a:r>
-            <a:endParaRPr lang="ru-RU" sz="2150" b="0" u="none" strike="noStrike">
-              <a:solidFill>
-                <a:srgbClr val="000000"/>
-              </a:solidFill>
-              <a:effectLst/>
-              <a:uFillTx/>
-              <a:latin typeface="Arial"/>
-            </a:endParaRPr>
-          </a:p>
-          <a:p>
-            <a:pPr indent="-180000">
-              <a:lnSpc>
-                <a:spcPct val="100000"/>
-              </a:lnSpc>
-              <a:buClr>
-                <a:srgbClr val="111827"/>
-              </a:buClr>
-              <a:buFont typeface="Symbol" charset="2"/>
-              <a:buChar char=""/>
-            </a:pPr>
-            <a:r>
-              <a:rPr lang="ru-RU" sz="2150" b="0" u="none" strike="noStrike">
-                <a:solidFill>
-                  <a:srgbClr val="111827"/>
-                </a:solidFill>
-                <a:effectLst/>
-                <a:uFillTx/>
-                <a:latin typeface="Arial"/>
-              </a:rPr>
-              <a:t>Экспорт в PDF и Excel</a:t>
-            </a:r>
-            <a:endParaRPr lang="ru-RU" sz="2150" b="0" u="none" strike="noStrike">
-              <a:solidFill>
-                <a:srgbClr val="000000"/>
-              </a:solidFill>
-              <a:effectLst/>
-              <a:uFillTx/>
-              <a:latin typeface="Arial"/>
-            </a:endParaRPr>
-          </a:p>
-          <a:p>
-            <a:pPr indent="-180000">
-              <a:lnSpc>
-                <a:spcPct val="100000"/>
-              </a:lnSpc>
-              <a:buClr>
-                <a:srgbClr val="111827"/>
-              </a:buClr>
-              <a:buFont typeface="Symbol" charset="2"/>
-              <a:buChar char=""/>
-            </a:pPr>
-            <a:r>
-              <a:rPr lang="ru-RU" sz="2150" b="0" u="none" strike="noStrike">
-                <a:solidFill>
-                  <a:srgbClr val="111827"/>
-                </a:solidFill>
-                <a:effectLst/>
-                <a:uFillTx/>
-                <a:latin typeface="Arial"/>
-              </a:rPr>
-              <a:t>Поддержка управленческих решений</a:t>
-            </a:r>
-            <a:endParaRPr lang="ru-RU" sz="2150" b="0" u="none" strike="noStrike">
-              <a:solidFill>
-                <a:srgbClr val="000000"/>
-              </a:solidFill>
-              <a:effectLst/>
-              <a:uFillTx/>
-              <a:latin typeface="Arial"/>
-            </a:endParaRPr>
-          </a:p>
-        </p:txBody>
-      </p:sp>
-      <p:sp>
-        <p:nvSpPr>
-          <p:cNvPr id="87" name="Footer"/>
+        </p:txBody>
+      </p:sp>
+      <p:sp>
+        <p:nvSpPr>
+          <p:cNvPr id="87" name="ImageFrame"/>
+          <p:cNvSpPr/>
+          <p:nvPr/>
+        </p:nvSpPr>
+        <p:spPr>
+          <a:xfrm>
+            <a:off x="6400800" y="1207080"/>
+            <a:ext cx="4891320" cy="4799880"/>
+          </a:xfrm>
+          <a:prstGeom prst="roundRect">
+            <a:avLst>
+              <a:gd name="adj" fmla="val 16667"/>
+            </a:avLst>
+          </a:prstGeom>
+          <a:solidFill>
+            <a:srgbClr val="FFFFFF"/>
+          </a:solidFill>
+          <a:ln w="12700">
+            <a:solidFill>
+              <a:srgbClr val="CBD5E1"/>
+            </a:solidFill>
+            <a:round/>
+          </a:ln>
+        </p:spPr>
+        <p:style>
+          <a:lnRef idx="0"/>
+          <a:fillRef idx="0"/>
+          <a:effectRef idx="0"/>
+          <a:fontRef idx="minor"/>
+        </p:style>
+        <p:txBody>
+          <a:bodyPr lIns="90000" tIns="45000" rIns="90000" bIns="45000" anchor="t">
+            <a:noAutofit/>
+          </a:bodyPr>
+          <a:p>
+            <a:endParaRPr lang="ru-RU" sz="1800" b="0" u="none" strike="noStrike">
+              <a:solidFill>
+                <a:srgbClr val="000000"/>
+              </a:solidFill>
+              <a:effectLst/>
+              <a:uFillTx/>
+              <a:latin typeface="Arial"/>
+            </a:endParaRPr>
+          </a:p>
+        </p:txBody>
+      </p:sp>
+      <p:pic>
+        <p:nvPicPr>
+          <p:cNvPr id="88" name="docs/screenshots/homepage.png"/>
+          <p:cNvPicPr/>
+          <p:nvPr/>
+        </p:nvPicPr>
+        <p:blipFill>
+          <a:blip r:embed="rId1"/>
+          <a:stretch/>
+        </p:blipFill>
+        <p:spPr>
+          <a:xfrm>
+            <a:off x="6473880" y="1980000"/>
+            <a:ext cx="4754160" cy="3134520"/>
+          </a:xfrm>
+          <a:prstGeom prst="rect">
+            <a:avLst/>
+          </a:prstGeom>
+          <a:noFill/>
+          <a:ln w="0">
+            <a:noFill/>
+          </a:ln>
+        </p:spPr>
+      </p:pic>
+      <p:sp>
+        <p:nvSpPr>
+          <p:cNvPr id="89" name="Footer"/>
           <p:cNvSpPr/>
           <p:nvPr/>
         </p:nvSpPr>
         <p:spPr>
           <a:xfrm>
             <a:off x="10625400" y="6473880"/>
-            <a:ext cx="639720" cy="228240"/>
+            <a:ext cx="639360" cy="227880"/>
           </a:xfrm>
           <a:prstGeom prst="rect">
             <a:avLst/>
@@ -2984,14 +3023,14 @@
       </p:grpSpPr>
       <p:sp>
         <p:nvSpPr>
-          <p:cNvPr id="88" name="Background"/>
+          <p:cNvPr id="90" name="Background"/>
           <p:cNvSpPr/>
           <p:nvPr/>
         </p:nvSpPr>
         <p:spPr>
           <a:xfrm>
             <a:off x="0" y="0"/>
-            <a:ext cx="12191760" cy="6857640"/>
+            <a:ext cx="12191400" cy="6857280"/>
           </a:xfrm>
           <a:prstGeom prst="rect">
             <a:avLst/>
@@ -3030,14 +3069,14 @@
       </p:sp>
       <p:sp>
         <p:nvSpPr>
-          <p:cNvPr id="89" name="Header"/>
+          <p:cNvPr id="91" name="Header"/>
           <p:cNvSpPr/>
           <p:nvPr/>
         </p:nvSpPr>
         <p:spPr>
           <a:xfrm>
             <a:off x="0" y="0"/>
-            <a:ext cx="12191760" cy="959760"/>
+            <a:ext cx="12191400" cy="959400"/>
           </a:xfrm>
           <a:prstGeom prst="rect">
             <a:avLst/>
@@ -3076,14 +3115,14 @@
       </p:sp>
       <p:sp>
         <p:nvSpPr>
-          <p:cNvPr id="90" name="Accent"/>
+          <p:cNvPr id="92" name="Accent"/>
           <p:cNvSpPr/>
           <p:nvPr/>
         </p:nvSpPr>
         <p:spPr>
           <a:xfrm>
             <a:off x="0" y="960120"/>
-            <a:ext cx="164160" cy="5897520"/>
+            <a:ext cx="163800" cy="5897160"/>
           </a:xfrm>
           <a:prstGeom prst="rect">
             <a:avLst/>
@@ -3105,7 +3144,7 @@
           <a:fontRef idx="minor"/>
         </p:style>
         <p:txBody>
-          <a:bodyPr lIns="90000" tIns="45000" rIns="90000" bIns="45000" anchor="t">
+          <a:bodyPr lIns="82080" tIns="45000" rIns="82080" bIns="45000" anchor="t">
             <a:noAutofit/>
           </a:bodyPr>
           <a:p>
@@ -3122,14 +3161,14 @@
       </p:sp>
       <p:sp>
         <p:nvSpPr>
-          <p:cNvPr id="91" name="Title"/>
+          <p:cNvPr id="93" name="Title"/>
           <p:cNvSpPr/>
           <p:nvPr/>
         </p:nvSpPr>
         <p:spPr>
           <a:xfrm>
             <a:off x="502920" y="201240"/>
-            <a:ext cx="10881000" cy="658080"/>
+            <a:ext cx="10880640" cy="657720"/>
           </a:xfrm>
           <a:prstGeom prst="rect">
             <a:avLst/>
@@ -3167,7 +3206,7 @@
                 <a:uFillTx/>
                 <a:latin typeface="Arial"/>
               </a:rPr>
-              <a:t>Тестирование</a:t>
+              <a:t>Интерфейс: посетитель</a:t>
             </a:r>
             <a:endParaRPr lang="ru-RU" sz="3300" b="0" u="none" strike="noStrike">
               <a:solidFill>
@@ -3182,14 +3221,14 @@
       </p:sp>
       <p:sp>
         <p:nvSpPr>
-          <p:cNvPr id="92" name="Content"/>
+          <p:cNvPr id="94" name="Content"/>
           <p:cNvSpPr/>
           <p:nvPr/>
         </p:nvSpPr>
         <p:spPr>
           <a:xfrm>
             <a:off x="685800" y="1234440"/>
-            <a:ext cx="5531760" cy="4891680"/>
+            <a:ext cx="5531400" cy="4891320"/>
           </a:xfrm>
           <a:prstGeom prst="roundRect">
             <a:avLst>
@@ -3217,7 +3256,7 @@
             <a:noAutofit/>
           </a:bodyPr>
           <a:p>
-            <a:pPr indent="-180000">
+            <a:pPr marL="216000" indent="-180000">
               <a:lnSpc>
                 <a:spcPct val="100000"/>
               </a:lnSpc>
@@ -3236,7 +3275,7 @@
                 <a:uFillTx/>
                 <a:latin typeface="Arial"/>
               </a:rPr>
-              <a:t>pytest и тестовая SQLite БД в памяти</a:t>
+              <a:t>Главная страница после авторизации</a:t>
             </a:r>
             <a:endParaRPr lang="ru-RU" sz="2150" b="0" u="none" strike="noStrike">
               <a:solidFill>
@@ -3248,7 +3287,7 @@
             </a:endParaRPr>
           </a:p>
           <a:p>
-            <a:pPr indent="-180000">
+            <a:pPr marL="216000" indent="-180000">
               <a:lnSpc>
                 <a:spcPct val="100000"/>
               </a:lnSpc>
@@ -3267,7 +3306,7 @@
                 <a:uFillTx/>
                 <a:latin typeface="Arial"/>
               </a:rPr>
-              <a:t>Проверка главной страницы, входа и регистрации</a:t>
+              <a:t>Доступны тренировки, план, расписание и абонементы</a:t>
             </a:r>
             <a:endParaRPr lang="ru-RU" sz="2150" b="0" u="none" strike="noStrike">
               <a:solidFill>
@@ -3279,7 +3318,7 @@
             </a:endParaRPr>
           </a:p>
           <a:p>
-            <a:pPr indent="-180000">
+            <a:pPr marL="216000" indent="-180000">
               <a:lnSpc>
                 <a:spcPct val="100000"/>
               </a:lnSpc>
@@ -3298,7 +3337,7 @@
                 <a:uFillTx/>
                 <a:latin typeface="Arial"/>
               </a:rPr>
-              <a:t>Проверка пользовательских маршрутов</a:t>
+              <a:t>Верхнее меню отражает роль обычного пользователя</a:t>
             </a:r>
             <a:endParaRPr lang="ru-RU" sz="2150" b="0" u="none" strike="noStrike">
               <a:solidFill>
@@ -3309,80 +3348,18 @@
               <a:latin typeface="Arial"/>
             </a:endParaRPr>
           </a:p>
-          <a:p>
-            <a:pPr indent="-180000">
-              <a:lnSpc>
-                <a:spcPct val="100000"/>
-              </a:lnSpc>
-              <a:buClr>
-                <a:srgbClr val="111827"/>
-              </a:buClr>
-              <a:buFont typeface="Symbol" charset="2"/>
-              <a:buChar char=""/>
-            </a:pPr>
-            <a:r>
-              <a:rPr lang="ru-RU" sz="2150" b="0" u="none" strike="noStrike">
-                <a:solidFill>
-                  <a:srgbClr val="111827"/>
-                </a:solidFill>
-                <a:effectLst/>
-                <a:uFillTx/>
-                <a:latin typeface="Arial"/>
-              </a:rPr>
-              <a:t>Проверка административного доступа</a:t>
-            </a:r>
-            <a:endParaRPr lang="ru-RU" sz="2150" b="0" u="none" strike="noStrike">
-              <a:solidFill>
-                <a:srgbClr val="000000"/>
-              </a:solidFill>
-              <a:effectLst/>
-              <a:uFillTx/>
-              <a:latin typeface="Arial"/>
-            </a:endParaRPr>
-          </a:p>
-          <a:p>
-            <a:pPr indent="-180000">
-              <a:lnSpc>
-                <a:spcPct val="100000"/>
-              </a:lnSpc>
-              <a:buClr>
-                <a:srgbClr val="111827"/>
-              </a:buClr>
-              <a:buFont typeface="Symbol" charset="2"/>
-              <a:buChar char=""/>
-            </a:pPr>
-            <a:r>
-              <a:rPr lang="ru-RU" sz="2150" b="0" u="none" strike="noStrike">
-                <a:solidFill>
-                  <a:srgbClr val="111827"/>
-                </a:solidFill>
-                <a:effectLst/>
-                <a:uFillTx/>
-                <a:latin typeface="Arial"/>
-              </a:rPr>
-              <a:t>Проверка моделей User, Workout и Booking</a:t>
-            </a:r>
-            <a:endParaRPr lang="ru-RU" sz="2150" b="0" u="none" strike="noStrike">
-              <a:solidFill>
-                <a:srgbClr val="000000"/>
-              </a:solidFill>
-              <a:effectLst/>
-              <a:uFillTx/>
-              <a:latin typeface="Arial"/>
-            </a:endParaRPr>
-          </a:p>
-        </p:txBody>
-      </p:sp>
-      <p:sp>
-        <p:nvSpPr>
-          <p:cNvPr id="93" name="ImageFrame"/>
+        </p:txBody>
+      </p:sp>
+      <p:sp>
+        <p:nvSpPr>
+          <p:cNvPr id="95" name="ImageFrame"/>
           <p:cNvSpPr/>
           <p:nvPr/>
         </p:nvSpPr>
         <p:spPr>
           <a:xfrm>
             <a:off x="6400800" y="1207080"/>
-            <a:ext cx="4891680" cy="4800240"/>
+            <a:ext cx="4891320" cy="4799880"/>
           </a:xfrm>
           <a:prstGeom prst="roundRect">
             <a:avLst>
@@ -3423,7 +3400,7 @@
       </p:sp>
       <p:pic>
         <p:nvPicPr>
-          <p:cNvPr id="94" name="diagrams/tests_class.png"/>
+          <p:cNvPr id="96" name="docs/screenshots/homepage_user.png"/>
           <p:cNvPicPr/>
           <p:nvPr/>
         </p:nvPicPr>
@@ -3433,8 +3410,8 @@
         </p:blipFill>
         <p:spPr>
           <a:xfrm>
-            <a:off x="6473880" y="1353240"/>
-            <a:ext cx="4754520" cy="3583080"/>
+            <a:off x="6473880" y="1980000"/>
+            <a:ext cx="4754160" cy="3134520"/>
           </a:xfrm>
           <a:prstGeom prst="rect">
             <a:avLst/>
@@ -3447,14 +3424,14 @@
       </p:pic>
       <p:sp>
         <p:nvSpPr>
-          <p:cNvPr id="95" name="Footer"/>
+          <p:cNvPr id="97" name="Footer"/>
           <p:cNvSpPr/>
           <p:nvPr/>
         </p:nvSpPr>
         <p:spPr>
           <a:xfrm>
             <a:off x="10625400" y="6473880"/>
-            <a:ext cx="639720" cy="228240"/>
+            <a:ext cx="639360" cy="227880"/>
           </a:xfrm>
           <a:prstGeom prst="rect">
             <a:avLst/>
@@ -3544,14 +3521,14 @@
       </p:grpSpPr>
       <p:sp>
         <p:nvSpPr>
-          <p:cNvPr id="96" name="Background"/>
+          <p:cNvPr id="98" name="Background"/>
           <p:cNvSpPr/>
           <p:nvPr/>
         </p:nvSpPr>
         <p:spPr>
           <a:xfrm>
             <a:off x="0" y="0"/>
-            <a:ext cx="12191760" cy="6857640"/>
+            <a:ext cx="12191400" cy="6857280"/>
           </a:xfrm>
           <a:prstGeom prst="rect">
             <a:avLst/>
@@ -3590,14 +3567,14 @@
       </p:sp>
       <p:sp>
         <p:nvSpPr>
-          <p:cNvPr id="97" name="Header"/>
+          <p:cNvPr id="99" name="Header"/>
           <p:cNvSpPr/>
           <p:nvPr/>
         </p:nvSpPr>
         <p:spPr>
           <a:xfrm>
             <a:off x="0" y="0"/>
-            <a:ext cx="12191760" cy="959760"/>
+            <a:ext cx="12191400" cy="959400"/>
           </a:xfrm>
           <a:prstGeom prst="rect">
             <a:avLst/>
@@ -3636,14 +3613,14 @@
       </p:sp>
       <p:sp>
         <p:nvSpPr>
-          <p:cNvPr id="98" name="Accent"/>
+          <p:cNvPr id="100" name="Accent"/>
           <p:cNvSpPr/>
           <p:nvPr/>
         </p:nvSpPr>
         <p:spPr>
           <a:xfrm>
             <a:off x="0" y="960120"/>
-            <a:ext cx="164160" cy="5897520"/>
+            <a:ext cx="163800" cy="5897160"/>
           </a:xfrm>
           <a:prstGeom prst="rect">
             <a:avLst/>
@@ -3665,7 +3642,7 @@
           <a:fontRef idx="minor"/>
         </p:style>
         <p:txBody>
-          <a:bodyPr lIns="90000" tIns="45000" rIns="90000" bIns="45000" anchor="t">
+          <a:bodyPr lIns="82080" tIns="45000" rIns="82080" bIns="45000" anchor="t">
             <a:noAutofit/>
           </a:bodyPr>
           <a:p>
@@ -3682,14 +3659,14 @@
       </p:sp>
       <p:sp>
         <p:nvSpPr>
-          <p:cNvPr id="99" name="Title"/>
+          <p:cNvPr id="101" name="Title"/>
           <p:cNvSpPr/>
           <p:nvPr/>
         </p:nvSpPr>
         <p:spPr>
           <a:xfrm>
             <a:off x="502920" y="201240"/>
-            <a:ext cx="10881000" cy="658080"/>
+            <a:ext cx="10880640" cy="657720"/>
           </a:xfrm>
           <a:prstGeom prst="rect">
             <a:avLst/>
@@ -3727,7 +3704,7 @@
                 <a:uFillTx/>
                 <a:latin typeface="Arial"/>
               </a:rPr>
-              <a:t>Результат разработки</a:t>
+              <a:t>Интерфейс: тренировки</a:t>
             </a:r>
             <a:endParaRPr lang="ru-RU" sz="3300" b="0" u="none" strike="noStrike">
               <a:solidFill>
@@ -3742,14 +3719,14 @@
       </p:sp>
       <p:sp>
         <p:nvSpPr>
-          <p:cNvPr id="100" name="Content"/>
+          <p:cNvPr id="102" name="Content"/>
           <p:cNvSpPr/>
           <p:nvPr/>
         </p:nvSpPr>
         <p:spPr>
           <a:xfrm>
             <a:off x="685800" y="1234440"/>
-            <a:ext cx="10195200" cy="4891680"/>
+            <a:ext cx="5531400" cy="4891320"/>
           </a:xfrm>
           <a:prstGeom prst="roundRect">
             <a:avLst>
@@ -3777,7 +3754,7 @@
             <a:noAutofit/>
           </a:bodyPr>
           <a:p>
-            <a:pPr indent="-180000">
+            <a:pPr marL="216000" indent="-180000">
               <a:lnSpc>
                 <a:spcPct val="100000"/>
               </a:lnSpc>
@@ -3796,7 +3773,7 @@
                 <a:uFillTx/>
                 <a:latin typeface="Arial"/>
               </a:rPr>
-              <a:t>Создана веб-ИС для фитнес-клуба</a:t>
+              <a:t>Экран от лица посетителя</a:t>
             </a:r>
             <a:endParaRPr lang="ru-RU" sz="2150" b="0" u="none" strike="noStrike">
               <a:solidFill>
@@ -3808,7 +3785,7 @@
             </a:endParaRPr>
           </a:p>
           <a:p>
-            <a:pPr indent="-180000">
+            <a:pPr marL="216000" indent="-180000">
               <a:lnSpc>
                 <a:spcPct val="100000"/>
               </a:lnSpc>
@@ -3827,7 +3804,7 @@
                 <a:uFillTx/>
                 <a:latin typeface="Arial"/>
               </a:rPr>
-              <a:t>Снижена ручная нагрузка администратора</a:t>
+              <a:t>Показаны уведомления и пользовательские действия</a:t>
             </a:r>
             <a:endParaRPr lang="ru-RU" sz="2150" b="0" u="none" strike="noStrike">
               <a:solidFill>
@@ -3839,7 +3816,7 @@
             </a:endParaRPr>
           </a:p>
           <a:p>
-            <a:pPr indent="-180000">
+            <a:pPr marL="216000" indent="-180000">
               <a:lnSpc>
                 <a:spcPct val="100000"/>
               </a:lnSpc>
@@ -3858,7 +3835,7 @@
                 <a:uFillTx/>
                 <a:latin typeface="Arial"/>
               </a:rPr>
-              <a:t>Централизованы расписание, клиенты и абонементы</a:t>
+              <a:t>Сценарий ведет клиента к подбору плана и записи</a:t>
             </a:r>
             <a:endParaRPr lang="ru-RU" sz="2150" b="0" u="none" strike="noStrike">
               <a:solidFill>
@@ -3869,80 +3846,90 @@
               <a:latin typeface="Arial"/>
             </a:endParaRPr>
           </a:p>
-          <a:p>
-            <a:pPr indent="-180000">
-              <a:lnSpc>
-                <a:spcPct val="100000"/>
-              </a:lnSpc>
-              <a:buClr>
-                <a:srgbClr val="111827"/>
-              </a:buClr>
-              <a:buFont typeface="Symbol" charset="2"/>
-              <a:buChar char=""/>
-            </a:pPr>
-            <a:r>
-              <a:rPr lang="ru-RU" sz="2150" b="0" u="none" strike="noStrike">
-                <a:solidFill>
-                  <a:srgbClr val="111827"/>
-                </a:solidFill>
-                <a:effectLst/>
-                <a:uFillTx/>
-                <a:latin typeface="Arial"/>
-              </a:rPr>
-              <a:t>Добавлены аналитика и отчетность</a:t>
-            </a:r>
-            <a:endParaRPr lang="ru-RU" sz="2150" b="0" u="none" strike="noStrike">
-              <a:solidFill>
-                <a:srgbClr val="000000"/>
-              </a:solidFill>
-              <a:effectLst/>
-              <a:uFillTx/>
-              <a:latin typeface="Arial"/>
-            </a:endParaRPr>
-          </a:p>
-          <a:p>
-            <a:pPr indent="-180000">
-              <a:lnSpc>
-                <a:spcPct val="100000"/>
-              </a:lnSpc>
-              <a:buClr>
-                <a:srgbClr val="111827"/>
-              </a:buClr>
-              <a:buFont typeface="Symbol" charset="2"/>
-              <a:buChar char=""/>
-            </a:pPr>
-            <a:r>
-              <a:rPr lang="ru-RU" sz="2150" b="0" u="none" strike="noStrike">
-                <a:solidFill>
-                  <a:srgbClr val="111827"/>
-                </a:solidFill>
-                <a:effectLst/>
-                <a:uFillTx/>
-                <a:latin typeface="Arial"/>
-              </a:rPr>
-              <a:t>Архитектура допускает дальнейшее развитие</a:t>
-            </a:r>
-            <a:endParaRPr lang="ru-RU" sz="2150" b="0" u="none" strike="noStrike">
-              <a:solidFill>
-                <a:srgbClr val="000000"/>
-              </a:solidFill>
-              <a:effectLst/>
-              <a:uFillTx/>
-              <a:latin typeface="Arial"/>
-            </a:endParaRPr>
-          </a:p>
-        </p:txBody>
-      </p:sp>
-      <p:sp>
-        <p:nvSpPr>
-          <p:cNvPr id="101" name="Footer"/>
+        </p:txBody>
+      </p:sp>
+      <p:sp>
+        <p:nvSpPr>
+          <p:cNvPr id="103" name="ImageFrame"/>
+          <p:cNvSpPr/>
+          <p:nvPr/>
+        </p:nvSpPr>
+        <p:spPr>
+          <a:xfrm>
+            <a:off x="6400800" y="1207080"/>
+            <a:ext cx="4891320" cy="4799880"/>
+          </a:xfrm>
+          <a:prstGeom prst="roundRect">
+            <a:avLst>
+              <a:gd name="adj" fmla="val 16667"/>
+            </a:avLst>
+          </a:prstGeom>
+          <a:solidFill>
+            <a:srgbClr val="FFFFFF"/>
+          </a:solidFill>
+          <a:ln w="12700">
+            <a:solidFill>
+              <a:srgbClr val="CBD5E1"/>
+            </a:solidFill>
+            <a:round/>
+          </a:ln>
+        </p:spPr>
+        <p:style>
+          <a:lnRef idx="0"/>
+          <a:fillRef idx="0"/>
+          <a:effectRef idx="0"/>
+          <a:fontRef idx="minor"/>
+        </p:style>
+        <p:txBody>
+          <a:bodyPr lIns="90000" tIns="45000" rIns="90000" bIns="45000" anchor="t">
+            <a:noAutofit/>
+          </a:bodyPr>
+          <a:p>
+            <a:endParaRPr lang="ru-RU" sz="1800" b="0" u="none" strike="noStrike">
+              <a:solidFill>
+                <a:srgbClr val="000000"/>
+              </a:solidFill>
+              <a:effectLst/>
+              <a:uFillTx/>
+              <a:latin typeface="Arial"/>
+            </a:endParaRPr>
+          </a:p>
+        </p:txBody>
+      </p:sp>
+      <p:pic>
+        <p:nvPicPr>
+          <p:cNvPr id="104" name="docs/screenshots/visitor_workouts.png"/>
+          <p:cNvPicPr/>
+          <p:nvPr/>
+        </p:nvPicPr>
+        <p:blipFill>
+          <a:blip r:embed="rId1"/>
+          <a:stretch/>
+        </p:blipFill>
+        <p:spPr>
+          <a:xfrm>
+            <a:off x="6480000" y="1980000"/>
+            <a:ext cx="4754160" cy="3134520"/>
+          </a:xfrm>
+          <a:prstGeom prst="rect">
+            <a:avLst/>
+          </a:prstGeom>
+          <a:noFill/>
+          <a:ln w="0">
+            <a:noFill/>
+          </a:ln>
+        </p:spPr>
+      </p:pic>
+      <p:sp>
+        <p:nvSpPr>
+          <p:cNvPr id="105" name="Footer"/>
           <p:cNvSpPr/>
           <p:nvPr/>
         </p:nvSpPr>
         <p:spPr>
           <a:xfrm>
             <a:off x="10625400" y="6473880"/>
-            <a:ext cx="639720" cy="228240"/>
+            <a:ext cx="639360" cy="227880"/>
           </a:xfrm>
           <a:prstGeom prst="rect">
             <a:avLst/>
@@ -4032,14 +4019,14 @@
       </p:grpSpPr>
       <p:sp>
         <p:nvSpPr>
-          <p:cNvPr id="102" name="Background"/>
+          <p:cNvPr id="106" name="Background"/>
           <p:cNvSpPr/>
           <p:nvPr/>
         </p:nvSpPr>
         <p:spPr>
           <a:xfrm>
             <a:off x="0" y="0"/>
-            <a:ext cx="12191760" cy="6857640"/>
+            <a:ext cx="12191400" cy="6857280"/>
           </a:xfrm>
           <a:prstGeom prst="rect">
             <a:avLst/>
@@ -4078,14 +4065,14 @@
       </p:sp>
       <p:sp>
         <p:nvSpPr>
-          <p:cNvPr id="103" name="Header"/>
+          <p:cNvPr id="107" name="Header"/>
           <p:cNvSpPr/>
           <p:nvPr/>
         </p:nvSpPr>
         <p:spPr>
           <a:xfrm>
             <a:off x="0" y="0"/>
-            <a:ext cx="12191760" cy="959760"/>
+            <a:ext cx="12191400" cy="959400"/>
           </a:xfrm>
           <a:prstGeom prst="rect">
             <a:avLst/>
@@ -4124,14 +4111,14 @@
       </p:sp>
       <p:sp>
         <p:nvSpPr>
-          <p:cNvPr id="104" name="Accent"/>
+          <p:cNvPr id="108" name="Accent"/>
           <p:cNvSpPr/>
           <p:nvPr/>
         </p:nvSpPr>
         <p:spPr>
           <a:xfrm>
             <a:off x="0" y="960120"/>
-            <a:ext cx="164160" cy="5897520"/>
+            <a:ext cx="163800" cy="5897160"/>
           </a:xfrm>
           <a:prstGeom prst="rect">
             <a:avLst/>
@@ -4153,7 +4140,7 @@
           <a:fontRef idx="minor"/>
         </p:style>
         <p:txBody>
-          <a:bodyPr lIns="90000" tIns="45000" rIns="90000" bIns="45000" anchor="t">
+          <a:bodyPr lIns="82080" tIns="45000" rIns="82080" bIns="45000" anchor="t">
             <a:noAutofit/>
           </a:bodyPr>
           <a:p>
@@ -4170,14 +4157,14 @@
       </p:sp>
       <p:sp>
         <p:nvSpPr>
-          <p:cNvPr id="105" name="Title"/>
+          <p:cNvPr id="109" name="Title"/>
           <p:cNvSpPr/>
           <p:nvPr/>
         </p:nvSpPr>
         <p:spPr>
           <a:xfrm>
             <a:off x="502920" y="201240"/>
-            <a:ext cx="10881000" cy="658080"/>
+            <a:ext cx="10880640" cy="657720"/>
           </a:xfrm>
           <a:prstGeom prst="rect">
             <a:avLst/>
@@ -4215,7 +4202,7 @@
                 <a:uFillTx/>
                 <a:latin typeface="Arial"/>
               </a:rPr>
-              <a:t>Заключение</a:t>
+              <a:t>Интерфейс: администратор</a:t>
             </a:r>
             <a:endParaRPr lang="ru-RU" sz="3300" b="0" u="none" strike="noStrike">
               <a:solidFill>
@@ -4230,14 +4217,14 @@
       </p:sp>
       <p:sp>
         <p:nvSpPr>
-          <p:cNvPr id="106" name="Content"/>
+          <p:cNvPr id="110" name="Content"/>
           <p:cNvSpPr/>
           <p:nvPr/>
         </p:nvSpPr>
         <p:spPr>
           <a:xfrm>
             <a:off x="685800" y="1234440"/>
-            <a:ext cx="10195200" cy="4891680"/>
+            <a:ext cx="5531400" cy="4891320"/>
           </a:xfrm>
           <a:prstGeom prst="roundRect">
             <a:avLst>
@@ -4265,7 +4252,7 @@
             <a:noAutofit/>
           </a:bodyPr>
           <a:p>
-            <a:pPr indent="-180000">
+            <a:pPr marL="216000" indent="-180000">
               <a:lnSpc>
                 <a:spcPct val="100000"/>
               </a:lnSpc>
@@ -4284,7 +4271,7 @@
                 <a:uFillTx/>
                 <a:latin typeface="Arial"/>
               </a:rPr>
-              <a:t>Цель ВКР достигнута</a:t>
+              <a:t>Административный режим после входа</a:t>
             </a:r>
             <a:endParaRPr lang="ru-RU" sz="2150" b="0" u="none" strike="noStrike">
               <a:solidFill>
@@ -4296,7 +4283,7 @@
             </a:endParaRPr>
           </a:p>
           <a:p>
-            <a:pPr indent="-180000">
+            <a:pPr marL="216000" indent="-180000">
               <a:lnSpc>
                 <a:spcPct val="100000"/>
               </a:lnSpc>
@@ -4315,7 +4302,7 @@
                 <a:uFillTx/>
                 <a:latin typeface="Arial"/>
               </a:rPr>
-              <a:t>Разработаны пользовательская и административная части</a:t>
+              <a:t>Переходы к клиентам, тренировкам и аналитике</a:t>
             </a:r>
             <a:endParaRPr lang="ru-RU" sz="2150" b="0" u="none" strike="noStrike">
               <a:solidFill>
@@ -4327,7 +4314,7 @@
             </a:endParaRPr>
           </a:p>
           <a:p>
-            <a:pPr indent="-180000">
+            <a:pPr marL="216000" indent="-180000">
               <a:lnSpc>
                 <a:spcPct val="100000"/>
               </a:lnSpc>
@@ -4346,7 +4333,7 @@
                 <a:uFillTx/>
                 <a:latin typeface="Arial"/>
               </a:rPr>
-              <a:t>Реализованы абонементы, уведомления и отчеты</a:t>
+              <a:t>Раздел доступен только пользователю с ролью администратора</a:t>
             </a:r>
             <a:endParaRPr lang="ru-RU" sz="2150" b="0" u="none" strike="noStrike">
               <a:solidFill>
@@ -4357,8 +4344,413 @@
               <a:latin typeface="Arial"/>
             </a:endParaRPr>
           </a:p>
-          <a:p>
-            <a:pPr indent="-180000">
+        </p:txBody>
+      </p:sp>
+      <p:sp>
+        <p:nvSpPr>
+          <p:cNvPr id="111" name="ImageFrame"/>
+          <p:cNvSpPr/>
+          <p:nvPr/>
+        </p:nvSpPr>
+        <p:spPr>
+          <a:xfrm>
+            <a:off x="6400800" y="1207080"/>
+            <a:ext cx="4891320" cy="4799880"/>
+          </a:xfrm>
+          <a:prstGeom prst="roundRect">
+            <a:avLst>
+              <a:gd name="adj" fmla="val 16667"/>
+            </a:avLst>
+          </a:prstGeom>
+          <a:solidFill>
+            <a:srgbClr val="FFFFFF"/>
+          </a:solidFill>
+          <a:ln w="12700">
+            <a:solidFill>
+              <a:srgbClr val="CBD5E1"/>
+            </a:solidFill>
+            <a:round/>
+          </a:ln>
+        </p:spPr>
+        <p:style>
+          <a:lnRef idx="0"/>
+          <a:fillRef idx="0"/>
+          <a:effectRef idx="0"/>
+          <a:fontRef idx="minor"/>
+        </p:style>
+        <p:txBody>
+          <a:bodyPr lIns="90000" tIns="45000" rIns="90000" bIns="45000" anchor="t">
+            <a:noAutofit/>
+          </a:bodyPr>
+          <a:p>
+            <a:endParaRPr lang="ru-RU" sz="1800" b="0" u="none" strike="noStrike">
+              <a:solidFill>
+                <a:srgbClr val="000000"/>
+              </a:solidFill>
+              <a:effectLst/>
+              <a:uFillTx/>
+              <a:latin typeface="Arial"/>
+            </a:endParaRPr>
+          </a:p>
+        </p:txBody>
+      </p:sp>
+      <p:pic>
+        <p:nvPicPr>
+          <p:cNvPr id="112" name="docs/screenshots/admin_dashboard.png"/>
+          <p:cNvPicPr/>
+          <p:nvPr/>
+        </p:nvPicPr>
+        <p:blipFill>
+          <a:blip r:embed="rId1"/>
+          <a:stretch/>
+        </p:blipFill>
+        <p:spPr>
+          <a:xfrm>
+            <a:off x="6473880" y="1980000"/>
+            <a:ext cx="4754160" cy="3134520"/>
+          </a:xfrm>
+          <a:prstGeom prst="rect">
+            <a:avLst/>
+          </a:prstGeom>
+          <a:noFill/>
+          <a:ln w="0">
+            <a:noFill/>
+          </a:ln>
+        </p:spPr>
+      </p:pic>
+      <p:sp>
+        <p:nvSpPr>
+          <p:cNvPr id="113" name="Footer"/>
+          <p:cNvSpPr/>
+          <p:nvPr/>
+        </p:nvSpPr>
+        <p:spPr>
+          <a:xfrm>
+            <a:off x="10625400" y="6473880"/>
+            <a:ext cx="639360" cy="227880"/>
+          </a:xfrm>
+          <a:prstGeom prst="rect">
+            <a:avLst/>
+          </a:prstGeom>
+          <a:noFill/>
+          <a:ln w="0">
+            <a:noFill/>
+          </a:ln>
+        </p:spPr>
+        <p:style>
+          <a:lnRef idx="0"/>
+          <a:fillRef idx="0"/>
+          <a:effectRef idx="0"/>
+          <a:fontRef idx="minor"/>
+        </p:style>
+        <p:txBody>
+          <a:bodyPr lIns="180000" tIns="114120" rIns="180000" bIns="114120" anchor="t">
+            <a:noAutofit/>
+          </a:bodyPr>
+          <a:p>
+            <a:pPr>
+              <a:lnSpc>
+                <a:spcPct val="100000"/>
+              </a:lnSpc>
+              <a:tabLst>
+                <a:tab pos="0" algn="l"/>
+              </a:tabLst>
+            </a:pPr>
+            <a:r>
+              <a:rPr lang="ru-RU" sz="3300" b="0" u="none" strike="noStrike">
+                <a:solidFill>
+                  <a:srgbClr val="64748B"/>
+                </a:solidFill>
+                <a:effectLst/>
+                <a:uFillTx/>
+                <a:latin typeface="Arial"/>
+              </a:rPr>
+              <a:t>15</a:t>
+            </a:r>
+            <a:endParaRPr lang="ru-RU" sz="3300" b="0" u="none" strike="noStrike">
+              <a:solidFill>
+                <a:srgbClr val="000000"/>
+              </a:solidFill>
+              <a:effectLst/>
+              <a:uFillTx/>
+              <a:latin typeface="Arial"/>
+            </a:endParaRPr>
+          </a:p>
+        </p:txBody>
+      </p:sp>
+    </p:spTree>
+  </p:cSld>
+  <mc:AlternateContent>
+    <mc:Choice Requires="p14">
+      <p:transition spd="slow" p14:dur="2000"/>
+    </mc:Choice>
+    <mc:Fallback>
+      <p:transition spd="slow"/>
+    </mc:Fallback>
+  </mc:AlternateContent>
+</p:sld>
+</file>
+
+<file path=ppt/slides/slide16.xml><?xml version="1.0" encoding="utf-8"?>
+<p:sld xmlns:a="http://schemas.openxmlformats.org/drawingml/2006/main" xmlns:p="http://schemas.openxmlformats.org/presentationml/2006/main" xmlns:r="http://schemas.openxmlformats.org/officeDocument/2006/relationships" xmlns:p14="http://schemas.microsoft.com/office/powerpoint/2010/main" xmlns:p15="http://schemas.microsoft.com/office/powerpoint/2012/main" xmlns:mc="http://schemas.openxmlformats.org/markup-compatibility/2006">
+  <p:cSld>
+    <p:bg>
+      <p:bgPr>
+        <a:solidFill>
+          <a:srgbClr val="FFFFFF"/>
+        </a:solidFill>
+      </p:bgPr>
+    </p:bg>
+    <p:spTree>
+      <p:nvGrpSpPr>
+        <p:cNvPr id="1" name=""/>
+        <p:cNvGrpSpPr/>
+        <p:nvPr/>
+      </p:nvGrpSpPr>
+      <p:grpSpPr>
+        <a:xfrm>
+          <a:off x="0" y="0"/>
+          <a:ext cx="0" cy="0"/>
+          <a:chOff x="0" y="0"/>
+          <a:chExt cx="0" cy="0"/>
+        </a:xfrm>
+      </p:grpSpPr>
+      <p:sp>
+        <p:nvSpPr>
+          <p:cNvPr id="114" name="Background"/>
+          <p:cNvSpPr/>
+          <p:nvPr/>
+        </p:nvSpPr>
+        <p:spPr>
+          <a:xfrm>
+            <a:off x="0" y="0"/>
+            <a:ext cx="12191400" cy="6857280"/>
+          </a:xfrm>
+          <a:prstGeom prst="rect">
+            <a:avLst/>
+          </a:prstGeom>
+          <a:solidFill>
+            <a:srgbClr val="F8FAFC"/>
+          </a:solidFill>
+          <a:ln w="12700">
+            <a:solidFill>
+              <a:srgbClr val="F8FAFC"/>
+            </a:solidFill>
+            <a:round/>
+          </a:ln>
+        </p:spPr>
+        <p:style>
+          <a:lnRef idx="0"/>
+          <a:fillRef idx="0"/>
+          <a:effectRef idx="0"/>
+          <a:fontRef idx="minor"/>
+        </p:style>
+        <p:txBody>
+          <a:bodyPr lIns="90000" tIns="45000" rIns="90000" bIns="45000" anchor="t">
+            <a:noAutofit/>
+          </a:bodyPr>
+          <a:p>
+            <a:endParaRPr lang="ru-RU" sz="1800" b="0" u="none" strike="noStrike">
+              <a:solidFill>
+                <a:srgbClr val="000000"/>
+              </a:solidFill>
+              <a:effectLst/>
+              <a:uFillTx/>
+              <a:latin typeface="Arial"/>
+            </a:endParaRPr>
+          </a:p>
+        </p:txBody>
+      </p:sp>
+      <p:sp>
+        <p:nvSpPr>
+          <p:cNvPr id="115" name="Header"/>
+          <p:cNvSpPr/>
+          <p:nvPr/>
+        </p:nvSpPr>
+        <p:spPr>
+          <a:xfrm>
+            <a:off x="0" y="0"/>
+            <a:ext cx="12191400" cy="959400"/>
+          </a:xfrm>
+          <a:prstGeom prst="rect">
+            <a:avLst/>
+          </a:prstGeom>
+          <a:solidFill>
+            <a:srgbClr val="102A43"/>
+          </a:solidFill>
+          <a:ln w="12700">
+            <a:solidFill>
+              <a:srgbClr val="102A43"/>
+            </a:solidFill>
+            <a:round/>
+          </a:ln>
+        </p:spPr>
+        <p:style>
+          <a:lnRef idx="0"/>
+          <a:fillRef idx="0"/>
+          <a:effectRef idx="0"/>
+          <a:fontRef idx="minor"/>
+        </p:style>
+        <p:txBody>
+          <a:bodyPr lIns="90000" tIns="45000" rIns="90000" bIns="45000" anchor="t">
+            <a:noAutofit/>
+          </a:bodyPr>
+          <a:p>
+            <a:endParaRPr lang="ru-RU" sz="1800" b="0" u="none" strike="noStrike">
+              <a:solidFill>
+                <a:srgbClr val="FFFFFF"/>
+              </a:solidFill>
+              <a:effectLst/>
+              <a:uFillTx/>
+              <a:latin typeface="Arial"/>
+            </a:endParaRPr>
+          </a:p>
+        </p:txBody>
+      </p:sp>
+      <p:sp>
+        <p:nvSpPr>
+          <p:cNvPr id="116" name="Accent"/>
+          <p:cNvSpPr/>
+          <p:nvPr/>
+        </p:nvSpPr>
+        <p:spPr>
+          <a:xfrm>
+            <a:off x="0" y="960120"/>
+            <a:ext cx="163800" cy="5897160"/>
+          </a:xfrm>
+          <a:prstGeom prst="rect">
+            <a:avLst/>
+          </a:prstGeom>
+          <a:solidFill>
+            <a:srgbClr val="16A34A"/>
+          </a:solidFill>
+          <a:ln w="12700">
+            <a:solidFill>
+              <a:srgbClr val="16A34A"/>
+            </a:solidFill>
+            <a:round/>
+          </a:ln>
+        </p:spPr>
+        <p:style>
+          <a:lnRef idx="0"/>
+          <a:fillRef idx="0"/>
+          <a:effectRef idx="0"/>
+          <a:fontRef idx="minor"/>
+        </p:style>
+        <p:txBody>
+          <a:bodyPr lIns="82080" tIns="45000" rIns="82080" bIns="45000" anchor="t">
+            <a:noAutofit/>
+          </a:bodyPr>
+          <a:p>
+            <a:endParaRPr lang="ru-RU" sz="1800" b="0" u="none" strike="noStrike">
+              <a:solidFill>
+                <a:srgbClr val="FFFFFF"/>
+              </a:solidFill>
+              <a:effectLst/>
+              <a:uFillTx/>
+              <a:latin typeface="Arial"/>
+            </a:endParaRPr>
+          </a:p>
+        </p:txBody>
+      </p:sp>
+      <p:sp>
+        <p:nvSpPr>
+          <p:cNvPr id="117" name="Title"/>
+          <p:cNvSpPr/>
+          <p:nvPr/>
+        </p:nvSpPr>
+        <p:spPr>
+          <a:xfrm>
+            <a:off x="502920" y="201240"/>
+            <a:ext cx="10880640" cy="657720"/>
+          </a:xfrm>
+          <a:prstGeom prst="rect">
+            <a:avLst/>
+          </a:prstGeom>
+          <a:noFill/>
+          <a:ln w="0">
+            <a:noFill/>
+          </a:ln>
+        </p:spPr>
+        <p:style>
+          <a:lnRef idx="0"/>
+          <a:fillRef idx="0"/>
+          <a:effectRef idx="0"/>
+          <a:fontRef idx="minor"/>
+        </p:style>
+        <p:txBody>
+          <a:bodyPr lIns="180000" tIns="119880" rIns="180000" bIns="119880" anchor="t">
+            <a:noAutofit/>
+          </a:bodyPr>
+          <a:p>
+            <a:pPr>
+              <a:lnSpc>
+                <a:spcPct val="100000"/>
+              </a:lnSpc>
+              <a:tabLst>
+                <a:tab pos="0" algn="l"/>
+              </a:tabLst>
+            </a:pPr>
+            <a:r>
+              <a:rPr lang="ru-RU" sz="3300" b="0" u="none" strike="noStrike">
+                <a:solidFill>
+                  <a:srgbClr val="FFFFFF"/>
+                </a:solidFill>
+                <a:effectLst/>
+                <a:uFillTx/>
+                <a:latin typeface="Arial"/>
+              </a:rPr>
+              <a:t>Интерфейс: клиенты</a:t>
+            </a:r>
+            <a:endParaRPr lang="ru-RU" sz="3300" b="0" u="none" strike="noStrike">
+              <a:solidFill>
+                <a:srgbClr val="000000"/>
+              </a:solidFill>
+              <a:effectLst/>
+              <a:uFillTx/>
+              <a:latin typeface="Arial"/>
+            </a:endParaRPr>
+          </a:p>
+        </p:txBody>
+      </p:sp>
+      <p:sp>
+        <p:nvSpPr>
+          <p:cNvPr id="118" name="Content"/>
+          <p:cNvSpPr/>
+          <p:nvPr/>
+        </p:nvSpPr>
+        <p:spPr>
+          <a:xfrm>
+            <a:off x="685800" y="1234440"/>
+            <a:ext cx="5531400" cy="4891320"/>
+          </a:xfrm>
+          <a:prstGeom prst="roundRect">
+            <a:avLst>
+              <a:gd name="adj" fmla="val 16667"/>
+            </a:avLst>
+          </a:prstGeom>
+          <a:solidFill>
+            <a:srgbClr val="FFFFFF"/>
+          </a:solidFill>
+          <a:ln w="12700">
+            <a:solidFill>
+              <a:srgbClr val="E2E8F0"/>
+            </a:solidFill>
+            <a:round/>
+          </a:ln>
+        </p:spPr>
+        <p:style>
+          <a:lnRef idx="0"/>
+          <a:fillRef idx="0"/>
+          <a:effectRef idx="0"/>
+          <a:fontRef idx="minor"/>
+        </p:style>
+        <p:txBody>
+          <a:bodyPr lIns="180000" tIns="119880" rIns="180000" bIns="119880" anchor="t">
+            <a:noAutofit/>
+          </a:bodyPr>
+          <a:p>
+            <a:pPr marL="216000" indent="-180000">
               <a:lnSpc>
                 <a:spcPct val="100000"/>
               </a:lnSpc>
@@ -4377,7 +4769,7 @@
                 <a:uFillTx/>
                 <a:latin typeface="Arial"/>
               </a:rPr>
-              <a:t>Проведено тестирование ключевых сценариев</a:t>
+              <a:t>Табличное управление пользователями</a:t>
             </a:r>
             <a:endParaRPr lang="ru-RU" sz="2150" b="0" u="none" strike="noStrike">
               <a:solidFill>
@@ -4389,7 +4781,7 @@
             </a:endParaRPr>
           </a:p>
           <a:p>
-            <a:pPr indent="-180000">
+            <a:pPr marL="216000" indent="-180000">
               <a:lnSpc>
                 <a:spcPct val="100000"/>
               </a:lnSpc>
@@ -4408,7 +4800,7 @@
                 <a:uFillTx/>
                 <a:latin typeface="Arial"/>
               </a:rPr>
-              <a:t>Перспективы: онлайн-оплата, мобильная версия, кабинет тренера</a:t>
+              <a:t>Отображаются статусы, активность и риск ухода</a:t>
             </a:r>
             <a:endParaRPr lang="ru-RU" sz="2150" b="0" u="none" strike="noStrike">
               <a:solidFill>
@@ -4419,18 +4811,101 @@
               <a:latin typeface="Arial"/>
             </a:endParaRPr>
           </a:p>
-        </p:txBody>
-      </p:sp>
-      <p:sp>
-        <p:nvSpPr>
-          <p:cNvPr id="107" name="Footer"/>
-          <p:cNvSpPr/>
-          <p:nvPr/>
-        </p:nvSpPr>
-        <p:spPr>
-          <a:xfrm>
-            <a:off x="10625400" y="6473880"/>
-            <a:ext cx="639720" cy="228240"/>
+          <a:p>
+            <a:pPr marL="216000" indent="-180000">
+              <a:lnSpc>
+                <a:spcPct val="100000"/>
+              </a:lnSpc>
+              <a:buClr>
+                <a:srgbClr val="111827"/>
+              </a:buClr>
+              <a:buFont typeface="Symbol" charset="2"/>
+              <a:buChar char=""/>
+            </a:pPr>
+            <a:r>
+              <a:rPr lang="ru-RU" sz="2150" b="0" u="none" strike="noStrike">
+                <a:solidFill>
+                  <a:srgbClr val="111827"/>
+                </a:solidFill>
+                <a:effectLst/>
+                <a:uFillTx/>
+                <a:latin typeface="Arial"/>
+              </a:rPr>
+              <a:t>Администратор может перейти к карточке клиента</a:t>
+            </a:r>
+            <a:endParaRPr lang="ru-RU" sz="2150" b="0" u="none" strike="noStrike">
+              <a:solidFill>
+                <a:srgbClr val="000000"/>
+              </a:solidFill>
+              <a:effectLst/>
+              <a:uFillTx/>
+              <a:latin typeface="Arial"/>
+            </a:endParaRPr>
+          </a:p>
+        </p:txBody>
+      </p:sp>
+      <p:sp>
+        <p:nvSpPr>
+          <p:cNvPr id="119" name="ImageFrame"/>
+          <p:cNvSpPr/>
+          <p:nvPr/>
+        </p:nvSpPr>
+        <p:spPr>
+          <a:xfrm>
+            <a:off x="6400800" y="1207080"/>
+            <a:ext cx="4891320" cy="4799880"/>
+          </a:xfrm>
+          <a:prstGeom prst="roundRect">
+            <a:avLst>
+              <a:gd name="adj" fmla="val 16667"/>
+            </a:avLst>
+          </a:prstGeom>
+          <a:solidFill>
+            <a:srgbClr val="FFFFFF"/>
+          </a:solidFill>
+          <a:ln w="12700">
+            <a:solidFill>
+              <a:srgbClr val="CBD5E1"/>
+            </a:solidFill>
+            <a:round/>
+          </a:ln>
+        </p:spPr>
+        <p:style>
+          <a:lnRef idx="0"/>
+          <a:fillRef idx="0"/>
+          <a:effectRef idx="0"/>
+          <a:fontRef idx="minor"/>
+        </p:style>
+        <p:txBody>
+          <a:bodyPr lIns="90000" tIns="45000" rIns="90000" bIns="45000" anchor="t">
+            <a:noAutofit/>
+          </a:bodyPr>
+          <a:p>
+            <a:endParaRPr lang="ru-RU" sz="1800" b="0" u="none" strike="noStrike">
+              <a:solidFill>
+                <a:srgbClr val="000000"/>
+              </a:solidFill>
+              <a:effectLst/>
+              <a:uFillTx/>
+              <a:latin typeface="Arial"/>
+            </a:endParaRPr>
+          </a:p>
+        </p:txBody>
+      </p:sp>
+      <p:pic>
+        <p:nvPicPr>
+          <p:cNvPr id="120" name="docs/screenshots/admin_users.png"/>
+          <p:cNvPicPr/>
+          <p:nvPr/>
+        </p:nvPicPr>
+        <p:blipFill>
+          <a:blip r:embed="rId1"/>
+          <a:stretch/>
+        </p:blipFill>
+        <p:spPr>
+          <a:xfrm>
+            <a:off x="6480000" y="1980000"/>
+            <a:ext cx="4754160" cy="3134520"/>
           </a:xfrm>
           <a:prstGeom prst="rect">
             <a:avLst/>
@@ -4440,6 +4915,26 @@
             <a:noFill/>
           </a:ln>
         </p:spPr>
+      </p:pic>
+      <p:sp>
+        <p:nvSpPr>
+          <p:cNvPr id="121" name="Footer"/>
+          <p:cNvSpPr/>
+          <p:nvPr/>
+        </p:nvSpPr>
+        <p:spPr>
+          <a:xfrm>
+            <a:off x="10625400" y="6473880"/>
+            <a:ext cx="639360" cy="227880"/>
+          </a:xfrm>
+          <a:prstGeom prst="rect">
+            <a:avLst/>
+          </a:prstGeom>
+          <a:noFill/>
+          <a:ln w="0">
+            <a:noFill/>
+          </a:ln>
+        </p:spPr>
         <p:style>
           <a:lnRef idx="0"/>
           <a:fillRef idx="0"/>
@@ -4468,7 +4963,1646 @@
                 <a:uFillTx/>
                 <a:latin typeface="Arial"/>
               </a:rPr>
-              <a:t>15</a:t>
+              <a:t>16</a:t>
+            </a:r>
+            <a:endParaRPr lang="ru-RU" sz="3300" b="0" u="none" strike="noStrike">
+              <a:solidFill>
+                <a:srgbClr val="000000"/>
+              </a:solidFill>
+              <a:effectLst/>
+              <a:uFillTx/>
+              <a:latin typeface="Arial"/>
+            </a:endParaRPr>
+          </a:p>
+        </p:txBody>
+      </p:sp>
+    </p:spTree>
+  </p:cSld>
+  <mc:AlternateContent>
+    <mc:Choice Requires="p14">
+      <p:transition spd="slow" p14:dur="2000"/>
+    </mc:Choice>
+    <mc:Fallback>
+      <p:transition spd="slow"/>
+    </mc:Fallback>
+  </mc:AlternateContent>
+</p:sld>
+</file>
+
+<file path=ppt/slides/slide17.xml><?xml version="1.0" encoding="utf-8"?>
+<p:sld xmlns:a="http://schemas.openxmlformats.org/drawingml/2006/main" xmlns:p="http://schemas.openxmlformats.org/presentationml/2006/main" xmlns:r="http://schemas.openxmlformats.org/officeDocument/2006/relationships" xmlns:p14="http://schemas.microsoft.com/office/powerpoint/2010/main" xmlns:p15="http://schemas.microsoft.com/office/powerpoint/2012/main" xmlns:mc="http://schemas.openxmlformats.org/markup-compatibility/2006">
+  <p:cSld>
+    <p:bg>
+      <p:bgPr>
+        <a:solidFill>
+          <a:srgbClr val="FFFFFF"/>
+        </a:solidFill>
+      </p:bgPr>
+    </p:bg>
+    <p:spTree>
+      <p:nvGrpSpPr>
+        <p:cNvPr id="1" name=""/>
+        <p:cNvGrpSpPr/>
+        <p:nvPr/>
+      </p:nvGrpSpPr>
+      <p:grpSpPr>
+        <a:xfrm>
+          <a:off x="0" y="0"/>
+          <a:ext cx="0" cy="0"/>
+          <a:chOff x="0" y="0"/>
+          <a:chExt cx="0" cy="0"/>
+        </a:xfrm>
+      </p:grpSpPr>
+      <p:sp>
+        <p:nvSpPr>
+          <p:cNvPr id="122" name="Background"/>
+          <p:cNvSpPr/>
+          <p:nvPr/>
+        </p:nvSpPr>
+        <p:spPr>
+          <a:xfrm>
+            <a:off x="0" y="0"/>
+            <a:ext cx="12191400" cy="6857280"/>
+          </a:xfrm>
+          <a:prstGeom prst="rect">
+            <a:avLst/>
+          </a:prstGeom>
+          <a:solidFill>
+            <a:srgbClr val="F8FAFC"/>
+          </a:solidFill>
+          <a:ln w="12700">
+            <a:solidFill>
+              <a:srgbClr val="F8FAFC"/>
+            </a:solidFill>
+            <a:round/>
+          </a:ln>
+        </p:spPr>
+        <p:style>
+          <a:lnRef idx="0"/>
+          <a:fillRef idx="0"/>
+          <a:effectRef idx="0"/>
+          <a:fontRef idx="minor"/>
+        </p:style>
+        <p:txBody>
+          <a:bodyPr lIns="90000" tIns="45000" rIns="90000" bIns="45000" anchor="t">
+            <a:noAutofit/>
+          </a:bodyPr>
+          <a:p>
+            <a:endParaRPr lang="ru-RU" sz="1800" b="0" u="none" strike="noStrike">
+              <a:solidFill>
+                <a:srgbClr val="000000"/>
+              </a:solidFill>
+              <a:effectLst/>
+              <a:uFillTx/>
+              <a:latin typeface="Arial"/>
+            </a:endParaRPr>
+          </a:p>
+        </p:txBody>
+      </p:sp>
+      <p:sp>
+        <p:nvSpPr>
+          <p:cNvPr id="123" name="Header"/>
+          <p:cNvSpPr/>
+          <p:nvPr/>
+        </p:nvSpPr>
+        <p:spPr>
+          <a:xfrm>
+            <a:off x="0" y="0"/>
+            <a:ext cx="12191400" cy="959400"/>
+          </a:xfrm>
+          <a:prstGeom prst="rect">
+            <a:avLst/>
+          </a:prstGeom>
+          <a:solidFill>
+            <a:srgbClr val="102A43"/>
+          </a:solidFill>
+          <a:ln w="12700">
+            <a:solidFill>
+              <a:srgbClr val="102A43"/>
+            </a:solidFill>
+            <a:round/>
+          </a:ln>
+        </p:spPr>
+        <p:style>
+          <a:lnRef idx="0"/>
+          <a:fillRef idx="0"/>
+          <a:effectRef idx="0"/>
+          <a:fontRef idx="minor"/>
+        </p:style>
+        <p:txBody>
+          <a:bodyPr lIns="90000" tIns="45000" rIns="90000" bIns="45000" anchor="t">
+            <a:noAutofit/>
+          </a:bodyPr>
+          <a:p>
+            <a:endParaRPr lang="ru-RU" sz="1800" b="0" u="none" strike="noStrike">
+              <a:solidFill>
+                <a:srgbClr val="FFFFFF"/>
+              </a:solidFill>
+              <a:effectLst/>
+              <a:uFillTx/>
+              <a:latin typeface="Arial"/>
+            </a:endParaRPr>
+          </a:p>
+        </p:txBody>
+      </p:sp>
+      <p:sp>
+        <p:nvSpPr>
+          <p:cNvPr id="124" name="Accent"/>
+          <p:cNvSpPr/>
+          <p:nvPr/>
+        </p:nvSpPr>
+        <p:spPr>
+          <a:xfrm>
+            <a:off x="0" y="960120"/>
+            <a:ext cx="163800" cy="5897160"/>
+          </a:xfrm>
+          <a:prstGeom prst="rect">
+            <a:avLst/>
+          </a:prstGeom>
+          <a:solidFill>
+            <a:srgbClr val="16A34A"/>
+          </a:solidFill>
+          <a:ln w="12700">
+            <a:solidFill>
+              <a:srgbClr val="16A34A"/>
+            </a:solidFill>
+            <a:round/>
+          </a:ln>
+        </p:spPr>
+        <p:style>
+          <a:lnRef idx="0"/>
+          <a:fillRef idx="0"/>
+          <a:effectRef idx="0"/>
+          <a:fontRef idx="minor"/>
+        </p:style>
+        <p:txBody>
+          <a:bodyPr lIns="82080" tIns="45000" rIns="82080" bIns="45000" anchor="t">
+            <a:noAutofit/>
+          </a:bodyPr>
+          <a:p>
+            <a:endParaRPr lang="ru-RU" sz="1800" b="0" u="none" strike="noStrike">
+              <a:solidFill>
+                <a:srgbClr val="FFFFFF"/>
+              </a:solidFill>
+              <a:effectLst/>
+              <a:uFillTx/>
+              <a:latin typeface="Arial"/>
+            </a:endParaRPr>
+          </a:p>
+        </p:txBody>
+      </p:sp>
+      <p:sp>
+        <p:nvSpPr>
+          <p:cNvPr id="125" name="Title"/>
+          <p:cNvSpPr/>
+          <p:nvPr/>
+        </p:nvSpPr>
+        <p:spPr>
+          <a:xfrm>
+            <a:off x="502920" y="201240"/>
+            <a:ext cx="10880640" cy="657720"/>
+          </a:xfrm>
+          <a:prstGeom prst="rect">
+            <a:avLst/>
+          </a:prstGeom>
+          <a:noFill/>
+          <a:ln w="0">
+            <a:noFill/>
+          </a:ln>
+        </p:spPr>
+        <p:style>
+          <a:lnRef idx="0"/>
+          <a:fillRef idx="0"/>
+          <a:effectRef idx="0"/>
+          <a:fontRef idx="minor"/>
+        </p:style>
+        <p:txBody>
+          <a:bodyPr lIns="180000" tIns="119880" rIns="180000" bIns="119880" anchor="t">
+            <a:noAutofit/>
+          </a:bodyPr>
+          <a:p>
+            <a:pPr>
+              <a:lnSpc>
+                <a:spcPct val="100000"/>
+              </a:lnSpc>
+              <a:tabLst>
+                <a:tab pos="0" algn="l"/>
+              </a:tabLst>
+            </a:pPr>
+            <a:r>
+              <a:rPr lang="ru-RU" sz="3300" b="0" u="none" strike="noStrike">
+                <a:solidFill>
+                  <a:srgbClr val="FFFFFF"/>
+                </a:solidFill>
+                <a:effectLst/>
+                <a:uFillTx/>
+                <a:latin typeface="Arial"/>
+              </a:rPr>
+              <a:t>Абонементы и уведомления</a:t>
+            </a:r>
+            <a:endParaRPr lang="ru-RU" sz="3300" b="0" u="none" strike="noStrike">
+              <a:solidFill>
+                <a:srgbClr val="000000"/>
+              </a:solidFill>
+              <a:effectLst/>
+              <a:uFillTx/>
+              <a:latin typeface="Arial"/>
+            </a:endParaRPr>
+          </a:p>
+        </p:txBody>
+      </p:sp>
+      <p:sp>
+        <p:nvSpPr>
+          <p:cNvPr id="126" name="Content"/>
+          <p:cNvSpPr/>
+          <p:nvPr/>
+        </p:nvSpPr>
+        <p:spPr>
+          <a:xfrm>
+            <a:off x="685800" y="1234440"/>
+            <a:ext cx="5531400" cy="4891320"/>
+          </a:xfrm>
+          <a:prstGeom prst="roundRect">
+            <a:avLst>
+              <a:gd name="adj" fmla="val 16667"/>
+            </a:avLst>
+          </a:prstGeom>
+          <a:solidFill>
+            <a:srgbClr val="FFFFFF"/>
+          </a:solidFill>
+          <a:ln w="12700">
+            <a:solidFill>
+              <a:srgbClr val="E2E8F0"/>
+            </a:solidFill>
+            <a:round/>
+          </a:ln>
+        </p:spPr>
+        <p:style>
+          <a:lnRef idx="0"/>
+          <a:fillRef idx="0"/>
+          <a:effectRef idx="0"/>
+          <a:fontRef idx="minor"/>
+        </p:style>
+        <p:txBody>
+          <a:bodyPr lIns="180000" tIns="119880" rIns="180000" bIns="119880" anchor="t">
+            <a:noAutofit/>
+          </a:bodyPr>
+          <a:p>
+            <a:pPr marL="216000" indent="-180000">
+              <a:lnSpc>
+                <a:spcPct val="100000"/>
+              </a:lnSpc>
+              <a:buClr>
+                <a:srgbClr val="111827"/>
+              </a:buClr>
+              <a:buFont typeface="Symbol" charset="2"/>
+              <a:buChar char=""/>
+            </a:pPr>
+            <a:r>
+              <a:rPr lang="ru-RU" sz="2150" b="0" u="none" strike="noStrike">
+                <a:solidFill>
+                  <a:srgbClr val="111827"/>
+                </a:solidFill>
+                <a:effectLst/>
+                <a:uFillTx/>
+                <a:latin typeface="Arial"/>
+              </a:rPr>
+              <a:t>Каталог тарифов</a:t>
+            </a:r>
+            <a:endParaRPr lang="ru-RU" sz="2150" b="0" u="none" strike="noStrike">
+              <a:solidFill>
+                <a:srgbClr val="000000"/>
+              </a:solidFill>
+              <a:effectLst/>
+              <a:uFillTx/>
+              <a:latin typeface="Arial"/>
+            </a:endParaRPr>
+          </a:p>
+          <a:p>
+            <a:pPr marL="216000" indent="-180000">
+              <a:lnSpc>
+                <a:spcPct val="100000"/>
+              </a:lnSpc>
+              <a:buClr>
+                <a:srgbClr val="111827"/>
+              </a:buClr>
+              <a:buFont typeface="Symbol" charset="2"/>
+              <a:buChar char=""/>
+            </a:pPr>
+            <a:r>
+              <a:rPr lang="ru-RU" sz="2150" b="0" u="none" strike="noStrike">
+                <a:solidFill>
+                  <a:srgbClr val="111827"/>
+                </a:solidFill>
+                <a:effectLst/>
+                <a:uFillTx/>
+                <a:latin typeface="Arial"/>
+              </a:rPr>
+              <a:t>Покупка абонемента</a:t>
+            </a:r>
+            <a:endParaRPr lang="ru-RU" sz="2150" b="0" u="none" strike="noStrike">
+              <a:solidFill>
+                <a:srgbClr val="000000"/>
+              </a:solidFill>
+              <a:effectLst/>
+              <a:uFillTx/>
+              <a:latin typeface="Arial"/>
+            </a:endParaRPr>
+          </a:p>
+          <a:p>
+            <a:pPr marL="216000" indent="-180000">
+              <a:lnSpc>
+                <a:spcPct val="100000"/>
+              </a:lnSpc>
+              <a:buClr>
+                <a:srgbClr val="111827"/>
+              </a:buClr>
+              <a:buFont typeface="Symbol" charset="2"/>
+              <a:buChar char=""/>
+            </a:pPr>
+            <a:r>
+              <a:rPr lang="ru-RU" sz="2150" b="0" u="none" strike="noStrike">
+                <a:solidFill>
+                  <a:srgbClr val="111827"/>
+                </a:solidFill>
+                <a:effectLst/>
+                <a:uFillTx/>
+                <a:latin typeface="Arial"/>
+              </a:rPr>
+              <a:t>Расчет срока действия и остатка посещений</a:t>
+            </a:r>
+            <a:endParaRPr lang="ru-RU" sz="2150" b="0" u="none" strike="noStrike">
+              <a:solidFill>
+                <a:srgbClr val="000000"/>
+              </a:solidFill>
+              <a:effectLst/>
+              <a:uFillTx/>
+              <a:latin typeface="Arial"/>
+            </a:endParaRPr>
+          </a:p>
+          <a:p>
+            <a:pPr marL="216000" indent="-180000">
+              <a:lnSpc>
+                <a:spcPct val="100000"/>
+              </a:lnSpc>
+              <a:buClr>
+                <a:srgbClr val="111827"/>
+              </a:buClr>
+              <a:buFont typeface="Symbol" charset="2"/>
+              <a:buChar char=""/>
+            </a:pPr>
+            <a:r>
+              <a:rPr lang="ru-RU" sz="2150" b="0" u="none" strike="noStrike">
+                <a:solidFill>
+                  <a:srgbClr val="111827"/>
+                </a:solidFill>
+                <a:effectLst/>
+                <a:uFillTx/>
+                <a:latin typeface="Arial"/>
+              </a:rPr>
+              <a:t>Продление и заморозка</a:t>
+            </a:r>
+            <a:endParaRPr lang="ru-RU" sz="2150" b="0" u="none" strike="noStrike">
+              <a:solidFill>
+                <a:srgbClr val="000000"/>
+              </a:solidFill>
+              <a:effectLst/>
+              <a:uFillTx/>
+              <a:latin typeface="Arial"/>
+            </a:endParaRPr>
+          </a:p>
+          <a:p>
+            <a:pPr marL="216000" indent="-180000">
+              <a:lnSpc>
+                <a:spcPct val="100000"/>
+              </a:lnSpc>
+              <a:buClr>
+                <a:srgbClr val="111827"/>
+              </a:buClr>
+              <a:buFont typeface="Symbol" charset="2"/>
+              <a:buChar char=""/>
+            </a:pPr>
+            <a:r>
+              <a:rPr lang="ru-RU" sz="2150" b="0" u="none" strike="noStrike">
+                <a:solidFill>
+                  <a:srgbClr val="111827"/>
+                </a:solidFill>
+                <a:effectLst/>
+                <a:uFillTx/>
+                <a:latin typeface="Arial"/>
+              </a:rPr>
+              <a:t>Уведомления о тренировках и состоянии абонемента</a:t>
+            </a:r>
+            <a:endParaRPr lang="ru-RU" sz="2150" b="0" u="none" strike="noStrike">
+              <a:solidFill>
+                <a:srgbClr val="000000"/>
+              </a:solidFill>
+              <a:effectLst/>
+              <a:uFillTx/>
+              <a:latin typeface="Arial"/>
+            </a:endParaRPr>
+          </a:p>
+        </p:txBody>
+      </p:sp>
+      <p:sp>
+        <p:nvSpPr>
+          <p:cNvPr id="127" name="ImageFrame"/>
+          <p:cNvSpPr/>
+          <p:nvPr/>
+        </p:nvSpPr>
+        <p:spPr>
+          <a:xfrm>
+            <a:off x="6400800" y="1207080"/>
+            <a:ext cx="4891320" cy="4799880"/>
+          </a:xfrm>
+          <a:prstGeom prst="roundRect">
+            <a:avLst>
+              <a:gd name="adj" fmla="val 16667"/>
+            </a:avLst>
+          </a:prstGeom>
+          <a:solidFill>
+            <a:srgbClr val="FFFFFF"/>
+          </a:solidFill>
+          <a:ln w="12700">
+            <a:solidFill>
+              <a:srgbClr val="CBD5E1"/>
+            </a:solidFill>
+            <a:round/>
+          </a:ln>
+        </p:spPr>
+        <p:style>
+          <a:lnRef idx="0"/>
+          <a:fillRef idx="0"/>
+          <a:effectRef idx="0"/>
+          <a:fontRef idx="minor"/>
+        </p:style>
+        <p:txBody>
+          <a:bodyPr lIns="90000" tIns="45000" rIns="90000" bIns="45000" anchor="t">
+            <a:noAutofit/>
+          </a:bodyPr>
+          <a:p>
+            <a:endParaRPr lang="ru-RU" sz="1800" b="0" u="none" strike="noStrike">
+              <a:solidFill>
+                <a:srgbClr val="000000"/>
+              </a:solidFill>
+              <a:effectLst/>
+              <a:uFillTx/>
+              <a:latin typeface="Arial"/>
+            </a:endParaRPr>
+          </a:p>
+        </p:txBody>
+      </p:sp>
+      <p:pic>
+        <p:nvPicPr>
+          <p:cNvPr id="128" name="diagrams/services_class.png"/>
+          <p:cNvPicPr/>
+          <p:nvPr/>
+        </p:nvPicPr>
+        <p:blipFill>
+          <a:blip r:embed="rId1"/>
+          <a:stretch/>
+        </p:blipFill>
+        <p:spPr>
+          <a:xfrm>
+            <a:off x="6473880" y="1980000"/>
+            <a:ext cx="4754160" cy="3236040"/>
+          </a:xfrm>
+          <a:prstGeom prst="rect">
+            <a:avLst/>
+          </a:prstGeom>
+          <a:noFill/>
+          <a:ln w="0">
+            <a:noFill/>
+          </a:ln>
+        </p:spPr>
+      </p:pic>
+      <p:sp>
+        <p:nvSpPr>
+          <p:cNvPr id="129" name="Footer"/>
+          <p:cNvSpPr/>
+          <p:nvPr/>
+        </p:nvSpPr>
+        <p:spPr>
+          <a:xfrm>
+            <a:off x="10625400" y="6473880"/>
+            <a:ext cx="639360" cy="227880"/>
+          </a:xfrm>
+          <a:prstGeom prst="rect">
+            <a:avLst/>
+          </a:prstGeom>
+          <a:noFill/>
+          <a:ln w="0">
+            <a:noFill/>
+          </a:ln>
+        </p:spPr>
+        <p:style>
+          <a:lnRef idx="0"/>
+          <a:fillRef idx="0"/>
+          <a:effectRef idx="0"/>
+          <a:fontRef idx="minor"/>
+        </p:style>
+        <p:txBody>
+          <a:bodyPr lIns="180000" tIns="114120" rIns="180000" bIns="114120" anchor="t">
+            <a:noAutofit/>
+          </a:bodyPr>
+          <a:p>
+            <a:pPr>
+              <a:lnSpc>
+                <a:spcPct val="100000"/>
+              </a:lnSpc>
+              <a:tabLst>
+                <a:tab pos="0" algn="l"/>
+              </a:tabLst>
+            </a:pPr>
+            <a:r>
+              <a:rPr lang="ru-RU" sz="3300" b="0" u="none" strike="noStrike">
+                <a:solidFill>
+                  <a:srgbClr val="64748B"/>
+                </a:solidFill>
+                <a:effectLst/>
+                <a:uFillTx/>
+                <a:latin typeface="Arial"/>
+              </a:rPr>
+              <a:t>17</a:t>
+            </a:r>
+            <a:endParaRPr lang="ru-RU" sz="3300" b="0" u="none" strike="noStrike">
+              <a:solidFill>
+                <a:srgbClr val="000000"/>
+              </a:solidFill>
+              <a:effectLst/>
+              <a:uFillTx/>
+              <a:latin typeface="Arial"/>
+            </a:endParaRPr>
+          </a:p>
+        </p:txBody>
+      </p:sp>
+    </p:spTree>
+  </p:cSld>
+  <mc:AlternateContent>
+    <mc:Choice Requires="p14">
+      <p:transition spd="slow" p14:dur="2000"/>
+    </mc:Choice>
+    <mc:Fallback>
+      <p:transition spd="slow"/>
+    </mc:Fallback>
+  </mc:AlternateContent>
+</p:sld>
+</file>
+
+<file path=ppt/slides/slide18.xml><?xml version="1.0" encoding="utf-8"?>
+<p:sld xmlns:a="http://schemas.openxmlformats.org/drawingml/2006/main" xmlns:p="http://schemas.openxmlformats.org/presentationml/2006/main" xmlns:r="http://schemas.openxmlformats.org/officeDocument/2006/relationships" xmlns:p14="http://schemas.microsoft.com/office/powerpoint/2010/main" xmlns:p15="http://schemas.microsoft.com/office/powerpoint/2012/main" xmlns:mc="http://schemas.openxmlformats.org/markup-compatibility/2006">
+  <p:cSld>
+    <p:bg>
+      <p:bgPr>
+        <a:solidFill>
+          <a:srgbClr val="FFFFFF"/>
+        </a:solidFill>
+      </p:bgPr>
+    </p:bg>
+    <p:spTree>
+      <p:nvGrpSpPr>
+        <p:cNvPr id="1" name=""/>
+        <p:cNvGrpSpPr/>
+        <p:nvPr/>
+      </p:nvGrpSpPr>
+      <p:grpSpPr>
+        <a:xfrm>
+          <a:off x="0" y="0"/>
+          <a:ext cx="0" cy="0"/>
+          <a:chOff x="0" y="0"/>
+          <a:chExt cx="0" cy="0"/>
+        </a:xfrm>
+      </p:grpSpPr>
+      <p:sp>
+        <p:nvSpPr>
+          <p:cNvPr id="130" name="Background"/>
+          <p:cNvSpPr/>
+          <p:nvPr/>
+        </p:nvSpPr>
+        <p:spPr>
+          <a:xfrm>
+            <a:off x="0" y="0"/>
+            <a:ext cx="12191400" cy="6857280"/>
+          </a:xfrm>
+          <a:prstGeom prst="rect">
+            <a:avLst/>
+          </a:prstGeom>
+          <a:solidFill>
+            <a:srgbClr val="F8FAFC"/>
+          </a:solidFill>
+          <a:ln w="12700">
+            <a:solidFill>
+              <a:srgbClr val="F8FAFC"/>
+            </a:solidFill>
+            <a:round/>
+          </a:ln>
+        </p:spPr>
+        <p:style>
+          <a:lnRef idx="0"/>
+          <a:fillRef idx="0"/>
+          <a:effectRef idx="0"/>
+          <a:fontRef idx="minor"/>
+        </p:style>
+        <p:txBody>
+          <a:bodyPr lIns="90000" tIns="45000" rIns="90000" bIns="45000" anchor="t">
+            <a:noAutofit/>
+          </a:bodyPr>
+          <a:p>
+            <a:endParaRPr lang="ru-RU" sz="1800" b="0" u="none" strike="noStrike">
+              <a:solidFill>
+                <a:srgbClr val="000000"/>
+              </a:solidFill>
+              <a:effectLst/>
+              <a:uFillTx/>
+              <a:latin typeface="Arial"/>
+            </a:endParaRPr>
+          </a:p>
+        </p:txBody>
+      </p:sp>
+      <p:sp>
+        <p:nvSpPr>
+          <p:cNvPr id="131" name="Header"/>
+          <p:cNvSpPr/>
+          <p:nvPr/>
+        </p:nvSpPr>
+        <p:spPr>
+          <a:xfrm>
+            <a:off x="0" y="0"/>
+            <a:ext cx="12191400" cy="959400"/>
+          </a:xfrm>
+          <a:prstGeom prst="rect">
+            <a:avLst/>
+          </a:prstGeom>
+          <a:solidFill>
+            <a:srgbClr val="102A43"/>
+          </a:solidFill>
+          <a:ln w="12700">
+            <a:solidFill>
+              <a:srgbClr val="102A43"/>
+            </a:solidFill>
+            <a:round/>
+          </a:ln>
+        </p:spPr>
+        <p:style>
+          <a:lnRef idx="0"/>
+          <a:fillRef idx="0"/>
+          <a:effectRef idx="0"/>
+          <a:fontRef idx="minor"/>
+        </p:style>
+        <p:txBody>
+          <a:bodyPr lIns="90000" tIns="45000" rIns="90000" bIns="45000" anchor="t">
+            <a:noAutofit/>
+          </a:bodyPr>
+          <a:p>
+            <a:endParaRPr lang="ru-RU" sz="1800" b="0" u="none" strike="noStrike">
+              <a:solidFill>
+                <a:srgbClr val="FFFFFF"/>
+              </a:solidFill>
+              <a:effectLst/>
+              <a:uFillTx/>
+              <a:latin typeface="Arial"/>
+            </a:endParaRPr>
+          </a:p>
+        </p:txBody>
+      </p:sp>
+      <p:sp>
+        <p:nvSpPr>
+          <p:cNvPr id="132" name="Accent"/>
+          <p:cNvSpPr/>
+          <p:nvPr/>
+        </p:nvSpPr>
+        <p:spPr>
+          <a:xfrm>
+            <a:off x="0" y="960120"/>
+            <a:ext cx="163800" cy="5897160"/>
+          </a:xfrm>
+          <a:prstGeom prst="rect">
+            <a:avLst/>
+          </a:prstGeom>
+          <a:solidFill>
+            <a:srgbClr val="16A34A"/>
+          </a:solidFill>
+          <a:ln w="12700">
+            <a:solidFill>
+              <a:srgbClr val="16A34A"/>
+            </a:solidFill>
+            <a:round/>
+          </a:ln>
+        </p:spPr>
+        <p:style>
+          <a:lnRef idx="0"/>
+          <a:fillRef idx="0"/>
+          <a:effectRef idx="0"/>
+          <a:fontRef idx="minor"/>
+        </p:style>
+        <p:txBody>
+          <a:bodyPr lIns="82080" tIns="45000" rIns="82080" bIns="45000" anchor="t">
+            <a:noAutofit/>
+          </a:bodyPr>
+          <a:p>
+            <a:endParaRPr lang="ru-RU" sz="1800" b="0" u="none" strike="noStrike">
+              <a:solidFill>
+                <a:srgbClr val="FFFFFF"/>
+              </a:solidFill>
+              <a:effectLst/>
+              <a:uFillTx/>
+              <a:latin typeface="Arial"/>
+            </a:endParaRPr>
+          </a:p>
+        </p:txBody>
+      </p:sp>
+      <p:sp>
+        <p:nvSpPr>
+          <p:cNvPr id="133" name="Title"/>
+          <p:cNvSpPr/>
+          <p:nvPr/>
+        </p:nvSpPr>
+        <p:spPr>
+          <a:xfrm>
+            <a:off x="502920" y="201240"/>
+            <a:ext cx="10880640" cy="657720"/>
+          </a:xfrm>
+          <a:prstGeom prst="rect">
+            <a:avLst/>
+          </a:prstGeom>
+          <a:noFill/>
+          <a:ln w="0">
+            <a:noFill/>
+          </a:ln>
+        </p:spPr>
+        <p:style>
+          <a:lnRef idx="0"/>
+          <a:fillRef idx="0"/>
+          <a:effectRef idx="0"/>
+          <a:fontRef idx="minor"/>
+        </p:style>
+        <p:txBody>
+          <a:bodyPr lIns="180000" tIns="119880" rIns="180000" bIns="119880" anchor="t">
+            <a:noAutofit/>
+          </a:bodyPr>
+          <a:p>
+            <a:pPr>
+              <a:lnSpc>
+                <a:spcPct val="100000"/>
+              </a:lnSpc>
+              <a:tabLst>
+                <a:tab pos="0" algn="l"/>
+              </a:tabLst>
+            </a:pPr>
+            <a:r>
+              <a:rPr lang="ru-RU" sz="3300" b="0" u="none" strike="noStrike">
+                <a:solidFill>
+                  <a:srgbClr val="FFFFFF"/>
+                </a:solidFill>
+                <a:effectLst/>
+                <a:uFillTx/>
+                <a:latin typeface="Arial"/>
+              </a:rPr>
+              <a:t>Аналитика и отчеты</a:t>
+            </a:r>
+            <a:endParaRPr lang="ru-RU" sz="3300" b="0" u="none" strike="noStrike">
+              <a:solidFill>
+                <a:srgbClr val="000000"/>
+              </a:solidFill>
+              <a:effectLst/>
+              <a:uFillTx/>
+              <a:latin typeface="Arial"/>
+            </a:endParaRPr>
+          </a:p>
+        </p:txBody>
+      </p:sp>
+      <p:sp>
+        <p:nvSpPr>
+          <p:cNvPr id="134" name="Content"/>
+          <p:cNvSpPr/>
+          <p:nvPr/>
+        </p:nvSpPr>
+        <p:spPr>
+          <a:xfrm>
+            <a:off x="685800" y="1234440"/>
+            <a:ext cx="10194840" cy="4891320"/>
+          </a:xfrm>
+          <a:prstGeom prst="roundRect">
+            <a:avLst>
+              <a:gd name="adj" fmla="val 16667"/>
+            </a:avLst>
+          </a:prstGeom>
+          <a:solidFill>
+            <a:srgbClr val="FFFFFF"/>
+          </a:solidFill>
+          <a:ln w="12700">
+            <a:solidFill>
+              <a:srgbClr val="E2E8F0"/>
+            </a:solidFill>
+            <a:round/>
+          </a:ln>
+        </p:spPr>
+        <p:style>
+          <a:lnRef idx="0"/>
+          <a:fillRef idx="0"/>
+          <a:effectRef idx="0"/>
+          <a:fontRef idx="minor"/>
+        </p:style>
+        <p:txBody>
+          <a:bodyPr lIns="180000" tIns="119880" rIns="180000" bIns="119880" anchor="t">
+            <a:noAutofit/>
+          </a:bodyPr>
+          <a:p>
+            <a:pPr marL="216000" indent="-180000">
+              <a:lnSpc>
+                <a:spcPct val="100000"/>
+              </a:lnSpc>
+              <a:buClr>
+                <a:srgbClr val="111827"/>
+              </a:buClr>
+              <a:buFont typeface="Symbol" charset="2"/>
+              <a:buChar char=""/>
+            </a:pPr>
+            <a:r>
+              <a:rPr lang="ru-RU" sz="2150" b="0" u="none" strike="noStrike">
+                <a:solidFill>
+                  <a:srgbClr val="111827"/>
+                </a:solidFill>
+                <a:effectLst/>
+                <a:uFillTx/>
+                <a:latin typeface="Arial"/>
+              </a:rPr>
+              <a:t>Популярность тренировок</a:t>
+            </a:r>
+            <a:endParaRPr lang="ru-RU" sz="2150" b="0" u="none" strike="noStrike">
+              <a:solidFill>
+                <a:srgbClr val="000000"/>
+              </a:solidFill>
+              <a:effectLst/>
+              <a:uFillTx/>
+              <a:latin typeface="Arial"/>
+            </a:endParaRPr>
+          </a:p>
+          <a:p>
+            <a:pPr marL="216000" indent="-180000">
+              <a:lnSpc>
+                <a:spcPct val="100000"/>
+              </a:lnSpc>
+              <a:buClr>
+                <a:srgbClr val="111827"/>
+              </a:buClr>
+              <a:buFont typeface="Symbol" charset="2"/>
+              <a:buChar char=""/>
+            </a:pPr>
+            <a:r>
+              <a:rPr lang="ru-RU" sz="2150" b="0" u="none" strike="noStrike">
+                <a:solidFill>
+                  <a:srgbClr val="111827"/>
+                </a:solidFill>
+                <a:effectLst/>
+                <a:uFillTx/>
+                <a:latin typeface="Arial"/>
+              </a:rPr>
+              <a:t>Загрузка тренеров</a:t>
+            </a:r>
+            <a:endParaRPr lang="ru-RU" sz="2150" b="0" u="none" strike="noStrike">
+              <a:solidFill>
+                <a:srgbClr val="000000"/>
+              </a:solidFill>
+              <a:effectLst/>
+              <a:uFillTx/>
+              <a:latin typeface="Arial"/>
+            </a:endParaRPr>
+          </a:p>
+          <a:p>
+            <a:pPr marL="216000" indent="-180000">
+              <a:lnSpc>
+                <a:spcPct val="100000"/>
+              </a:lnSpc>
+              <a:buClr>
+                <a:srgbClr val="111827"/>
+              </a:buClr>
+              <a:buFont typeface="Symbol" charset="2"/>
+              <a:buChar char=""/>
+            </a:pPr>
+            <a:r>
+              <a:rPr lang="ru-RU" sz="2150" b="0" u="none" strike="noStrike">
+                <a:solidFill>
+                  <a:srgbClr val="111827"/>
+                </a:solidFill>
+                <a:effectLst/>
+                <a:uFillTx/>
+                <a:latin typeface="Arial"/>
+              </a:rPr>
+              <a:t>Посещаемость</a:t>
+            </a:r>
+            <a:endParaRPr lang="ru-RU" sz="2150" b="0" u="none" strike="noStrike">
+              <a:solidFill>
+                <a:srgbClr val="000000"/>
+              </a:solidFill>
+              <a:effectLst/>
+              <a:uFillTx/>
+              <a:latin typeface="Arial"/>
+            </a:endParaRPr>
+          </a:p>
+          <a:p>
+            <a:pPr marL="216000" indent="-180000">
+              <a:lnSpc>
+                <a:spcPct val="100000"/>
+              </a:lnSpc>
+              <a:buClr>
+                <a:srgbClr val="111827"/>
+              </a:buClr>
+              <a:buFont typeface="Symbol" charset="2"/>
+              <a:buChar char=""/>
+            </a:pPr>
+            <a:r>
+              <a:rPr lang="ru-RU" sz="2150" b="0" u="none" strike="noStrike">
+                <a:solidFill>
+                  <a:srgbClr val="111827"/>
+                </a:solidFill>
+                <a:effectLst/>
+                <a:uFillTx/>
+                <a:latin typeface="Arial"/>
+              </a:rPr>
+              <a:t>Выбор периода отчета</a:t>
+            </a:r>
+            <a:endParaRPr lang="ru-RU" sz="2150" b="0" u="none" strike="noStrike">
+              <a:solidFill>
+                <a:srgbClr val="000000"/>
+              </a:solidFill>
+              <a:effectLst/>
+              <a:uFillTx/>
+              <a:latin typeface="Arial"/>
+            </a:endParaRPr>
+          </a:p>
+          <a:p>
+            <a:pPr marL="216000" indent="-180000">
+              <a:lnSpc>
+                <a:spcPct val="100000"/>
+              </a:lnSpc>
+              <a:buClr>
+                <a:srgbClr val="111827"/>
+              </a:buClr>
+              <a:buFont typeface="Symbol" charset="2"/>
+              <a:buChar char=""/>
+            </a:pPr>
+            <a:r>
+              <a:rPr lang="ru-RU" sz="2150" b="0" u="none" strike="noStrike">
+                <a:solidFill>
+                  <a:srgbClr val="111827"/>
+                </a:solidFill>
+                <a:effectLst/>
+                <a:uFillTx/>
+                <a:latin typeface="Arial"/>
+              </a:rPr>
+              <a:t>Экспорт в PDF и Excel</a:t>
+            </a:r>
+            <a:endParaRPr lang="ru-RU" sz="2150" b="0" u="none" strike="noStrike">
+              <a:solidFill>
+                <a:srgbClr val="000000"/>
+              </a:solidFill>
+              <a:effectLst/>
+              <a:uFillTx/>
+              <a:latin typeface="Arial"/>
+            </a:endParaRPr>
+          </a:p>
+          <a:p>
+            <a:pPr marL="216000" indent="-180000">
+              <a:lnSpc>
+                <a:spcPct val="100000"/>
+              </a:lnSpc>
+              <a:buClr>
+                <a:srgbClr val="111827"/>
+              </a:buClr>
+              <a:buFont typeface="Symbol" charset="2"/>
+              <a:buChar char=""/>
+            </a:pPr>
+            <a:r>
+              <a:rPr lang="ru-RU" sz="2150" b="0" u="none" strike="noStrike">
+                <a:solidFill>
+                  <a:srgbClr val="111827"/>
+                </a:solidFill>
+                <a:effectLst/>
+                <a:uFillTx/>
+                <a:latin typeface="Arial"/>
+              </a:rPr>
+              <a:t>Поддержка управленческих решений</a:t>
+            </a:r>
+            <a:endParaRPr lang="ru-RU" sz="2150" b="0" u="none" strike="noStrike">
+              <a:solidFill>
+                <a:srgbClr val="000000"/>
+              </a:solidFill>
+              <a:effectLst/>
+              <a:uFillTx/>
+              <a:latin typeface="Arial"/>
+            </a:endParaRPr>
+          </a:p>
+        </p:txBody>
+      </p:sp>
+      <p:sp>
+        <p:nvSpPr>
+          <p:cNvPr id="135" name="Footer"/>
+          <p:cNvSpPr/>
+          <p:nvPr/>
+        </p:nvSpPr>
+        <p:spPr>
+          <a:xfrm>
+            <a:off x="10625400" y="6473880"/>
+            <a:ext cx="639360" cy="227880"/>
+          </a:xfrm>
+          <a:prstGeom prst="rect">
+            <a:avLst/>
+          </a:prstGeom>
+          <a:noFill/>
+          <a:ln w="0">
+            <a:noFill/>
+          </a:ln>
+        </p:spPr>
+        <p:style>
+          <a:lnRef idx="0"/>
+          <a:fillRef idx="0"/>
+          <a:effectRef idx="0"/>
+          <a:fontRef idx="minor"/>
+        </p:style>
+        <p:txBody>
+          <a:bodyPr lIns="180000" tIns="114120" rIns="180000" bIns="114120" anchor="t">
+            <a:noAutofit/>
+          </a:bodyPr>
+          <a:p>
+            <a:pPr>
+              <a:lnSpc>
+                <a:spcPct val="100000"/>
+              </a:lnSpc>
+              <a:tabLst>
+                <a:tab pos="0" algn="l"/>
+              </a:tabLst>
+            </a:pPr>
+            <a:r>
+              <a:rPr lang="ru-RU" sz="3300" b="0" u="none" strike="noStrike">
+                <a:solidFill>
+                  <a:srgbClr val="64748B"/>
+                </a:solidFill>
+                <a:effectLst/>
+                <a:uFillTx/>
+                <a:latin typeface="Arial"/>
+              </a:rPr>
+              <a:t>18</a:t>
+            </a:r>
+            <a:endParaRPr lang="ru-RU" sz="3300" b="0" u="none" strike="noStrike">
+              <a:solidFill>
+                <a:srgbClr val="000000"/>
+              </a:solidFill>
+              <a:effectLst/>
+              <a:uFillTx/>
+              <a:latin typeface="Arial"/>
+            </a:endParaRPr>
+          </a:p>
+        </p:txBody>
+      </p:sp>
+    </p:spTree>
+  </p:cSld>
+  <mc:AlternateContent>
+    <mc:Choice Requires="p14">
+      <p:transition spd="slow" p14:dur="2000"/>
+    </mc:Choice>
+    <mc:Fallback>
+      <p:transition spd="slow"/>
+    </mc:Fallback>
+  </mc:AlternateContent>
+</p:sld>
+</file>
+
+<file path=ppt/slides/slide19.xml><?xml version="1.0" encoding="utf-8"?>
+<p:sld xmlns:a="http://schemas.openxmlformats.org/drawingml/2006/main" xmlns:p="http://schemas.openxmlformats.org/presentationml/2006/main" xmlns:r="http://schemas.openxmlformats.org/officeDocument/2006/relationships" xmlns:p14="http://schemas.microsoft.com/office/powerpoint/2010/main" xmlns:p15="http://schemas.microsoft.com/office/powerpoint/2012/main" xmlns:mc="http://schemas.openxmlformats.org/markup-compatibility/2006">
+  <p:cSld>
+    <p:bg>
+      <p:bgPr>
+        <a:solidFill>
+          <a:srgbClr val="FFFFFF"/>
+        </a:solidFill>
+      </p:bgPr>
+    </p:bg>
+    <p:spTree>
+      <p:nvGrpSpPr>
+        <p:cNvPr id="1" name=""/>
+        <p:cNvGrpSpPr/>
+        <p:nvPr/>
+      </p:nvGrpSpPr>
+      <p:grpSpPr>
+        <a:xfrm>
+          <a:off x="0" y="0"/>
+          <a:ext cx="0" cy="0"/>
+          <a:chOff x="0" y="0"/>
+          <a:chExt cx="0" cy="0"/>
+        </a:xfrm>
+      </p:grpSpPr>
+      <p:sp>
+        <p:nvSpPr>
+          <p:cNvPr id="136" name="Background"/>
+          <p:cNvSpPr/>
+          <p:nvPr/>
+        </p:nvSpPr>
+        <p:spPr>
+          <a:xfrm>
+            <a:off x="0" y="0"/>
+            <a:ext cx="12191400" cy="6857280"/>
+          </a:xfrm>
+          <a:prstGeom prst="rect">
+            <a:avLst/>
+          </a:prstGeom>
+          <a:solidFill>
+            <a:srgbClr val="F8FAFC"/>
+          </a:solidFill>
+          <a:ln w="12700">
+            <a:solidFill>
+              <a:srgbClr val="F8FAFC"/>
+            </a:solidFill>
+            <a:round/>
+          </a:ln>
+        </p:spPr>
+        <p:style>
+          <a:lnRef idx="0"/>
+          <a:fillRef idx="0"/>
+          <a:effectRef idx="0"/>
+          <a:fontRef idx="minor"/>
+        </p:style>
+        <p:txBody>
+          <a:bodyPr lIns="90000" tIns="45000" rIns="90000" bIns="45000" anchor="t">
+            <a:noAutofit/>
+          </a:bodyPr>
+          <a:p>
+            <a:endParaRPr lang="ru-RU" sz="1800" b="0" u="none" strike="noStrike">
+              <a:solidFill>
+                <a:srgbClr val="000000"/>
+              </a:solidFill>
+              <a:effectLst/>
+              <a:uFillTx/>
+              <a:latin typeface="Arial"/>
+            </a:endParaRPr>
+          </a:p>
+        </p:txBody>
+      </p:sp>
+      <p:sp>
+        <p:nvSpPr>
+          <p:cNvPr id="137" name="Header"/>
+          <p:cNvSpPr/>
+          <p:nvPr/>
+        </p:nvSpPr>
+        <p:spPr>
+          <a:xfrm>
+            <a:off x="0" y="0"/>
+            <a:ext cx="12191400" cy="959400"/>
+          </a:xfrm>
+          <a:prstGeom prst="rect">
+            <a:avLst/>
+          </a:prstGeom>
+          <a:solidFill>
+            <a:srgbClr val="102A43"/>
+          </a:solidFill>
+          <a:ln w="12700">
+            <a:solidFill>
+              <a:srgbClr val="102A43"/>
+            </a:solidFill>
+            <a:round/>
+          </a:ln>
+        </p:spPr>
+        <p:style>
+          <a:lnRef idx="0"/>
+          <a:fillRef idx="0"/>
+          <a:effectRef idx="0"/>
+          <a:fontRef idx="minor"/>
+        </p:style>
+        <p:txBody>
+          <a:bodyPr lIns="90000" tIns="45000" rIns="90000" bIns="45000" anchor="t">
+            <a:noAutofit/>
+          </a:bodyPr>
+          <a:p>
+            <a:endParaRPr lang="ru-RU" sz="1800" b="0" u="none" strike="noStrike">
+              <a:solidFill>
+                <a:srgbClr val="FFFFFF"/>
+              </a:solidFill>
+              <a:effectLst/>
+              <a:uFillTx/>
+              <a:latin typeface="Arial"/>
+            </a:endParaRPr>
+          </a:p>
+        </p:txBody>
+      </p:sp>
+      <p:sp>
+        <p:nvSpPr>
+          <p:cNvPr id="138" name="Accent"/>
+          <p:cNvSpPr/>
+          <p:nvPr/>
+        </p:nvSpPr>
+        <p:spPr>
+          <a:xfrm>
+            <a:off x="0" y="960120"/>
+            <a:ext cx="163800" cy="5897160"/>
+          </a:xfrm>
+          <a:prstGeom prst="rect">
+            <a:avLst/>
+          </a:prstGeom>
+          <a:solidFill>
+            <a:srgbClr val="16A34A"/>
+          </a:solidFill>
+          <a:ln w="12700">
+            <a:solidFill>
+              <a:srgbClr val="16A34A"/>
+            </a:solidFill>
+            <a:round/>
+          </a:ln>
+        </p:spPr>
+        <p:style>
+          <a:lnRef idx="0"/>
+          <a:fillRef idx="0"/>
+          <a:effectRef idx="0"/>
+          <a:fontRef idx="minor"/>
+        </p:style>
+        <p:txBody>
+          <a:bodyPr lIns="82080" tIns="45000" rIns="82080" bIns="45000" anchor="t">
+            <a:noAutofit/>
+          </a:bodyPr>
+          <a:p>
+            <a:endParaRPr lang="ru-RU" sz="1800" b="0" u="none" strike="noStrike">
+              <a:solidFill>
+                <a:srgbClr val="FFFFFF"/>
+              </a:solidFill>
+              <a:effectLst/>
+              <a:uFillTx/>
+              <a:latin typeface="Arial"/>
+            </a:endParaRPr>
+          </a:p>
+        </p:txBody>
+      </p:sp>
+      <p:sp>
+        <p:nvSpPr>
+          <p:cNvPr id="139" name="Title"/>
+          <p:cNvSpPr/>
+          <p:nvPr/>
+        </p:nvSpPr>
+        <p:spPr>
+          <a:xfrm>
+            <a:off x="502920" y="201240"/>
+            <a:ext cx="10880640" cy="657720"/>
+          </a:xfrm>
+          <a:prstGeom prst="rect">
+            <a:avLst/>
+          </a:prstGeom>
+          <a:noFill/>
+          <a:ln w="0">
+            <a:noFill/>
+          </a:ln>
+        </p:spPr>
+        <p:style>
+          <a:lnRef idx="0"/>
+          <a:fillRef idx="0"/>
+          <a:effectRef idx="0"/>
+          <a:fontRef idx="minor"/>
+        </p:style>
+        <p:txBody>
+          <a:bodyPr lIns="180000" tIns="119880" rIns="180000" bIns="119880" anchor="t">
+            <a:noAutofit/>
+          </a:bodyPr>
+          <a:p>
+            <a:pPr>
+              <a:lnSpc>
+                <a:spcPct val="100000"/>
+              </a:lnSpc>
+              <a:tabLst>
+                <a:tab pos="0" algn="l"/>
+              </a:tabLst>
+            </a:pPr>
+            <a:r>
+              <a:rPr lang="ru-RU" sz="3300" b="0" u="none" strike="noStrike">
+                <a:solidFill>
+                  <a:srgbClr val="FFFFFF"/>
+                </a:solidFill>
+                <a:effectLst/>
+                <a:uFillTx/>
+                <a:latin typeface="Arial"/>
+              </a:rPr>
+              <a:t>Тестирование</a:t>
+            </a:r>
+            <a:endParaRPr lang="ru-RU" sz="3300" b="0" u="none" strike="noStrike">
+              <a:solidFill>
+                <a:srgbClr val="000000"/>
+              </a:solidFill>
+              <a:effectLst/>
+              <a:uFillTx/>
+              <a:latin typeface="Arial"/>
+            </a:endParaRPr>
+          </a:p>
+        </p:txBody>
+      </p:sp>
+      <p:sp>
+        <p:nvSpPr>
+          <p:cNvPr id="140" name="Content"/>
+          <p:cNvSpPr/>
+          <p:nvPr/>
+        </p:nvSpPr>
+        <p:spPr>
+          <a:xfrm>
+            <a:off x="685800" y="1234440"/>
+            <a:ext cx="5531400" cy="4891320"/>
+          </a:xfrm>
+          <a:prstGeom prst="roundRect">
+            <a:avLst>
+              <a:gd name="adj" fmla="val 16667"/>
+            </a:avLst>
+          </a:prstGeom>
+          <a:solidFill>
+            <a:srgbClr val="FFFFFF"/>
+          </a:solidFill>
+          <a:ln w="12700">
+            <a:solidFill>
+              <a:srgbClr val="E2E8F0"/>
+            </a:solidFill>
+            <a:round/>
+          </a:ln>
+        </p:spPr>
+        <p:style>
+          <a:lnRef idx="0"/>
+          <a:fillRef idx="0"/>
+          <a:effectRef idx="0"/>
+          <a:fontRef idx="minor"/>
+        </p:style>
+        <p:txBody>
+          <a:bodyPr lIns="180000" tIns="119880" rIns="180000" bIns="119880" anchor="t">
+            <a:noAutofit/>
+          </a:bodyPr>
+          <a:p>
+            <a:pPr marL="216000" indent="-180000">
+              <a:lnSpc>
+                <a:spcPct val="100000"/>
+              </a:lnSpc>
+              <a:buClr>
+                <a:srgbClr val="111827"/>
+              </a:buClr>
+              <a:buFont typeface="Symbol" charset="2"/>
+              <a:buChar char=""/>
+            </a:pPr>
+            <a:r>
+              <a:rPr lang="ru-RU" sz="2150" b="0" u="none" strike="noStrike">
+                <a:solidFill>
+                  <a:srgbClr val="111827"/>
+                </a:solidFill>
+                <a:effectLst/>
+                <a:uFillTx/>
+                <a:latin typeface="Arial"/>
+              </a:rPr>
+              <a:t>pytest и тестовая SQLite БД в памяти</a:t>
+            </a:r>
+            <a:endParaRPr lang="ru-RU" sz="2150" b="0" u="none" strike="noStrike">
+              <a:solidFill>
+                <a:srgbClr val="000000"/>
+              </a:solidFill>
+              <a:effectLst/>
+              <a:uFillTx/>
+              <a:latin typeface="Arial"/>
+            </a:endParaRPr>
+          </a:p>
+          <a:p>
+            <a:pPr marL="216000" indent="-180000">
+              <a:lnSpc>
+                <a:spcPct val="100000"/>
+              </a:lnSpc>
+              <a:buClr>
+                <a:srgbClr val="111827"/>
+              </a:buClr>
+              <a:buFont typeface="Symbol" charset="2"/>
+              <a:buChar char=""/>
+            </a:pPr>
+            <a:r>
+              <a:rPr lang="ru-RU" sz="2150" b="0" u="none" strike="noStrike">
+                <a:solidFill>
+                  <a:srgbClr val="111827"/>
+                </a:solidFill>
+                <a:effectLst/>
+                <a:uFillTx/>
+                <a:latin typeface="Arial"/>
+              </a:rPr>
+              <a:t>Проверка главной страницы, входа и регистрации</a:t>
+            </a:r>
+            <a:endParaRPr lang="ru-RU" sz="2150" b="0" u="none" strike="noStrike">
+              <a:solidFill>
+                <a:srgbClr val="000000"/>
+              </a:solidFill>
+              <a:effectLst/>
+              <a:uFillTx/>
+              <a:latin typeface="Arial"/>
+            </a:endParaRPr>
+          </a:p>
+          <a:p>
+            <a:pPr marL="216000" indent="-180000">
+              <a:lnSpc>
+                <a:spcPct val="100000"/>
+              </a:lnSpc>
+              <a:buClr>
+                <a:srgbClr val="111827"/>
+              </a:buClr>
+              <a:buFont typeface="Symbol" charset="2"/>
+              <a:buChar char=""/>
+            </a:pPr>
+            <a:r>
+              <a:rPr lang="ru-RU" sz="2150" b="0" u="none" strike="noStrike">
+                <a:solidFill>
+                  <a:srgbClr val="111827"/>
+                </a:solidFill>
+                <a:effectLst/>
+                <a:uFillTx/>
+                <a:latin typeface="Arial"/>
+              </a:rPr>
+              <a:t>Проверка пользовательских маршрутов</a:t>
+            </a:r>
+            <a:endParaRPr lang="ru-RU" sz="2150" b="0" u="none" strike="noStrike">
+              <a:solidFill>
+                <a:srgbClr val="000000"/>
+              </a:solidFill>
+              <a:effectLst/>
+              <a:uFillTx/>
+              <a:latin typeface="Arial"/>
+            </a:endParaRPr>
+          </a:p>
+          <a:p>
+            <a:pPr marL="216000" indent="-180000">
+              <a:lnSpc>
+                <a:spcPct val="100000"/>
+              </a:lnSpc>
+              <a:buClr>
+                <a:srgbClr val="111827"/>
+              </a:buClr>
+              <a:buFont typeface="Symbol" charset="2"/>
+              <a:buChar char=""/>
+            </a:pPr>
+            <a:r>
+              <a:rPr lang="ru-RU" sz="2150" b="0" u="none" strike="noStrike">
+                <a:solidFill>
+                  <a:srgbClr val="111827"/>
+                </a:solidFill>
+                <a:effectLst/>
+                <a:uFillTx/>
+                <a:latin typeface="Arial"/>
+              </a:rPr>
+              <a:t>Проверка административного доступа</a:t>
+            </a:r>
+            <a:endParaRPr lang="ru-RU" sz="2150" b="0" u="none" strike="noStrike">
+              <a:solidFill>
+                <a:srgbClr val="000000"/>
+              </a:solidFill>
+              <a:effectLst/>
+              <a:uFillTx/>
+              <a:latin typeface="Arial"/>
+            </a:endParaRPr>
+          </a:p>
+          <a:p>
+            <a:pPr marL="216000" indent="-180000">
+              <a:lnSpc>
+                <a:spcPct val="100000"/>
+              </a:lnSpc>
+              <a:buClr>
+                <a:srgbClr val="111827"/>
+              </a:buClr>
+              <a:buFont typeface="Symbol" charset="2"/>
+              <a:buChar char=""/>
+            </a:pPr>
+            <a:r>
+              <a:rPr lang="ru-RU" sz="2150" b="0" u="none" strike="noStrike">
+                <a:solidFill>
+                  <a:srgbClr val="111827"/>
+                </a:solidFill>
+                <a:effectLst/>
+                <a:uFillTx/>
+                <a:latin typeface="Arial"/>
+              </a:rPr>
+              <a:t>Проверка моделей User, Workout и Booking</a:t>
+            </a:r>
+            <a:endParaRPr lang="ru-RU" sz="2150" b="0" u="none" strike="noStrike">
+              <a:solidFill>
+                <a:srgbClr val="000000"/>
+              </a:solidFill>
+              <a:effectLst/>
+              <a:uFillTx/>
+              <a:latin typeface="Arial"/>
+            </a:endParaRPr>
+          </a:p>
+        </p:txBody>
+      </p:sp>
+      <p:sp>
+        <p:nvSpPr>
+          <p:cNvPr id="141" name="ImageFrame"/>
+          <p:cNvSpPr/>
+          <p:nvPr/>
+        </p:nvSpPr>
+        <p:spPr>
+          <a:xfrm>
+            <a:off x="6400800" y="1207080"/>
+            <a:ext cx="4891320" cy="4799880"/>
+          </a:xfrm>
+          <a:prstGeom prst="roundRect">
+            <a:avLst>
+              <a:gd name="adj" fmla="val 16667"/>
+            </a:avLst>
+          </a:prstGeom>
+          <a:solidFill>
+            <a:srgbClr val="FFFFFF"/>
+          </a:solidFill>
+          <a:ln w="12700">
+            <a:solidFill>
+              <a:srgbClr val="CBD5E1"/>
+            </a:solidFill>
+            <a:round/>
+          </a:ln>
+        </p:spPr>
+        <p:style>
+          <a:lnRef idx="0"/>
+          <a:fillRef idx="0"/>
+          <a:effectRef idx="0"/>
+          <a:fontRef idx="minor"/>
+        </p:style>
+        <p:txBody>
+          <a:bodyPr lIns="90000" tIns="45000" rIns="90000" bIns="45000" anchor="t">
+            <a:noAutofit/>
+          </a:bodyPr>
+          <a:p>
+            <a:endParaRPr lang="ru-RU" sz="1800" b="0" u="none" strike="noStrike">
+              <a:solidFill>
+                <a:srgbClr val="000000"/>
+              </a:solidFill>
+              <a:effectLst/>
+              <a:uFillTx/>
+              <a:latin typeface="Arial"/>
+            </a:endParaRPr>
+          </a:p>
+        </p:txBody>
+      </p:sp>
+      <p:pic>
+        <p:nvPicPr>
+          <p:cNvPr id="142" name="diagrams/tests_class.png"/>
+          <p:cNvPicPr/>
+          <p:nvPr/>
+        </p:nvPicPr>
+        <p:blipFill>
+          <a:blip r:embed="rId1"/>
+          <a:stretch/>
+        </p:blipFill>
+        <p:spPr>
+          <a:xfrm>
+            <a:off x="6480000" y="1817280"/>
+            <a:ext cx="4754160" cy="3582720"/>
+          </a:xfrm>
+          <a:prstGeom prst="rect">
+            <a:avLst/>
+          </a:prstGeom>
+          <a:noFill/>
+          <a:ln w="0">
+            <a:noFill/>
+          </a:ln>
+        </p:spPr>
+      </p:pic>
+      <p:sp>
+        <p:nvSpPr>
+          <p:cNvPr id="143" name="Footer"/>
+          <p:cNvSpPr/>
+          <p:nvPr/>
+        </p:nvSpPr>
+        <p:spPr>
+          <a:xfrm>
+            <a:off x="10625400" y="6473880"/>
+            <a:ext cx="639360" cy="227880"/>
+          </a:xfrm>
+          <a:prstGeom prst="rect">
+            <a:avLst/>
+          </a:prstGeom>
+          <a:noFill/>
+          <a:ln w="0">
+            <a:noFill/>
+          </a:ln>
+        </p:spPr>
+        <p:style>
+          <a:lnRef idx="0"/>
+          <a:fillRef idx="0"/>
+          <a:effectRef idx="0"/>
+          <a:fontRef idx="minor"/>
+        </p:style>
+        <p:txBody>
+          <a:bodyPr lIns="180000" tIns="114120" rIns="180000" bIns="114120" anchor="t">
+            <a:noAutofit/>
+          </a:bodyPr>
+          <a:p>
+            <a:pPr>
+              <a:lnSpc>
+                <a:spcPct val="100000"/>
+              </a:lnSpc>
+              <a:tabLst>
+                <a:tab pos="0" algn="l"/>
+              </a:tabLst>
+            </a:pPr>
+            <a:r>
+              <a:rPr lang="ru-RU" sz="3300" b="0" u="none" strike="noStrike">
+                <a:solidFill>
+                  <a:srgbClr val="64748B"/>
+                </a:solidFill>
+                <a:effectLst/>
+                <a:uFillTx/>
+                <a:latin typeface="Arial"/>
+              </a:rPr>
+              <a:t>19</a:t>
             </a:r>
             <a:endParaRPr lang="ru-RU" sz="3300" b="0" u="none" strike="noStrike">
               <a:solidFill>
@@ -4527,7 +6661,7 @@
         <p:spPr>
           <a:xfrm>
             <a:off x="0" y="0"/>
-            <a:ext cx="12191760" cy="6857640"/>
+            <a:ext cx="12191400" cy="6857280"/>
           </a:xfrm>
           <a:prstGeom prst="rect">
             <a:avLst/>
@@ -4573,7 +6707,7 @@
         <p:spPr>
           <a:xfrm>
             <a:off x="0" y="0"/>
-            <a:ext cx="12191760" cy="959760"/>
+            <a:ext cx="12191400" cy="959400"/>
           </a:xfrm>
           <a:prstGeom prst="rect">
             <a:avLst/>
@@ -4619,7 +6753,7 @@
         <p:spPr>
           <a:xfrm>
             <a:off x="0" y="960120"/>
-            <a:ext cx="164160" cy="5897520"/>
+            <a:ext cx="163800" cy="5897160"/>
           </a:xfrm>
           <a:prstGeom prst="rect">
             <a:avLst/>
@@ -4641,7 +6775,7 @@
           <a:fontRef idx="minor"/>
         </p:style>
         <p:txBody>
-          <a:bodyPr lIns="90000" tIns="45000" rIns="90000" bIns="45000" anchor="t">
+          <a:bodyPr lIns="82080" tIns="45000" rIns="82080" bIns="45000" anchor="t">
             <a:noAutofit/>
           </a:bodyPr>
           <a:p>
@@ -4665,7 +6799,7 @@
         <p:spPr>
           <a:xfrm>
             <a:off x="502920" y="201240"/>
-            <a:ext cx="10881000" cy="658080"/>
+            <a:ext cx="10880640" cy="657720"/>
           </a:xfrm>
           <a:prstGeom prst="rect">
             <a:avLst/>
@@ -4725,7 +6859,7 @@
         <p:spPr>
           <a:xfrm>
             <a:off x="685800" y="1234440"/>
-            <a:ext cx="10195200" cy="4891680"/>
+            <a:ext cx="10194840" cy="4891320"/>
           </a:xfrm>
           <a:prstGeom prst="roundRect">
             <a:avLst>
@@ -4753,7 +6887,7 @@
             <a:noAutofit/>
           </a:bodyPr>
           <a:p>
-            <a:pPr indent="-180000">
+            <a:pPr marL="216000" indent="-180000">
               <a:lnSpc>
                 <a:spcPct val="100000"/>
               </a:lnSpc>
@@ -4784,7 +6918,7 @@
             </a:endParaRPr>
           </a:p>
           <a:p>
-            <a:pPr indent="-180000">
+            <a:pPr marL="216000" indent="-180000">
               <a:lnSpc>
                 <a:spcPct val="100000"/>
               </a:lnSpc>
@@ -4815,7 +6949,7 @@
             </a:endParaRPr>
           </a:p>
           <a:p>
-            <a:pPr indent="-180000">
+            <a:pPr marL="216000" indent="-180000">
               <a:lnSpc>
                 <a:spcPct val="100000"/>
               </a:lnSpc>
@@ -4846,7 +6980,7 @@
             </a:endParaRPr>
           </a:p>
           <a:p>
-            <a:pPr indent="-180000">
+            <a:pPr marL="216000" indent="-180000">
               <a:lnSpc>
                 <a:spcPct val="100000"/>
               </a:lnSpc>
@@ -4887,7 +7021,7 @@
         <p:spPr>
           <a:xfrm>
             <a:off x="10625400" y="6473880"/>
-            <a:ext cx="639720" cy="228240"/>
+            <a:ext cx="639360" cy="227880"/>
           </a:xfrm>
           <a:prstGeom prst="rect">
             <a:avLst/>
@@ -4926,6 +7060,982 @@
                 <a:latin typeface="Arial"/>
               </a:rPr>
               <a:t>2</a:t>
+            </a:r>
+            <a:endParaRPr lang="ru-RU" sz="3300" b="0" u="none" strike="noStrike">
+              <a:solidFill>
+                <a:srgbClr val="000000"/>
+              </a:solidFill>
+              <a:effectLst/>
+              <a:uFillTx/>
+              <a:latin typeface="Arial"/>
+            </a:endParaRPr>
+          </a:p>
+        </p:txBody>
+      </p:sp>
+    </p:spTree>
+  </p:cSld>
+  <mc:AlternateContent>
+    <mc:Choice Requires="p14">
+      <p:transition spd="slow" p14:dur="2000"/>
+    </mc:Choice>
+    <mc:Fallback>
+      <p:transition spd="slow"/>
+    </mc:Fallback>
+  </mc:AlternateContent>
+</p:sld>
+</file>
+
+<file path=ppt/slides/slide20.xml><?xml version="1.0" encoding="utf-8"?>
+<p:sld xmlns:a="http://schemas.openxmlformats.org/drawingml/2006/main" xmlns:p="http://schemas.openxmlformats.org/presentationml/2006/main" xmlns:r="http://schemas.openxmlformats.org/officeDocument/2006/relationships" xmlns:p14="http://schemas.microsoft.com/office/powerpoint/2010/main" xmlns:p15="http://schemas.microsoft.com/office/powerpoint/2012/main" xmlns:mc="http://schemas.openxmlformats.org/markup-compatibility/2006">
+  <p:cSld>
+    <p:bg>
+      <p:bgPr>
+        <a:solidFill>
+          <a:srgbClr val="FFFFFF"/>
+        </a:solidFill>
+      </p:bgPr>
+    </p:bg>
+    <p:spTree>
+      <p:nvGrpSpPr>
+        <p:cNvPr id="1" name=""/>
+        <p:cNvGrpSpPr/>
+        <p:nvPr/>
+      </p:nvGrpSpPr>
+      <p:grpSpPr>
+        <a:xfrm>
+          <a:off x="0" y="0"/>
+          <a:ext cx="0" cy="0"/>
+          <a:chOff x="0" y="0"/>
+          <a:chExt cx="0" cy="0"/>
+        </a:xfrm>
+      </p:grpSpPr>
+      <p:sp>
+        <p:nvSpPr>
+          <p:cNvPr id="144" name="Background"/>
+          <p:cNvSpPr/>
+          <p:nvPr/>
+        </p:nvSpPr>
+        <p:spPr>
+          <a:xfrm>
+            <a:off x="0" y="0"/>
+            <a:ext cx="12191400" cy="6857280"/>
+          </a:xfrm>
+          <a:prstGeom prst="rect">
+            <a:avLst/>
+          </a:prstGeom>
+          <a:solidFill>
+            <a:srgbClr val="F8FAFC"/>
+          </a:solidFill>
+          <a:ln w="12700">
+            <a:solidFill>
+              <a:srgbClr val="F8FAFC"/>
+            </a:solidFill>
+            <a:round/>
+          </a:ln>
+        </p:spPr>
+        <p:style>
+          <a:lnRef idx="0"/>
+          <a:fillRef idx="0"/>
+          <a:effectRef idx="0"/>
+          <a:fontRef idx="minor"/>
+        </p:style>
+        <p:txBody>
+          <a:bodyPr lIns="90000" tIns="45000" rIns="90000" bIns="45000" anchor="t">
+            <a:noAutofit/>
+          </a:bodyPr>
+          <a:p>
+            <a:endParaRPr lang="ru-RU" sz="1800" b="0" u="none" strike="noStrike">
+              <a:solidFill>
+                <a:srgbClr val="000000"/>
+              </a:solidFill>
+              <a:effectLst/>
+              <a:uFillTx/>
+              <a:latin typeface="Arial"/>
+            </a:endParaRPr>
+          </a:p>
+        </p:txBody>
+      </p:sp>
+      <p:sp>
+        <p:nvSpPr>
+          <p:cNvPr id="145" name="Header"/>
+          <p:cNvSpPr/>
+          <p:nvPr/>
+        </p:nvSpPr>
+        <p:spPr>
+          <a:xfrm>
+            <a:off x="0" y="0"/>
+            <a:ext cx="12191400" cy="959400"/>
+          </a:xfrm>
+          <a:prstGeom prst="rect">
+            <a:avLst/>
+          </a:prstGeom>
+          <a:solidFill>
+            <a:srgbClr val="102A43"/>
+          </a:solidFill>
+          <a:ln w="12700">
+            <a:solidFill>
+              <a:srgbClr val="102A43"/>
+            </a:solidFill>
+            <a:round/>
+          </a:ln>
+        </p:spPr>
+        <p:style>
+          <a:lnRef idx="0"/>
+          <a:fillRef idx="0"/>
+          <a:effectRef idx="0"/>
+          <a:fontRef idx="minor"/>
+        </p:style>
+        <p:txBody>
+          <a:bodyPr lIns="90000" tIns="45000" rIns="90000" bIns="45000" anchor="t">
+            <a:noAutofit/>
+          </a:bodyPr>
+          <a:p>
+            <a:endParaRPr lang="ru-RU" sz="1800" b="0" u="none" strike="noStrike">
+              <a:solidFill>
+                <a:srgbClr val="FFFFFF"/>
+              </a:solidFill>
+              <a:effectLst/>
+              <a:uFillTx/>
+              <a:latin typeface="Arial"/>
+            </a:endParaRPr>
+          </a:p>
+        </p:txBody>
+      </p:sp>
+      <p:sp>
+        <p:nvSpPr>
+          <p:cNvPr id="146" name="Accent"/>
+          <p:cNvSpPr/>
+          <p:nvPr/>
+        </p:nvSpPr>
+        <p:spPr>
+          <a:xfrm>
+            <a:off x="0" y="960120"/>
+            <a:ext cx="163800" cy="5897160"/>
+          </a:xfrm>
+          <a:prstGeom prst="rect">
+            <a:avLst/>
+          </a:prstGeom>
+          <a:solidFill>
+            <a:srgbClr val="16A34A"/>
+          </a:solidFill>
+          <a:ln w="12700">
+            <a:solidFill>
+              <a:srgbClr val="16A34A"/>
+            </a:solidFill>
+            <a:round/>
+          </a:ln>
+        </p:spPr>
+        <p:style>
+          <a:lnRef idx="0"/>
+          <a:fillRef idx="0"/>
+          <a:effectRef idx="0"/>
+          <a:fontRef idx="minor"/>
+        </p:style>
+        <p:txBody>
+          <a:bodyPr lIns="82080" tIns="45000" rIns="82080" bIns="45000" anchor="t">
+            <a:noAutofit/>
+          </a:bodyPr>
+          <a:p>
+            <a:endParaRPr lang="ru-RU" sz="1800" b="0" u="none" strike="noStrike">
+              <a:solidFill>
+                <a:srgbClr val="FFFFFF"/>
+              </a:solidFill>
+              <a:effectLst/>
+              <a:uFillTx/>
+              <a:latin typeface="Arial"/>
+            </a:endParaRPr>
+          </a:p>
+        </p:txBody>
+      </p:sp>
+      <p:sp>
+        <p:nvSpPr>
+          <p:cNvPr id="147" name="Title"/>
+          <p:cNvSpPr/>
+          <p:nvPr/>
+        </p:nvSpPr>
+        <p:spPr>
+          <a:xfrm>
+            <a:off x="502920" y="201240"/>
+            <a:ext cx="10880640" cy="657720"/>
+          </a:xfrm>
+          <a:prstGeom prst="rect">
+            <a:avLst/>
+          </a:prstGeom>
+          <a:noFill/>
+          <a:ln w="0">
+            <a:noFill/>
+          </a:ln>
+        </p:spPr>
+        <p:style>
+          <a:lnRef idx="0"/>
+          <a:fillRef idx="0"/>
+          <a:effectRef idx="0"/>
+          <a:fontRef idx="minor"/>
+        </p:style>
+        <p:txBody>
+          <a:bodyPr lIns="180000" tIns="119880" rIns="180000" bIns="119880" anchor="t">
+            <a:noAutofit/>
+          </a:bodyPr>
+          <a:p>
+            <a:pPr>
+              <a:lnSpc>
+                <a:spcPct val="100000"/>
+              </a:lnSpc>
+              <a:tabLst>
+                <a:tab pos="0" algn="l"/>
+              </a:tabLst>
+            </a:pPr>
+            <a:r>
+              <a:rPr lang="ru-RU" sz="3300" b="0" u="none" strike="noStrike">
+                <a:solidFill>
+                  <a:srgbClr val="FFFFFF"/>
+                </a:solidFill>
+                <a:effectLst/>
+                <a:uFillTx/>
+                <a:latin typeface="Arial"/>
+              </a:rPr>
+              <a:t>Результат разработки</a:t>
+            </a:r>
+            <a:endParaRPr lang="ru-RU" sz="3300" b="0" u="none" strike="noStrike">
+              <a:solidFill>
+                <a:srgbClr val="000000"/>
+              </a:solidFill>
+              <a:effectLst/>
+              <a:uFillTx/>
+              <a:latin typeface="Arial"/>
+            </a:endParaRPr>
+          </a:p>
+        </p:txBody>
+      </p:sp>
+      <p:sp>
+        <p:nvSpPr>
+          <p:cNvPr id="148" name="Content"/>
+          <p:cNvSpPr/>
+          <p:nvPr/>
+        </p:nvSpPr>
+        <p:spPr>
+          <a:xfrm>
+            <a:off x="685800" y="1234440"/>
+            <a:ext cx="10194840" cy="4891320"/>
+          </a:xfrm>
+          <a:prstGeom prst="roundRect">
+            <a:avLst>
+              <a:gd name="adj" fmla="val 16667"/>
+            </a:avLst>
+          </a:prstGeom>
+          <a:solidFill>
+            <a:srgbClr val="FFFFFF"/>
+          </a:solidFill>
+          <a:ln w="12700">
+            <a:solidFill>
+              <a:srgbClr val="E2E8F0"/>
+            </a:solidFill>
+            <a:round/>
+          </a:ln>
+        </p:spPr>
+        <p:style>
+          <a:lnRef idx="0"/>
+          <a:fillRef idx="0"/>
+          <a:effectRef idx="0"/>
+          <a:fontRef idx="minor"/>
+        </p:style>
+        <p:txBody>
+          <a:bodyPr lIns="180000" tIns="119880" rIns="180000" bIns="119880" anchor="t">
+            <a:noAutofit/>
+          </a:bodyPr>
+          <a:p>
+            <a:pPr marL="216000" indent="-180000">
+              <a:lnSpc>
+                <a:spcPct val="100000"/>
+              </a:lnSpc>
+              <a:buClr>
+                <a:srgbClr val="111827"/>
+              </a:buClr>
+              <a:buFont typeface="Symbol" charset="2"/>
+              <a:buChar char=""/>
+            </a:pPr>
+            <a:r>
+              <a:rPr lang="ru-RU" sz="2150" b="0" u="none" strike="noStrike">
+                <a:solidFill>
+                  <a:srgbClr val="111827"/>
+                </a:solidFill>
+                <a:effectLst/>
+                <a:uFillTx/>
+                <a:latin typeface="Arial"/>
+              </a:rPr>
+              <a:t>Создана веб-ИС для фитнес-клуба</a:t>
+            </a:r>
+            <a:endParaRPr lang="ru-RU" sz="2150" b="0" u="none" strike="noStrike">
+              <a:solidFill>
+                <a:srgbClr val="000000"/>
+              </a:solidFill>
+              <a:effectLst/>
+              <a:uFillTx/>
+              <a:latin typeface="Arial"/>
+            </a:endParaRPr>
+          </a:p>
+          <a:p>
+            <a:pPr marL="216000" indent="-180000">
+              <a:lnSpc>
+                <a:spcPct val="100000"/>
+              </a:lnSpc>
+              <a:buClr>
+                <a:srgbClr val="111827"/>
+              </a:buClr>
+              <a:buFont typeface="Symbol" charset="2"/>
+              <a:buChar char=""/>
+            </a:pPr>
+            <a:r>
+              <a:rPr lang="ru-RU" sz="2150" b="0" u="none" strike="noStrike">
+                <a:solidFill>
+                  <a:srgbClr val="111827"/>
+                </a:solidFill>
+                <a:effectLst/>
+                <a:uFillTx/>
+                <a:latin typeface="Arial"/>
+              </a:rPr>
+              <a:t>Снижена ручная нагрузка администратора</a:t>
+            </a:r>
+            <a:endParaRPr lang="ru-RU" sz="2150" b="0" u="none" strike="noStrike">
+              <a:solidFill>
+                <a:srgbClr val="000000"/>
+              </a:solidFill>
+              <a:effectLst/>
+              <a:uFillTx/>
+              <a:latin typeface="Arial"/>
+            </a:endParaRPr>
+          </a:p>
+          <a:p>
+            <a:pPr marL="216000" indent="-180000">
+              <a:lnSpc>
+                <a:spcPct val="100000"/>
+              </a:lnSpc>
+              <a:buClr>
+                <a:srgbClr val="111827"/>
+              </a:buClr>
+              <a:buFont typeface="Symbol" charset="2"/>
+              <a:buChar char=""/>
+            </a:pPr>
+            <a:r>
+              <a:rPr lang="ru-RU" sz="2150" b="0" u="none" strike="noStrike">
+                <a:solidFill>
+                  <a:srgbClr val="111827"/>
+                </a:solidFill>
+                <a:effectLst/>
+                <a:uFillTx/>
+                <a:latin typeface="Arial"/>
+              </a:rPr>
+              <a:t>Централизованы расписание, клиенты и абонементы</a:t>
+            </a:r>
+            <a:endParaRPr lang="ru-RU" sz="2150" b="0" u="none" strike="noStrike">
+              <a:solidFill>
+                <a:srgbClr val="000000"/>
+              </a:solidFill>
+              <a:effectLst/>
+              <a:uFillTx/>
+              <a:latin typeface="Arial"/>
+            </a:endParaRPr>
+          </a:p>
+          <a:p>
+            <a:pPr marL="216000" indent="-180000">
+              <a:lnSpc>
+                <a:spcPct val="100000"/>
+              </a:lnSpc>
+              <a:buClr>
+                <a:srgbClr val="111827"/>
+              </a:buClr>
+              <a:buFont typeface="Symbol" charset="2"/>
+              <a:buChar char=""/>
+            </a:pPr>
+            <a:r>
+              <a:rPr lang="ru-RU" sz="2150" b="0" u="none" strike="noStrike">
+                <a:solidFill>
+                  <a:srgbClr val="111827"/>
+                </a:solidFill>
+                <a:effectLst/>
+                <a:uFillTx/>
+                <a:latin typeface="Arial"/>
+              </a:rPr>
+              <a:t>Добавлены аналитика и отчетность</a:t>
+            </a:r>
+            <a:endParaRPr lang="ru-RU" sz="2150" b="0" u="none" strike="noStrike">
+              <a:solidFill>
+                <a:srgbClr val="000000"/>
+              </a:solidFill>
+              <a:effectLst/>
+              <a:uFillTx/>
+              <a:latin typeface="Arial"/>
+            </a:endParaRPr>
+          </a:p>
+          <a:p>
+            <a:pPr marL="216000" indent="-180000">
+              <a:lnSpc>
+                <a:spcPct val="100000"/>
+              </a:lnSpc>
+              <a:buClr>
+                <a:srgbClr val="111827"/>
+              </a:buClr>
+              <a:buFont typeface="Symbol" charset="2"/>
+              <a:buChar char=""/>
+            </a:pPr>
+            <a:r>
+              <a:rPr lang="ru-RU" sz="2150" b="0" u="none" strike="noStrike">
+                <a:solidFill>
+                  <a:srgbClr val="111827"/>
+                </a:solidFill>
+                <a:effectLst/>
+                <a:uFillTx/>
+                <a:latin typeface="Arial"/>
+              </a:rPr>
+              <a:t>Архитектура допускает дальнейшее развитие</a:t>
+            </a:r>
+            <a:endParaRPr lang="ru-RU" sz="2150" b="0" u="none" strike="noStrike">
+              <a:solidFill>
+                <a:srgbClr val="000000"/>
+              </a:solidFill>
+              <a:effectLst/>
+              <a:uFillTx/>
+              <a:latin typeface="Arial"/>
+            </a:endParaRPr>
+          </a:p>
+        </p:txBody>
+      </p:sp>
+      <p:sp>
+        <p:nvSpPr>
+          <p:cNvPr id="149" name="Footer"/>
+          <p:cNvSpPr/>
+          <p:nvPr/>
+        </p:nvSpPr>
+        <p:spPr>
+          <a:xfrm>
+            <a:off x="10625400" y="6473880"/>
+            <a:ext cx="639360" cy="227880"/>
+          </a:xfrm>
+          <a:prstGeom prst="rect">
+            <a:avLst/>
+          </a:prstGeom>
+          <a:noFill/>
+          <a:ln w="0">
+            <a:noFill/>
+          </a:ln>
+        </p:spPr>
+        <p:style>
+          <a:lnRef idx="0"/>
+          <a:fillRef idx="0"/>
+          <a:effectRef idx="0"/>
+          <a:fontRef idx="minor"/>
+        </p:style>
+        <p:txBody>
+          <a:bodyPr lIns="180000" tIns="114120" rIns="180000" bIns="114120" anchor="t">
+            <a:noAutofit/>
+          </a:bodyPr>
+          <a:p>
+            <a:pPr>
+              <a:lnSpc>
+                <a:spcPct val="100000"/>
+              </a:lnSpc>
+              <a:tabLst>
+                <a:tab pos="0" algn="l"/>
+              </a:tabLst>
+            </a:pPr>
+            <a:r>
+              <a:rPr lang="ru-RU" sz="3300" b="0" u="none" strike="noStrike">
+                <a:solidFill>
+                  <a:srgbClr val="64748B"/>
+                </a:solidFill>
+                <a:effectLst/>
+                <a:uFillTx/>
+                <a:latin typeface="Arial"/>
+              </a:rPr>
+              <a:t>20</a:t>
+            </a:r>
+            <a:endParaRPr lang="ru-RU" sz="3300" b="0" u="none" strike="noStrike">
+              <a:solidFill>
+                <a:srgbClr val="000000"/>
+              </a:solidFill>
+              <a:effectLst/>
+              <a:uFillTx/>
+              <a:latin typeface="Arial"/>
+            </a:endParaRPr>
+          </a:p>
+        </p:txBody>
+      </p:sp>
+    </p:spTree>
+  </p:cSld>
+  <mc:AlternateContent>
+    <mc:Choice Requires="p14">
+      <p:transition spd="slow" p14:dur="2000"/>
+    </mc:Choice>
+    <mc:Fallback>
+      <p:transition spd="slow"/>
+    </mc:Fallback>
+  </mc:AlternateContent>
+</p:sld>
+</file>
+
+<file path=ppt/slides/slide21.xml><?xml version="1.0" encoding="utf-8"?>
+<p:sld xmlns:a="http://schemas.openxmlformats.org/drawingml/2006/main" xmlns:p="http://schemas.openxmlformats.org/presentationml/2006/main" xmlns:r="http://schemas.openxmlformats.org/officeDocument/2006/relationships" xmlns:p14="http://schemas.microsoft.com/office/powerpoint/2010/main" xmlns:p15="http://schemas.microsoft.com/office/powerpoint/2012/main" xmlns:mc="http://schemas.openxmlformats.org/markup-compatibility/2006">
+  <p:cSld>
+    <p:bg>
+      <p:bgPr>
+        <a:solidFill>
+          <a:srgbClr val="FFFFFF"/>
+        </a:solidFill>
+      </p:bgPr>
+    </p:bg>
+    <p:spTree>
+      <p:nvGrpSpPr>
+        <p:cNvPr id="1" name=""/>
+        <p:cNvGrpSpPr/>
+        <p:nvPr/>
+      </p:nvGrpSpPr>
+      <p:grpSpPr>
+        <a:xfrm>
+          <a:off x="0" y="0"/>
+          <a:ext cx="0" cy="0"/>
+          <a:chOff x="0" y="0"/>
+          <a:chExt cx="0" cy="0"/>
+        </a:xfrm>
+      </p:grpSpPr>
+      <p:sp>
+        <p:nvSpPr>
+          <p:cNvPr id="150" name="Background"/>
+          <p:cNvSpPr/>
+          <p:nvPr/>
+        </p:nvSpPr>
+        <p:spPr>
+          <a:xfrm>
+            <a:off x="0" y="0"/>
+            <a:ext cx="12191400" cy="6857280"/>
+          </a:xfrm>
+          <a:prstGeom prst="rect">
+            <a:avLst/>
+          </a:prstGeom>
+          <a:solidFill>
+            <a:srgbClr val="F8FAFC"/>
+          </a:solidFill>
+          <a:ln w="12700">
+            <a:solidFill>
+              <a:srgbClr val="F8FAFC"/>
+            </a:solidFill>
+            <a:round/>
+          </a:ln>
+        </p:spPr>
+        <p:style>
+          <a:lnRef idx="0"/>
+          <a:fillRef idx="0"/>
+          <a:effectRef idx="0"/>
+          <a:fontRef idx="minor"/>
+        </p:style>
+        <p:txBody>
+          <a:bodyPr lIns="90000" tIns="45000" rIns="90000" bIns="45000" anchor="t">
+            <a:noAutofit/>
+          </a:bodyPr>
+          <a:p>
+            <a:endParaRPr lang="ru-RU" sz="1800" b="0" u="none" strike="noStrike">
+              <a:solidFill>
+                <a:srgbClr val="000000"/>
+              </a:solidFill>
+              <a:effectLst/>
+              <a:uFillTx/>
+              <a:latin typeface="Arial"/>
+            </a:endParaRPr>
+          </a:p>
+        </p:txBody>
+      </p:sp>
+      <p:sp>
+        <p:nvSpPr>
+          <p:cNvPr id="151" name="Header"/>
+          <p:cNvSpPr/>
+          <p:nvPr/>
+        </p:nvSpPr>
+        <p:spPr>
+          <a:xfrm>
+            <a:off x="0" y="0"/>
+            <a:ext cx="12191400" cy="959400"/>
+          </a:xfrm>
+          <a:prstGeom prst="rect">
+            <a:avLst/>
+          </a:prstGeom>
+          <a:solidFill>
+            <a:srgbClr val="102A43"/>
+          </a:solidFill>
+          <a:ln w="12700">
+            <a:solidFill>
+              <a:srgbClr val="102A43"/>
+            </a:solidFill>
+            <a:round/>
+          </a:ln>
+        </p:spPr>
+        <p:style>
+          <a:lnRef idx="0"/>
+          <a:fillRef idx="0"/>
+          <a:effectRef idx="0"/>
+          <a:fontRef idx="minor"/>
+        </p:style>
+        <p:txBody>
+          <a:bodyPr lIns="90000" tIns="45000" rIns="90000" bIns="45000" anchor="t">
+            <a:noAutofit/>
+          </a:bodyPr>
+          <a:p>
+            <a:endParaRPr lang="ru-RU" sz="1800" b="0" u="none" strike="noStrike">
+              <a:solidFill>
+                <a:srgbClr val="FFFFFF"/>
+              </a:solidFill>
+              <a:effectLst/>
+              <a:uFillTx/>
+              <a:latin typeface="Arial"/>
+            </a:endParaRPr>
+          </a:p>
+        </p:txBody>
+      </p:sp>
+      <p:sp>
+        <p:nvSpPr>
+          <p:cNvPr id="152" name="Accent"/>
+          <p:cNvSpPr/>
+          <p:nvPr/>
+        </p:nvSpPr>
+        <p:spPr>
+          <a:xfrm>
+            <a:off x="0" y="960120"/>
+            <a:ext cx="163800" cy="5897160"/>
+          </a:xfrm>
+          <a:prstGeom prst="rect">
+            <a:avLst/>
+          </a:prstGeom>
+          <a:solidFill>
+            <a:srgbClr val="16A34A"/>
+          </a:solidFill>
+          <a:ln w="12700">
+            <a:solidFill>
+              <a:srgbClr val="16A34A"/>
+            </a:solidFill>
+            <a:round/>
+          </a:ln>
+        </p:spPr>
+        <p:style>
+          <a:lnRef idx="0"/>
+          <a:fillRef idx="0"/>
+          <a:effectRef idx="0"/>
+          <a:fontRef idx="minor"/>
+        </p:style>
+        <p:txBody>
+          <a:bodyPr lIns="82080" tIns="45000" rIns="82080" bIns="45000" anchor="t">
+            <a:noAutofit/>
+          </a:bodyPr>
+          <a:p>
+            <a:endParaRPr lang="ru-RU" sz="1800" b="0" u="none" strike="noStrike">
+              <a:solidFill>
+                <a:srgbClr val="FFFFFF"/>
+              </a:solidFill>
+              <a:effectLst/>
+              <a:uFillTx/>
+              <a:latin typeface="Arial"/>
+            </a:endParaRPr>
+          </a:p>
+        </p:txBody>
+      </p:sp>
+      <p:sp>
+        <p:nvSpPr>
+          <p:cNvPr id="153" name="Title"/>
+          <p:cNvSpPr/>
+          <p:nvPr/>
+        </p:nvSpPr>
+        <p:spPr>
+          <a:xfrm>
+            <a:off x="502920" y="201240"/>
+            <a:ext cx="10880640" cy="657720"/>
+          </a:xfrm>
+          <a:prstGeom prst="rect">
+            <a:avLst/>
+          </a:prstGeom>
+          <a:noFill/>
+          <a:ln w="0">
+            <a:noFill/>
+          </a:ln>
+        </p:spPr>
+        <p:style>
+          <a:lnRef idx="0"/>
+          <a:fillRef idx="0"/>
+          <a:effectRef idx="0"/>
+          <a:fontRef idx="minor"/>
+        </p:style>
+        <p:txBody>
+          <a:bodyPr lIns="180000" tIns="119880" rIns="180000" bIns="119880" anchor="t">
+            <a:noAutofit/>
+          </a:bodyPr>
+          <a:p>
+            <a:pPr>
+              <a:lnSpc>
+                <a:spcPct val="100000"/>
+              </a:lnSpc>
+              <a:tabLst>
+                <a:tab pos="0" algn="l"/>
+              </a:tabLst>
+            </a:pPr>
+            <a:r>
+              <a:rPr lang="ru-RU" sz="3300" b="0" u="none" strike="noStrike">
+                <a:solidFill>
+                  <a:srgbClr val="FFFFFF"/>
+                </a:solidFill>
+                <a:effectLst/>
+                <a:uFillTx/>
+                <a:latin typeface="Arial"/>
+              </a:rPr>
+              <a:t>Заключение</a:t>
+            </a:r>
+            <a:endParaRPr lang="ru-RU" sz="3300" b="0" u="none" strike="noStrike">
+              <a:solidFill>
+                <a:srgbClr val="000000"/>
+              </a:solidFill>
+              <a:effectLst/>
+              <a:uFillTx/>
+              <a:latin typeface="Arial"/>
+            </a:endParaRPr>
+          </a:p>
+        </p:txBody>
+      </p:sp>
+      <p:sp>
+        <p:nvSpPr>
+          <p:cNvPr id="154" name="Content"/>
+          <p:cNvSpPr/>
+          <p:nvPr/>
+        </p:nvSpPr>
+        <p:spPr>
+          <a:xfrm>
+            <a:off x="685800" y="1234440"/>
+            <a:ext cx="10194840" cy="4891320"/>
+          </a:xfrm>
+          <a:prstGeom prst="roundRect">
+            <a:avLst>
+              <a:gd name="adj" fmla="val 16667"/>
+            </a:avLst>
+          </a:prstGeom>
+          <a:solidFill>
+            <a:srgbClr val="FFFFFF"/>
+          </a:solidFill>
+          <a:ln w="12700">
+            <a:solidFill>
+              <a:srgbClr val="E2E8F0"/>
+            </a:solidFill>
+            <a:round/>
+          </a:ln>
+        </p:spPr>
+        <p:style>
+          <a:lnRef idx="0"/>
+          <a:fillRef idx="0"/>
+          <a:effectRef idx="0"/>
+          <a:fontRef idx="minor"/>
+        </p:style>
+        <p:txBody>
+          <a:bodyPr lIns="180000" tIns="119880" rIns="180000" bIns="119880" anchor="t">
+            <a:noAutofit/>
+          </a:bodyPr>
+          <a:p>
+            <a:pPr marL="216000" indent="-180000">
+              <a:lnSpc>
+                <a:spcPct val="100000"/>
+              </a:lnSpc>
+              <a:buClr>
+                <a:srgbClr val="111827"/>
+              </a:buClr>
+              <a:buFont typeface="Symbol" charset="2"/>
+              <a:buChar char=""/>
+            </a:pPr>
+            <a:r>
+              <a:rPr lang="ru-RU" sz="2150" b="0" u="none" strike="noStrike">
+                <a:solidFill>
+                  <a:srgbClr val="111827"/>
+                </a:solidFill>
+                <a:effectLst/>
+                <a:uFillTx/>
+                <a:latin typeface="Arial"/>
+              </a:rPr>
+              <a:t>Цель ВКР достигнута</a:t>
+            </a:r>
+            <a:endParaRPr lang="ru-RU" sz="2150" b="0" u="none" strike="noStrike">
+              <a:solidFill>
+                <a:srgbClr val="000000"/>
+              </a:solidFill>
+              <a:effectLst/>
+              <a:uFillTx/>
+              <a:latin typeface="Arial"/>
+            </a:endParaRPr>
+          </a:p>
+          <a:p>
+            <a:pPr marL="216000" indent="-180000">
+              <a:lnSpc>
+                <a:spcPct val="100000"/>
+              </a:lnSpc>
+              <a:buClr>
+                <a:srgbClr val="111827"/>
+              </a:buClr>
+              <a:buFont typeface="Symbol" charset="2"/>
+              <a:buChar char=""/>
+            </a:pPr>
+            <a:r>
+              <a:rPr lang="ru-RU" sz="2150" b="0" u="none" strike="noStrike">
+                <a:solidFill>
+                  <a:srgbClr val="111827"/>
+                </a:solidFill>
+                <a:effectLst/>
+                <a:uFillTx/>
+                <a:latin typeface="Arial"/>
+              </a:rPr>
+              <a:t>Разработаны пользовательская и административная части</a:t>
+            </a:r>
+            <a:endParaRPr lang="ru-RU" sz="2150" b="0" u="none" strike="noStrike">
+              <a:solidFill>
+                <a:srgbClr val="000000"/>
+              </a:solidFill>
+              <a:effectLst/>
+              <a:uFillTx/>
+              <a:latin typeface="Arial"/>
+            </a:endParaRPr>
+          </a:p>
+          <a:p>
+            <a:pPr marL="216000" indent="-180000">
+              <a:lnSpc>
+                <a:spcPct val="100000"/>
+              </a:lnSpc>
+              <a:buClr>
+                <a:srgbClr val="111827"/>
+              </a:buClr>
+              <a:buFont typeface="Symbol" charset="2"/>
+              <a:buChar char=""/>
+            </a:pPr>
+            <a:r>
+              <a:rPr lang="ru-RU" sz="2150" b="0" u="none" strike="noStrike">
+                <a:solidFill>
+                  <a:srgbClr val="111827"/>
+                </a:solidFill>
+                <a:effectLst/>
+                <a:uFillTx/>
+                <a:latin typeface="Arial"/>
+              </a:rPr>
+              <a:t>Реализованы абонементы, уведомления и отчеты</a:t>
+            </a:r>
+            <a:endParaRPr lang="ru-RU" sz="2150" b="0" u="none" strike="noStrike">
+              <a:solidFill>
+                <a:srgbClr val="000000"/>
+              </a:solidFill>
+              <a:effectLst/>
+              <a:uFillTx/>
+              <a:latin typeface="Arial"/>
+            </a:endParaRPr>
+          </a:p>
+          <a:p>
+            <a:pPr marL="216000" indent="-180000">
+              <a:lnSpc>
+                <a:spcPct val="100000"/>
+              </a:lnSpc>
+              <a:buClr>
+                <a:srgbClr val="111827"/>
+              </a:buClr>
+              <a:buFont typeface="Symbol" charset="2"/>
+              <a:buChar char=""/>
+            </a:pPr>
+            <a:r>
+              <a:rPr lang="ru-RU" sz="2150" b="0" u="none" strike="noStrike">
+                <a:solidFill>
+                  <a:srgbClr val="111827"/>
+                </a:solidFill>
+                <a:effectLst/>
+                <a:uFillTx/>
+                <a:latin typeface="Arial"/>
+              </a:rPr>
+              <a:t>Проведено тестирование ключевых сценариев</a:t>
+            </a:r>
+            <a:endParaRPr lang="ru-RU" sz="2150" b="0" u="none" strike="noStrike">
+              <a:solidFill>
+                <a:srgbClr val="000000"/>
+              </a:solidFill>
+              <a:effectLst/>
+              <a:uFillTx/>
+              <a:latin typeface="Arial"/>
+            </a:endParaRPr>
+          </a:p>
+          <a:p>
+            <a:pPr marL="216000" indent="-180000">
+              <a:lnSpc>
+                <a:spcPct val="100000"/>
+              </a:lnSpc>
+              <a:buClr>
+                <a:srgbClr val="111827"/>
+              </a:buClr>
+              <a:buFont typeface="Symbol" charset="2"/>
+              <a:buChar char=""/>
+            </a:pPr>
+            <a:r>
+              <a:rPr lang="ru-RU" sz="2150" b="0" u="none" strike="noStrike">
+                <a:solidFill>
+                  <a:srgbClr val="111827"/>
+                </a:solidFill>
+                <a:effectLst/>
+                <a:uFillTx/>
+                <a:latin typeface="Arial"/>
+              </a:rPr>
+              <a:t>Перспективы: онлайн-оплата, мобильная версия, кабинет тренера</a:t>
+            </a:r>
+            <a:endParaRPr lang="ru-RU" sz="2150" b="0" u="none" strike="noStrike">
+              <a:solidFill>
+                <a:srgbClr val="000000"/>
+              </a:solidFill>
+              <a:effectLst/>
+              <a:uFillTx/>
+              <a:latin typeface="Arial"/>
+            </a:endParaRPr>
+          </a:p>
+        </p:txBody>
+      </p:sp>
+      <p:sp>
+        <p:nvSpPr>
+          <p:cNvPr id="155" name="Footer"/>
+          <p:cNvSpPr/>
+          <p:nvPr/>
+        </p:nvSpPr>
+        <p:spPr>
+          <a:xfrm>
+            <a:off x="10625400" y="6473880"/>
+            <a:ext cx="639360" cy="227880"/>
+          </a:xfrm>
+          <a:prstGeom prst="rect">
+            <a:avLst/>
+          </a:prstGeom>
+          <a:noFill/>
+          <a:ln w="0">
+            <a:noFill/>
+          </a:ln>
+        </p:spPr>
+        <p:style>
+          <a:lnRef idx="0"/>
+          <a:fillRef idx="0"/>
+          <a:effectRef idx="0"/>
+          <a:fontRef idx="minor"/>
+        </p:style>
+        <p:txBody>
+          <a:bodyPr lIns="180000" tIns="114120" rIns="180000" bIns="114120" anchor="t">
+            <a:noAutofit/>
+          </a:bodyPr>
+          <a:p>
+            <a:pPr>
+              <a:lnSpc>
+                <a:spcPct val="100000"/>
+              </a:lnSpc>
+              <a:tabLst>
+                <a:tab pos="0" algn="l"/>
+              </a:tabLst>
+            </a:pPr>
+            <a:r>
+              <a:rPr lang="ru-RU" sz="3300" b="0" u="none" strike="noStrike">
+                <a:solidFill>
+                  <a:srgbClr val="64748B"/>
+                </a:solidFill>
+                <a:effectLst/>
+                <a:uFillTx/>
+                <a:latin typeface="Arial"/>
+              </a:rPr>
+              <a:t>21</a:t>
             </a:r>
             <a:endParaRPr lang="ru-RU" sz="3300" b="0" u="none" strike="noStrike">
               <a:solidFill>
@@ -4984,7 +8094,7 @@
         <p:spPr>
           <a:xfrm>
             <a:off x="0" y="0"/>
-            <a:ext cx="12191760" cy="6857640"/>
+            <a:ext cx="12191400" cy="6857280"/>
           </a:xfrm>
           <a:prstGeom prst="rect">
             <a:avLst/>
@@ -5030,7 +8140,7 @@
         <p:spPr>
           <a:xfrm>
             <a:off x="0" y="0"/>
-            <a:ext cx="12191760" cy="959760"/>
+            <a:ext cx="12191400" cy="959400"/>
           </a:xfrm>
           <a:prstGeom prst="rect">
             <a:avLst/>
@@ -5076,7 +8186,7 @@
         <p:spPr>
           <a:xfrm>
             <a:off x="0" y="960120"/>
-            <a:ext cx="164160" cy="5897520"/>
+            <a:ext cx="163800" cy="5897160"/>
           </a:xfrm>
           <a:prstGeom prst="rect">
             <a:avLst/>
@@ -5098,7 +8208,7 @@
           <a:fontRef idx="minor"/>
         </p:style>
         <p:txBody>
-          <a:bodyPr lIns="90000" tIns="45000" rIns="90000" bIns="45000" anchor="t">
+          <a:bodyPr lIns="82080" tIns="45000" rIns="82080" bIns="45000" anchor="t">
             <a:noAutofit/>
           </a:bodyPr>
           <a:p>
@@ -5122,7 +8232,7 @@
         <p:spPr>
           <a:xfrm>
             <a:off x="502920" y="201240"/>
-            <a:ext cx="10881000" cy="658080"/>
+            <a:ext cx="10880640" cy="657720"/>
           </a:xfrm>
           <a:prstGeom prst="rect">
             <a:avLst/>
@@ -5182,7 +8292,7 @@
         <p:spPr>
           <a:xfrm>
             <a:off x="685800" y="1234440"/>
-            <a:ext cx="10195200" cy="4891680"/>
+            <a:ext cx="10194840" cy="4891320"/>
           </a:xfrm>
           <a:prstGeom prst="roundRect">
             <a:avLst>
@@ -5210,7 +8320,7 @@
             <a:noAutofit/>
           </a:bodyPr>
           <a:p>
-            <a:pPr indent="-180000">
+            <a:pPr marL="216000" indent="-180000">
               <a:lnSpc>
                 <a:spcPct val="100000"/>
               </a:lnSpc>
@@ -5241,7 +8351,7 @@
             </a:endParaRPr>
           </a:p>
           <a:p>
-            <a:pPr indent="-180000">
+            <a:pPr marL="216000" indent="-180000">
               <a:lnSpc>
                 <a:spcPct val="100000"/>
               </a:lnSpc>
@@ -5272,7 +8382,7 @@
             </a:endParaRPr>
           </a:p>
           <a:p>
-            <a:pPr indent="-180000">
+            <a:pPr marL="216000" indent="-180000">
               <a:lnSpc>
                 <a:spcPct val="100000"/>
               </a:lnSpc>
@@ -5303,7 +8413,7 @@
             </a:endParaRPr>
           </a:p>
           <a:p>
-            <a:pPr indent="-180000">
+            <a:pPr marL="216000" indent="-180000">
               <a:lnSpc>
                 <a:spcPct val="100000"/>
               </a:lnSpc>
@@ -5334,7 +8444,7 @@
             </a:endParaRPr>
           </a:p>
           <a:p>
-            <a:pPr indent="-180000">
+            <a:pPr marL="216000" indent="-180000">
               <a:lnSpc>
                 <a:spcPct val="100000"/>
               </a:lnSpc>
@@ -5365,7 +8475,7 @@
             </a:endParaRPr>
           </a:p>
           <a:p>
-            <a:pPr indent="-180000">
+            <a:pPr marL="216000" indent="-180000">
               <a:lnSpc>
                 <a:spcPct val="100000"/>
               </a:lnSpc>
@@ -5406,7 +8516,7 @@
         <p:spPr>
           <a:xfrm>
             <a:off x="10625400" y="6473880"/>
-            <a:ext cx="639720" cy="228240"/>
+            <a:ext cx="639360" cy="227880"/>
           </a:xfrm>
           <a:prstGeom prst="rect">
             <a:avLst/>
@@ -5503,7 +8613,7 @@
         <p:spPr>
           <a:xfrm>
             <a:off x="0" y="0"/>
-            <a:ext cx="12191760" cy="6857640"/>
+            <a:ext cx="12191400" cy="6857280"/>
           </a:xfrm>
           <a:prstGeom prst="rect">
             <a:avLst/>
@@ -5549,7 +8659,7 @@
         <p:spPr>
           <a:xfrm>
             <a:off x="0" y="0"/>
-            <a:ext cx="12191760" cy="959760"/>
+            <a:ext cx="12191400" cy="959400"/>
           </a:xfrm>
           <a:prstGeom prst="rect">
             <a:avLst/>
@@ -5595,7 +8705,7 @@
         <p:spPr>
           <a:xfrm>
             <a:off x="0" y="960120"/>
-            <a:ext cx="164160" cy="5897520"/>
+            <a:ext cx="163800" cy="5897160"/>
           </a:xfrm>
           <a:prstGeom prst="rect">
             <a:avLst/>
@@ -5617,7 +8727,7 @@
           <a:fontRef idx="minor"/>
         </p:style>
         <p:txBody>
-          <a:bodyPr lIns="90000" tIns="45000" rIns="90000" bIns="45000" anchor="t">
+          <a:bodyPr lIns="82080" tIns="45000" rIns="82080" bIns="45000" anchor="t">
             <a:noAutofit/>
           </a:bodyPr>
           <a:p>
@@ -5641,7 +8751,7 @@
         <p:spPr>
           <a:xfrm>
             <a:off x="502920" y="201240"/>
-            <a:ext cx="10881000" cy="658080"/>
+            <a:ext cx="10880640" cy="657720"/>
           </a:xfrm>
           <a:prstGeom prst="rect">
             <a:avLst/>
@@ -5701,7 +8811,7 @@
         <p:spPr>
           <a:xfrm>
             <a:off x="685800" y="1234440"/>
-            <a:ext cx="10195200" cy="4891680"/>
+            <a:ext cx="10194840" cy="4891320"/>
           </a:xfrm>
           <a:prstGeom prst="roundRect">
             <a:avLst>
@@ -5729,7 +8839,7 @@
             <a:noAutofit/>
           </a:bodyPr>
           <a:p>
-            <a:pPr indent="-180000">
+            <a:pPr marL="216000" indent="-180000">
               <a:lnSpc>
                 <a:spcPct val="100000"/>
               </a:lnSpc>
@@ -5760,7 +8870,7 @@
             </a:endParaRPr>
           </a:p>
           <a:p>
-            <a:pPr indent="-180000">
+            <a:pPr marL="216000" indent="-180000">
               <a:lnSpc>
                 <a:spcPct val="100000"/>
               </a:lnSpc>
@@ -5791,7 +8901,7 @@
             </a:endParaRPr>
           </a:p>
           <a:p>
-            <a:pPr indent="-180000">
+            <a:pPr marL="216000" indent="-180000">
               <a:lnSpc>
                 <a:spcPct val="100000"/>
               </a:lnSpc>
@@ -5822,7 +8932,7 @@
             </a:endParaRPr>
           </a:p>
           <a:p>
-            <a:pPr indent="-180000">
+            <a:pPr marL="216000" indent="-180000">
               <a:lnSpc>
                 <a:spcPct val="100000"/>
               </a:lnSpc>
@@ -5863,7 +8973,7 @@
         <p:spPr>
           <a:xfrm>
             <a:off x="10625400" y="6473880"/>
-            <a:ext cx="639720" cy="228240"/>
+            <a:ext cx="639360" cy="227880"/>
           </a:xfrm>
           <a:prstGeom prst="rect">
             <a:avLst/>
@@ -5960,7 +9070,7 @@
         <p:spPr>
           <a:xfrm>
             <a:off x="0" y="0"/>
-            <a:ext cx="12191760" cy="6857640"/>
+            <a:ext cx="12191400" cy="6857280"/>
           </a:xfrm>
           <a:prstGeom prst="rect">
             <a:avLst/>
@@ -6006,7 +9116,7 @@
         <p:spPr>
           <a:xfrm>
             <a:off x="0" y="0"/>
-            <a:ext cx="12191760" cy="959760"/>
+            <a:ext cx="12191400" cy="959400"/>
           </a:xfrm>
           <a:prstGeom prst="rect">
             <a:avLst/>
@@ -6052,7 +9162,7 @@
         <p:spPr>
           <a:xfrm>
             <a:off x="0" y="960120"/>
-            <a:ext cx="164160" cy="5897520"/>
+            <a:ext cx="163800" cy="5897160"/>
           </a:xfrm>
           <a:prstGeom prst="rect">
             <a:avLst/>
@@ -6074,7 +9184,7 @@
           <a:fontRef idx="minor"/>
         </p:style>
         <p:txBody>
-          <a:bodyPr lIns="90000" tIns="45000" rIns="90000" bIns="45000" anchor="t">
+          <a:bodyPr lIns="82080" tIns="45000" rIns="82080" bIns="45000" anchor="t">
             <a:noAutofit/>
           </a:bodyPr>
           <a:p>
@@ -6098,7 +9208,7 @@
         <p:spPr>
           <a:xfrm>
             <a:off x="502920" y="201240"/>
-            <a:ext cx="10881000" cy="658080"/>
+            <a:ext cx="10880640" cy="657720"/>
           </a:xfrm>
           <a:prstGeom prst="rect">
             <a:avLst/>
@@ -6158,7 +9268,7 @@
         <p:spPr>
           <a:xfrm>
             <a:off x="685800" y="1234440"/>
-            <a:ext cx="10195200" cy="4891680"/>
+            <a:ext cx="10194840" cy="4891320"/>
           </a:xfrm>
           <a:prstGeom prst="roundRect">
             <a:avLst>
@@ -6186,7 +9296,7 @@
             <a:noAutofit/>
           </a:bodyPr>
           <a:p>
-            <a:pPr indent="-180000">
+            <a:pPr marL="216000" indent="-180000">
               <a:lnSpc>
                 <a:spcPct val="100000"/>
               </a:lnSpc>
@@ -6217,7 +9327,7 @@
             </a:endParaRPr>
           </a:p>
           <a:p>
-            <a:pPr indent="-180000">
+            <a:pPr marL="216000" indent="-180000">
               <a:lnSpc>
                 <a:spcPct val="100000"/>
               </a:lnSpc>
@@ -6248,7 +9358,7 @@
             </a:endParaRPr>
           </a:p>
           <a:p>
-            <a:pPr indent="-180000">
+            <a:pPr marL="216000" indent="-180000">
               <a:lnSpc>
                 <a:spcPct val="100000"/>
               </a:lnSpc>
@@ -6279,7 +9389,7 @@
             </a:endParaRPr>
           </a:p>
           <a:p>
-            <a:pPr indent="-180000">
+            <a:pPr marL="216000" indent="-180000">
               <a:lnSpc>
                 <a:spcPct val="100000"/>
               </a:lnSpc>
@@ -6310,7 +9420,7 @@
             </a:endParaRPr>
           </a:p>
           <a:p>
-            <a:pPr indent="-180000">
+            <a:pPr marL="216000" indent="-180000">
               <a:lnSpc>
                 <a:spcPct val="100000"/>
               </a:lnSpc>
@@ -6341,7 +9451,7 @@
             </a:endParaRPr>
           </a:p>
           <a:p>
-            <a:pPr indent="-180000">
+            <a:pPr marL="216000" indent="-180000">
               <a:lnSpc>
                 <a:spcPct val="100000"/>
               </a:lnSpc>
@@ -6382,7 +9492,7 @@
         <p:spPr>
           <a:xfrm>
             <a:off x="10625400" y="6473880"/>
-            <a:ext cx="639720" cy="228240"/>
+            <a:ext cx="639360" cy="227880"/>
           </a:xfrm>
           <a:prstGeom prst="rect">
             <a:avLst/>
@@ -6479,7 +9589,7 @@
         <p:spPr>
           <a:xfrm>
             <a:off x="0" y="0"/>
-            <a:ext cx="12191760" cy="6857640"/>
+            <a:ext cx="12191400" cy="6857280"/>
           </a:xfrm>
           <a:prstGeom prst="rect">
             <a:avLst/>
@@ -6525,7 +9635,7 @@
         <p:spPr>
           <a:xfrm>
             <a:off x="0" y="0"/>
-            <a:ext cx="12191760" cy="959760"/>
+            <a:ext cx="12191400" cy="959400"/>
           </a:xfrm>
           <a:prstGeom prst="rect">
             <a:avLst/>
@@ -6571,7 +9681,7 @@
         <p:spPr>
           <a:xfrm>
             <a:off x="0" y="960120"/>
-            <a:ext cx="164160" cy="5897520"/>
+            <a:ext cx="163800" cy="5897160"/>
           </a:xfrm>
           <a:prstGeom prst="rect">
             <a:avLst/>
@@ -6593,7 +9703,7 @@
           <a:fontRef idx="minor"/>
         </p:style>
         <p:txBody>
-          <a:bodyPr lIns="90000" tIns="45000" rIns="90000" bIns="45000" anchor="t">
+          <a:bodyPr lIns="82080" tIns="45000" rIns="82080" bIns="45000" anchor="t">
             <a:noAutofit/>
           </a:bodyPr>
           <a:p>
@@ -6617,7 +9727,7 @@
         <p:spPr>
           <a:xfrm>
             <a:off x="502920" y="201240"/>
-            <a:ext cx="10881000" cy="658080"/>
+            <a:ext cx="10880640" cy="657720"/>
           </a:xfrm>
           <a:prstGeom prst="rect">
             <a:avLst/>
@@ -6655,7 +9765,7 @@
                 <a:uFillTx/>
                 <a:latin typeface="Arial"/>
               </a:rPr>
-              <a:t>Технологический стек</a:t>
+              <a:t>Диаграмма прецедентов</a:t>
             </a:r>
             <a:endParaRPr lang="ru-RU" sz="3300" b="0" u="none" strike="noStrike">
               <a:solidFill>
@@ -6677,7 +9787,7 @@
         <p:spPr>
           <a:xfrm>
             <a:off x="685800" y="1234440"/>
-            <a:ext cx="10195200" cy="4891680"/>
+            <a:ext cx="5531400" cy="4891320"/>
           </a:xfrm>
           <a:prstGeom prst="roundRect">
             <a:avLst>
@@ -6705,7 +9815,7 @@
             <a:noAutofit/>
           </a:bodyPr>
           <a:p>
-            <a:pPr indent="-180000">
+            <a:pPr marL="216000" indent="-180000">
               <a:lnSpc>
                 <a:spcPct val="100000"/>
               </a:lnSpc>
@@ -6724,7 +9834,7 @@
                 <a:uFillTx/>
                 <a:latin typeface="Arial"/>
               </a:rPr>
-              <a:t>Python и Flask — серверная часть</a:t>
+              <a:t>Клиент работает с расписанием, записью и абонементами</a:t>
             </a:r>
             <a:endParaRPr lang="ru-RU" sz="2150" b="0" u="none" strike="noStrike">
               <a:solidFill>
@@ -6736,7 +9846,7 @@
             </a:endParaRPr>
           </a:p>
           <a:p>
-            <a:pPr indent="-180000">
+            <a:pPr marL="216000" indent="-180000">
               <a:lnSpc>
                 <a:spcPct val="100000"/>
               </a:lnSpc>
@@ -6755,7 +9865,7 @@
                 <a:uFillTx/>
                 <a:latin typeface="Arial"/>
               </a:rPr>
-              <a:t>SQLite и SQLAlchemy — хранение данных</a:t>
+              <a:t>Администратор управляет пользователями, тренерами, занятиями и отчетами</a:t>
             </a:r>
             <a:endParaRPr lang="ru-RU" sz="2150" b="0" u="none" strike="noStrike">
               <a:solidFill>
@@ -6767,7 +9877,7 @@
             </a:endParaRPr>
           </a:p>
           <a:p>
-            <a:pPr indent="-180000">
+            <a:pPr marL="216000" indent="-180000">
               <a:lnSpc>
                 <a:spcPct val="100000"/>
               </a:lnSpc>
@@ -6786,7 +9896,7 @@
                 <a:uFillTx/>
                 <a:latin typeface="Arial"/>
               </a:rPr>
-              <a:t>Flask-Login — авторизация</a:t>
+              <a:t>Диаграмма показывает границы системы и основные сценарии использования</a:t>
             </a:r>
             <a:endParaRPr lang="ru-RU" sz="2150" b="0" u="none" strike="noStrike">
               <a:solidFill>
@@ -6797,142 +9907,90 @@
               <a:latin typeface="Arial"/>
             </a:endParaRPr>
           </a:p>
-          <a:p>
-            <a:pPr indent="-180000">
-              <a:lnSpc>
-                <a:spcPct val="100000"/>
-              </a:lnSpc>
-              <a:buClr>
-                <a:srgbClr val="111827"/>
-              </a:buClr>
-              <a:buFont typeface="Symbol" charset="2"/>
-              <a:buChar char=""/>
-            </a:pPr>
-            <a:r>
-              <a:rPr lang="ru-RU" sz="2150" b="0" u="none" strike="noStrike">
-                <a:solidFill>
-                  <a:srgbClr val="111827"/>
-                </a:solidFill>
-                <a:effectLst/>
-                <a:uFillTx/>
-                <a:latin typeface="Arial"/>
-              </a:rPr>
-              <a:t>Flask-WTF и WTForms — формы</a:t>
-            </a:r>
-            <a:endParaRPr lang="ru-RU" sz="2150" b="0" u="none" strike="noStrike">
-              <a:solidFill>
-                <a:srgbClr val="000000"/>
-              </a:solidFill>
-              <a:effectLst/>
-              <a:uFillTx/>
-              <a:latin typeface="Arial"/>
-            </a:endParaRPr>
-          </a:p>
-          <a:p>
-            <a:pPr indent="-180000">
-              <a:lnSpc>
-                <a:spcPct val="100000"/>
-              </a:lnSpc>
-              <a:buClr>
-                <a:srgbClr val="111827"/>
-              </a:buClr>
-              <a:buFont typeface="Symbol" charset="2"/>
-              <a:buChar char=""/>
-            </a:pPr>
-            <a:r>
-              <a:rPr lang="ru-RU" sz="2150" b="0" u="none" strike="noStrike">
-                <a:solidFill>
-                  <a:srgbClr val="111827"/>
-                </a:solidFill>
-                <a:effectLst/>
-                <a:uFillTx/>
-                <a:latin typeface="Arial"/>
-              </a:rPr>
-              <a:t>Flask-Mail — уведомления</a:t>
-            </a:r>
-            <a:endParaRPr lang="ru-RU" sz="2150" b="0" u="none" strike="noStrike">
-              <a:solidFill>
-                <a:srgbClr val="000000"/>
-              </a:solidFill>
-              <a:effectLst/>
-              <a:uFillTx/>
-              <a:latin typeface="Arial"/>
-            </a:endParaRPr>
-          </a:p>
-          <a:p>
-            <a:pPr indent="-180000">
-              <a:lnSpc>
-                <a:spcPct val="100000"/>
-              </a:lnSpc>
-              <a:buClr>
-                <a:srgbClr val="111827"/>
-              </a:buClr>
-              <a:buFont typeface="Symbol" charset="2"/>
-              <a:buChar char=""/>
-            </a:pPr>
-            <a:r>
-              <a:rPr lang="ru-RU" sz="2150" b="0" u="none" strike="noStrike">
-                <a:solidFill>
-                  <a:srgbClr val="111827"/>
-                </a:solidFill>
-                <a:effectLst/>
-                <a:uFillTx/>
-                <a:latin typeface="Arial"/>
-              </a:rPr>
-              <a:t>ReportLab и XlsxWriter — отчеты</a:t>
-            </a:r>
-            <a:endParaRPr lang="ru-RU" sz="2150" b="0" u="none" strike="noStrike">
-              <a:solidFill>
-                <a:srgbClr val="000000"/>
-              </a:solidFill>
-              <a:effectLst/>
-              <a:uFillTx/>
-              <a:latin typeface="Arial"/>
-            </a:endParaRPr>
-          </a:p>
-          <a:p>
-            <a:pPr indent="-180000">
-              <a:lnSpc>
-                <a:spcPct val="100000"/>
-              </a:lnSpc>
-              <a:buClr>
-                <a:srgbClr val="111827"/>
-              </a:buClr>
-              <a:buFont typeface="Symbol" charset="2"/>
-              <a:buChar char=""/>
-            </a:pPr>
-            <a:r>
-              <a:rPr lang="ru-RU" sz="2150" b="0" u="none" strike="noStrike">
-                <a:solidFill>
-                  <a:srgbClr val="111827"/>
-                </a:solidFill>
-                <a:effectLst/>
-                <a:uFillTx/>
-                <a:latin typeface="Arial"/>
-              </a:rPr>
-              <a:t>pytest — тестирование</a:t>
-            </a:r>
-            <a:endParaRPr lang="ru-RU" sz="2150" b="0" u="none" strike="noStrike">
-              <a:solidFill>
-                <a:srgbClr val="000000"/>
-              </a:solidFill>
-              <a:effectLst/>
-              <a:uFillTx/>
-              <a:latin typeface="Arial"/>
-            </a:endParaRPr>
-          </a:p>
-        </p:txBody>
-      </p:sp>
-      <p:sp>
-        <p:nvSpPr>
-          <p:cNvPr id="43" name="Footer"/>
+        </p:txBody>
+      </p:sp>
+      <p:sp>
+        <p:nvSpPr>
+          <p:cNvPr id="43" name="ImageFrame"/>
+          <p:cNvSpPr/>
+          <p:nvPr/>
+        </p:nvSpPr>
+        <p:spPr>
+          <a:xfrm>
+            <a:off x="6400800" y="1207080"/>
+            <a:ext cx="4891320" cy="4799880"/>
+          </a:xfrm>
+          <a:prstGeom prst="roundRect">
+            <a:avLst>
+              <a:gd name="adj" fmla="val 16667"/>
+            </a:avLst>
+          </a:prstGeom>
+          <a:solidFill>
+            <a:srgbClr val="FFFFFF"/>
+          </a:solidFill>
+          <a:ln w="12700">
+            <a:solidFill>
+              <a:srgbClr val="CBD5E1"/>
+            </a:solidFill>
+            <a:round/>
+          </a:ln>
+        </p:spPr>
+        <p:style>
+          <a:lnRef idx="0"/>
+          <a:fillRef idx="0"/>
+          <a:effectRef idx="0"/>
+          <a:fontRef idx="minor"/>
+        </p:style>
+        <p:txBody>
+          <a:bodyPr lIns="90000" tIns="45000" rIns="90000" bIns="45000" anchor="t">
+            <a:noAutofit/>
+          </a:bodyPr>
+          <a:p>
+            <a:endParaRPr lang="ru-RU" sz="1800" b="0" u="none" strike="noStrike">
+              <a:solidFill>
+                <a:srgbClr val="000000"/>
+              </a:solidFill>
+              <a:effectLst/>
+              <a:uFillTx/>
+              <a:latin typeface="Arial"/>
+            </a:endParaRPr>
+          </a:p>
+        </p:txBody>
+      </p:sp>
+      <p:pic>
+        <p:nvPicPr>
+          <p:cNvPr id="44" name="diagrams/use_case_diagram.png"/>
+          <p:cNvPicPr/>
+          <p:nvPr/>
+        </p:nvPicPr>
+        <p:blipFill>
+          <a:blip r:embed="rId1"/>
+          <a:stretch/>
+        </p:blipFill>
+        <p:spPr>
+          <a:xfrm>
+            <a:off x="6537960" y="2068920"/>
+            <a:ext cx="4754160" cy="2971080"/>
+          </a:xfrm>
+          <a:prstGeom prst="rect">
+            <a:avLst/>
+          </a:prstGeom>
+          <a:noFill/>
+          <a:ln w="0">
+            <a:noFill/>
+          </a:ln>
+        </p:spPr>
+      </p:pic>
+      <p:sp>
+        <p:nvSpPr>
+          <p:cNvPr id="45" name="Footer"/>
           <p:cNvSpPr/>
           <p:nvPr/>
         </p:nvSpPr>
         <p:spPr>
           <a:xfrm>
             <a:off x="10625400" y="6473880"/>
-            <a:ext cx="639720" cy="228240"/>
+            <a:ext cx="639360" cy="227880"/>
           </a:xfrm>
           <a:prstGeom prst="rect">
             <a:avLst/>
@@ -7022,14 +10080,14 @@
       </p:grpSpPr>
       <p:sp>
         <p:nvSpPr>
-          <p:cNvPr id="44" name="Background"/>
+          <p:cNvPr id="46" name="Background"/>
           <p:cNvSpPr/>
           <p:nvPr/>
         </p:nvSpPr>
         <p:spPr>
           <a:xfrm>
             <a:off x="0" y="0"/>
-            <a:ext cx="12191760" cy="6857640"/>
+            <a:ext cx="12191400" cy="6857280"/>
           </a:xfrm>
           <a:prstGeom prst="rect">
             <a:avLst/>
@@ -7068,14 +10126,14 @@
       </p:sp>
       <p:sp>
         <p:nvSpPr>
-          <p:cNvPr id="45" name="Header"/>
+          <p:cNvPr id="47" name="Header"/>
           <p:cNvSpPr/>
           <p:nvPr/>
         </p:nvSpPr>
         <p:spPr>
           <a:xfrm>
             <a:off x="0" y="0"/>
-            <a:ext cx="12191760" cy="959760"/>
+            <a:ext cx="12191400" cy="959400"/>
           </a:xfrm>
           <a:prstGeom prst="rect">
             <a:avLst/>
@@ -7114,14 +10172,14 @@
       </p:sp>
       <p:sp>
         <p:nvSpPr>
-          <p:cNvPr id="46" name="Accent"/>
+          <p:cNvPr id="48" name="Accent"/>
           <p:cNvSpPr/>
           <p:nvPr/>
         </p:nvSpPr>
         <p:spPr>
           <a:xfrm>
             <a:off x="0" y="960120"/>
-            <a:ext cx="164160" cy="5897520"/>
+            <a:ext cx="163800" cy="5897160"/>
           </a:xfrm>
           <a:prstGeom prst="rect">
             <a:avLst/>
@@ -7143,7 +10201,7 @@
           <a:fontRef idx="minor"/>
         </p:style>
         <p:txBody>
-          <a:bodyPr lIns="90000" tIns="45000" rIns="90000" bIns="45000" anchor="t">
+          <a:bodyPr lIns="82080" tIns="45000" rIns="82080" bIns="45000" anchor="t">
             <a:noAutofit/>
           </a:bodyPr>
           <a:p>
@@ -7160,14 +10218,14 @@
       </p:sp>
       <p:sp>
         <p:nvSpPr>
-          <p:cNvPr id="47" name="Title"/>
+          <p:cNvPr id="49" name="Title"/>
           <p:cNvSpPr/>
           <p:nvPr/>
         </p:nvSpPr>
         <p:spPr>
           <a:xfrm>
             <a:off x="502920" y="201240"/>
-            <a:ext cx="10881000" cy="658080"/>
+            <a:ext cx="10880640" cy="657720"/>
           </a:xfrm>
           <a:prstGeom prst="rect">
             <a:avLst/>
@@ -7205,7 +10263,7 @@
                 <a:uFillTx/>
                 <a:latin typeface="Arial"/>
               </a:rPr>
-              <a:t>Архитектура проекта</a:t>
+              <a:t>Технологический стек</a:t>
             </a:r>
             <a:endParaRPr lang="ru-RU" sz="3300" b="0" u="none" strike="noStrike">
               <a:solidFill>
@@ -7220,14 +10278,14 @@
       </p:sp>
       <p:sp>
         <p:nvSpPr>
-          <p:cNvPr id="48" name="Content"/>
+          <p:cNvPr id="50" name="Content"/>
           <p:cNvSpPr/>
           <p:nvPr/>
         </p:nvSpPr>
         <p:spPr>
           <a:xfrm>
             <a:off x="685800" y="1234440"/>
-            <a:ext cx="5531760" cy="4891680"/>
+            <a:ext cx="10194840" cy="4891320"/>
           </a:xfrm>
           <a:prstGeom prst="roundRect">
             <a:avLst>
@@ -7255,7 +10313,7 @@
             <a:noAutofit/>
           </a:bodyPr>
           <a:p>
-            <a:pPr indent="-180000">
+            <a:pPr marL="216000" indent="-180000">
               <a:lnSpc>
                 <a:spcPct val="100000"/>
               </a:lnSpc>
@@ -7274,7 +10332,7 @@
                 <a:uFillTx/>
                 <a:latin typeface="Arial"/>
               </a:rPr>
-              <a:t>Приложение разделено на слои</a:t>
+              <a:t>Python и Flask — серверная часть</a:t>
             </a:r>
             <a:endParaRPr lang="ru-RU" sz="2150" b="0" u="none" strike="noStrike">
               <a:solidFill>
@@ -7286,7 +10344,7 @@
             </a:endParaRPr>
           </a:p>
           <a:p>
-            <a:pPr indent="-180000">
+            <a:pPr marL="216000" indent="-180000">
               <a:lnSpc>
                 <a:spcPct val="100000"/>
               </a:lnSpc>
@@ -7305,7 +10363,7 @@
                 <a:uFillTx/>
                 <a:latin typeface="Arial"/>
               </a:rPr>
-              <a:t>controllers — маршруты</a:t>
+              <a:t>SQLite и SQLAlchemy — хранение данных</a:t>
             </a:r>
             <a:endParaRPr lang="ru-RU" sz="2150" b="0" u="none" strike="noStrike">
               <a:solidFill>
@@ -7317,7 +10375,7 @@
             </a:endParaRPr>
           </a:p>
           <a:p>
-            <a:pPr indent="-180000">
+            <a:pPr marL="216000" indent="-180000">
               <a:lnSpc>
                 <a:spcPct val="100000"/>
               </a:lnSpc>
@@ -7336,7 +10394,7 @@
                 <a:uFillTx/>
                 <a:latin typeface="Arial"/>
               </a:rPr>
-              <a:t>models — сущности БД</a:t>
+              <a:t>Flask-Login — авторизация</a:t>
             </a:r>
             <a:endParaRPr lang="ru-RU" sz="2150" b="0" u="none" strike="noStrike">
               <a:solidFill>
@@ -7348,7 +10406,7 @@
             </a:endParaRPr>
           </a:p>
           <a:p>
-            <a:pPr indent="-180000">
+            <a:pPr marL="216000" indent="-180000">
               <a:lnSpc>
                 <a:spcPct val="100000"/>
               </a:lnSpc>
@@ -7367,7 +10425,7 @@
                 <a:uFillTx/>
                 <a:latin typeface="Arial"/>
               </a:rPr>
-              <a:t>forms — проверка ввода</a:t>
+              <a:t>Flask-WTF и WTForms — формы</a:t>
             </a:r>
             <a:endParaRPr lang="ru-RU" sz="2150" b="0" u="none" strike="noStrike">
               <a:solidFill>
@@ -7379,7 +10437,7 @@
             </a:endParaRPr>
           </a:p>
           <a:p>
-            <a:pPr indent="-180000">
+            <a:pPr marL="216000" indent="-180000">
               <a:lnSpc>
                 <a:spcPct val="100000"/>
               </a:lnSpc>
@@ -7398,7 +10456,7 @@
                 <a:uFillTx/>
                 <a:latin typeface="Arial"/>
               </a:rPr>
-              <a:t>services — уведомления и отчеты</a:t>
+              <a:t>Flask-Mail — уведомления</a:t>
             </a:r>
             <a:endParaRPr lang="ru-RU" sz="2150" b="0" u="none" strike="noStrike">
               <a:solidFill>
@@ -7410,7 +10468,7 @@
             </a:endParaRPr>
           </a:p>
           <a:p>
-            <a:pPr indent="-180000">
+            <a:pPr marL="216000" indent="-180000">
               <a:lnSpc>
                 <a:spcPct val="100000"/>
               </a:lnSpc>
@@ -7429,7 +10487,7 @@
                 <a:uFillTx/>
                 <a:latin typeface="Arial"/>
               </a:rPr>
-              <a:t>templates/static — интерфейс</a:t>
+              <a:t>ReportLab и XlsxWriter — отчеты</a:t>
             </a:r>
             <a:endParaRPr lang="ru-RU" sz="2150" b="0" u="none" strike="noStrike">
               <a:solidFill>
@@ -7440,80 +10498,39 @@
               <a:latin typeface="Arial"/>
             </a:endParaRPr>
           </a:p>
-        </p:txBody>
-      </p:sp>
-      <p:sp>
-        <p:nvSpPr>
-          <p:cNvPr id="49" name="ImageFrame"/>
-          <p:cNvSpPr/>
-          <p:nvPr/>
-        </p:nvSpPr>
-        <p:spPr>
-          <a:xfrm>
-            <a:off x="6400800" y="1207080"/>
-            <a:ext cx="4891680" cy="4800240"/>
-          </a:xfrm>
-          <a:prstGeom prst="roundRect">
-            <a:avLst>
-              <a:gd name="adj" fmla="val 16667"/>
-            </a:avLst>
-          </a:prstGeom>
-          <a:solidFill>
-            <a:srgbClr val="FFFFFF"/>
-          </a:solidFill>
-          <a:ln w="12700">
-            <a:solidFill>
-              <a:srgbClr val="CBD5E1"/>
-            </a:solidFill>
-            <a:round/>
-          </a:ln>
-        </p:spPr>
-        <p:style>
-          <a:lnRef idx="0"/>
-          <a:fillRef idx="0"/>
-          <a:effectRef idx="0"/>
-          <a:fontRef idx="minor"/>
-        </p:style>
-        <p:txBody>
-          <a:bodyPr lIns="90000" tIns="45000" rIns="90000" bIns="45000" anchor="t">
-            <a:noAutofit/>
-          </a:bodyPr>
-          <a:p>
-            <a:endParaRPr lang="ru-RU" sz="1800" b="0" u="none" strike="noStrike">
-              <a:solidFill>
-                <a:srgbClr val="000000"/>
-              </a:solidFill>
-              <a:effectLst/>
-              <a:uFillTx/>
-              <a:latin typeface="Arial"/>
-            </a:endParaRPr>
-          </a:p>
-        </p:txBody>
-      </p:sp>
-      <p:pic>
-        <p:nvPicPr>
-          <p:cNvPr id="50" name="diagrams/project_structure.png"/>
-          <p:cNvPicPr/>
-          <p:nvPr/>
-        </p:nvPicPr>
-        <p:blipFill>
-          <a:blip r:embed="rId1"/>
-          <a:stretch/>
-        </p:blipFill>
-        <p:spPr>
-          <a:xfrm>
-            <a:off x="6537960" y="1854360"/>
-            <a:ext cx="4754520" cy="3725640"/>
-          </a:xfrm>
-          <a:prstGeom prst="rect">
-            <a:avLst/>
-          </a:prstGeom>
-          <a:noFill/>
-          <a:ln w="0">
-            <a:noFill/>
-          </a:ln>
-        </p:spPr>
-      </p:pic>
+          <a:p>
+            <a:pPr marL="216000" indent="-180000">
+              <a:lnSpc>
+                <a:spcPct val="100000"/>
+              </a:lnSpc>
+              <a:buClr>
+                <a:srgbClr val="111827"/>
+              </a:buClr>
+              <a:buFont typeface="Symbol" charset="2"/>
+              <a:buChar char=""/>
+            </a:pPr>
+            <a:r>
+              <a:rPr lang="ru-RU" sz="2150" b="0" u="none" strike="noStrike">
+                <a:solidFill>
+                  <a:srgbClr val="111827"/>
+                </a:solidFill>
+                <a:effectLst/>
+                <a:uFillTx/>
+                <a:latin typeface="Arial"/>
+              </a:rPr>
+              <a:t>pytest — тестирование</a:t>
+            </a:r>
+            <a:endParaRPr lang="ru-RU" sz="2150" b="0" u="none" strike="noStrike">
+              <a:solidFill>
+                <a:srgbClr val="000000"/>
+              </a:solidFill>
+              <a:effectLst/>
+              <a:uFillTx/>
+              <a:latin typeface="Arial"/>
+            </a:endParaRPr>
+          </a:p>
+        </p:txBody>
+      </p:sp>
       <p:sp>
         <p:nvSpPr>
           <p:cNvPr id="51" name="Footer"/>
@@ -7523,7 +10540,7 @@
         <p:spPr>
           <a:xfrm>
             <a:off x="10625400" y="6473880"/>
-            <a:ext cx="639720" cy="228240"/>
+            <a:ext cx="639360" cy="227880"/>
           </a:xfrm>
           <a:prstGeom prst="rect">
             <a:avLst/>
@@ -7620,7 +10637,7 @@
         <p:spPr>
           <a:xfrm>
             <a:off x="0" y="0"/>
-            <a:ext cx="12191760" cy="6857640"/>
+            <a:ext cx="12191400" cy="6857280"/>
           </a:xfrm>
           <a:prstGeom prst="rect">
             <a:avLst/>
@@ -7666,7 +10683,7 @@
         <p:spPr>
           <a:xfrm>
             <a:off x="0" y="0"/>
-            <a:ext cx="12191760" cy="959760"/>
+            <a:ext cx="12191400" cy="959400"/>
           </a:xfrm>
           <a:prstGeom prst="rect">
             <a:avLst/>
@@ -7712,7 +10729,7 @@
         <p:spPr>
           <a:xfrm>
             <a:off x="0" y="960120"/>
-            <a:ext cx="164160" cy="5897520"/>
+            <a:ext cx="163800" cy="5897160"/>
           </a:xfrm>
           <a:prstGeom prst="rect">
             <a:avLst/>
@@ -7734,7 +10751,7 @@
           <a:fontRef idx="minor"/>
         </p:style>
         <p:txBody>
-          <a:bodyPr lIns="90000" tIns="45000" rIns="90000" bIns="45000" anchor="t">
+          <a:bodyPr lIns="82080" tIns="45000" rIns="82080" bIns="45000" anchor="t">
             <a:noAutofit/>
           </a:bodyPr>
           <a:p>
@@ -7758,7 +10775,7 @@
         <p:spPr>
           <a:xfrm>
             <a:off x="502920" y="201240"/>
-            <a:ext cx="10881000" cy="658080"/>
+            <a:ext cx="10880640" cy="657720"/>
           </a:xfrm>
           <a:prstGeom prst="rect">
             <a:avLst/>
@@ -7796,7 +10813,7 @@
                 <a:uFillTx/>
                 <a:latin typeface="Arial"/>
               </a:rPr>
-              <a:t>База данных</a:t>
+              <a:t>Архитектура проекта</a:t>
             </a:r>
             <a:endParaRPr lang="ru-RU" sz="3300" b="0" u="none" strike="noStrike">
               <a:solidFill>
@@ -7818,7 +10835,7 @@
         <p:spPr>
           <a:xfrm>
             <a:off x="685800" y="1234440"/>
-            <a:ext cx="5531760" cy="4891680"/>
+            <a:ext cx="5531400" cy="4891320"/>
           </a:xfrm>
           <a:prstGeom prst="roundRect">
             <a:avLst>
@@ -7846,7 +10863,7 @@
             <a:noAutofit/>
           </a:bodyPr>
           <a:p>
-            <a:pPr indent="-180000">
+            <a:pPr marL="216000" indent="-180000">
               <a:lnSpc>
                 <a:spcPct val="100000"/>
               </a:lnSpc>
@@ -7865,7 +10882,7 @@
                 <a:uFillTx/>
                 <a:latin typeface="Arial"/>
               </a:rPr>
-              <a:t>User — пользователь и роль</a:t>
+              <a:t>Приложение разделено на слои</a:t>
             </a:r>
             <a:endParaRPr lang="ru-RU" sz="2150" b="0" u="none" strike="noStrike">
               <a:solidFill>
@@ -7877,7 +10894,7 @@
             </a:endParaRPr>
           </a:p>
           <a:p>
-            <a:pPr indent="-180000">
+            <a:pPr marL="216000" indent="-180000">
               <a:lnSpc>
                 <a:spcPct val="100000"/>
               </a:lnSpc>
@@ -7896,7 +10913,7 @@
                 <a:uFillTx/>
                 <a:latin typeface="Arial"/>
               </a:rPr>
-              <a:t>Trainer — тренер</a:t>
+              <a:t>controllers — маршруты</a:t>
             </a:r>
             <a:endParaRPr lang="ru-RU" sz="2150" b="0" u="none" strike="noStrike">
               <a:solidFill>
@@ -7908,7 +10925,7 @@
             </a:endParaRPr>
           </a:p>
           <a:p>
-            <a:pPr indent="-180000">
+            <a:pPr marL="216000" indent="-180000">
               <a:lnSpc>
                 <a:spcPct val="100000"/>
               </a:lnSpc>
@@ -7927,7 +10944,7 @@
                 <a:uFillTx/>
                 <a:latin typeface="Arial"/>
               </a:rPr>
-              <a:t>WorkoutType — тип занятия</a:t>
+              <a:t>models — сущности БД</a:t>
             </a:r>
             <a:endParaRPr lang="ru-RU" sz="2150" b="0" u="none" strike="noStrike">
               <a:solidFill>
@@ -7939,7 +10956,7 @@
             </a:endParaRPr>
           </a:p>
           <a:p>
-            <a:pPr indent="-180000">
+            <a:pPr marL="216000" indent="-180000">
               <a:lnSpc>
                 <a:spcPct val="100000"/>
               </a:lnSpc>
@@ -7958,7 +10975,7 @@
                 <a:uFillTx/>
                 <a:latin typeface="Arial"/>
               </a:rPr>
-              <a:t>Workout — тренировка в расписании</a:t>
+              <a:t>forms — проверка ввода</a:t>
             </a:r>
             <a:endParaRPr lang="ru-RU" sz="2150" b="0" u="none" strike="noStrike">
               <a:solidFill>
@@ -7970,7 +10987,7 @@
             </a:endParaRPr>
           </a:p>
           <a:p>
-            <a:pPr indent="-180000">
+            <a:pPr marL="216000" indent="-180000">
               <a:lnSpc>
                 <a:spcPct val="100000"/>
               </a:lnSpc>
@@ -7989,7 +11006,7 @@
                 <a:uFillTx/>
                 <a:latin typeface="Arial"/>
               </a:rPr>
-              <a:t>Booking — запись пользователя</a:t>
+              <a:t>services — уведомления и отчеты</a:t>
             </a:r>
             <a:endParaRPr lang="ru-RU" sz="2150" b="0" u="none" strike="noStrike">
               <a:solidFill>
@@ -8001,7 +11018,7 @@
             </a:endParaRPr>
           </a:p>
           <a:p>
-            <a:pPr indent="-180000">
+            <a:pPr marL="216000" indent="-180000">
               <a:lnSpc>
                 <a:spcPct val="100000"/>
               </a:lnSpc>
@@ -8020,7 +11037,7 @@
                 <a:uFillTx/>
                 <a:latin typeface="Arial"/>
               </a:rPr>
-              <a:t>Abonement и UserAbonement — тарифы и покупки</a:t>
+              <a:t>templates/static — интерфейс</a:t>
             </a:r>
             <a:endParaRPr lang="ru-RU" sz="2150" b="0" u="none" strike="noStrike">
               <a:solidFill>
@@ -8042,7 +11059,7 @@
         <p:spPr>
           <a:xfrm>
             <a:off x="6400800" y="1207080"/>
-            <a:ext cx="4891680" cy="4800240"/>
+            <a:ext cx="4891320" cy="4799880"/>
           </a:xfrm>
           <a:prstGeom prst="roundRect">
             <a:avLst>
@@ -8083,7 +11100,7 @@
       </p:sp>
       <p:pic>
         <p:nvPicPr>
-          <p:cNvPr id="58" name="diagrams/er_diagram.png"/>
+          <p:cNvPr id="58" name="diagrams/project_structure.png"/>
           <p:cNvPicPr/>
           <p:nvPr/>
         </p:nvPicPr>
@@ -8093,8 +11110,8 @@
         </p:blipFill>
         <p:spPr>
           <a:xfrm>
-            <a:off x="6473880" y="1353240"/>
-            <a:ext cx="3423240" cy="4480200"/>
+            <a:off x="6473880" y="1800000"/>
+            <a:ext cx="4754160" cy="3725280"/>
           </a:xfrm>
           <a:prstGeom prst="rect">
             <a:avLst/>
@@ -8114,7 +11131,7 @@
         <p:spPr>
           <a:xfrm>
             <a:off x="10625400" y="6473880"/>
-            <a:ext cx="639720" cy="228240"/>
+            <a:ext cx="639360" cy="227880"/>
           </a:xfrm>
           <a:prstGeom prst="rect">
             <a:avLst/>
@@ -8211,7 +11228,7 @@
         <p:spPr>
           <a:xfrm>
             <a:off x="0" y="0"/>
-            <a:ext cx="12191760" cy="6857640"/>
+            <a:ext cx="12191400" cy="6857280"/>
           </a:xfrm>
           <a:prstGeom prst="rect">
             <a:avLst/>
@@ -8257,7 +11274,7 @@
         <p:spPr>
           <a:xfrm>
             <a:off x="0" y="0"/>
-            <a:ext cx="12191760" cy="959760"/>
+            <a:ext cx="12191400" cy="959400"/>
           </a:xfrm>
           <a:prstGeom prst="rect">
             <a:avLst/>
@@ -8303,7 +11320,7 @@
         <p:spPr>
           <a:xfrm>
             <a:off x="0" y="960120"/>
-            <a:ext cx="164160" cy="5897520"/>
+            <a:ext cx="163800" cy="5897160"/>
           </a:xfrm>
           <a:prstGeom prst="rect">
             <a:avLst/>
@@ -8325,7 +11342,7 @@
           <a:fontRef idx="minor"/>
         </p:style>
         <p:txBody>
-          <a:bodyPr lIns="90000" tIns="45000" rIns="90000" bIns="45000" anchor="t">
+          <a:bodyPr lIns="82080" tIns="45000" rIns="82080" bIns="45000" anchor="t">
             <a:noAutofit/>
           </a:bodyPr>
           <a:p>
@@ -8349,7 +11366,7 @@
         <p:spPr>
           <a:xfrm>
             <a:off x="502920" y="201240"/>
-            <a:ext cx="10881000" cy="658080"/>
+            <a:ext cx="10880640" cy="657720"/>
           </a:xfrm>
           <a:prstGeom prst="rect">
             <a:avLst/>
@@ -8387,7 +11404,7 @@
                 <a:uFillTx/>
                 <a:latin typeface="Arial"/>
               </a:rPr>
-              <a:t>Пользовательский сценарий</a:t>
+              <a:t>База данных</a:t>
             </a:r>
             <a:endParaRPr lang="ru-RU" sz="3300" b="0" u="none" strike="noStrike">
               <a:solidFill>
@@ -8409,7 +11426,7 @@
         <p:spPr>
           <a:xfrm>
             <a:off x="685800" y="1234440"/>
-            <a:ext cx="10195200" cy="4891680"/>
+            <a:ext cx="5531400" cy="4891320"/>
           </a:xfrm>
           <a:prstGeom prst="roundRect">
             <a:avLst>
@@ -8437,7 +11454,7 @@
             <a:noAutofit/>
           </a:bodyPr>
           <a:p>
-            <a:pPr indent="-180000">
+            <a:pPr marL="216000" indent="-180000">
               <a:lnSpc>
                 <a:spcPct val="100000"/>
               </a:lnSpc>
@@ -8456,7 +11473,7 @@
                 <a:uFillTx/>
                 <a:latin typeface="Arial"/>
               </a:rPr>
-              <a:t>Регистрация и вход</a:t>
+              <a:t>User — пользователь и роль</a:t>
             </a:r>
             <a:endParaRPr lang="ru-RU" sz="2150" b="0" u="none" strike="noStrike">
               <a:solidFill>
@@ -8468,7 +11485,7 @@
             </a:endParaRPr>
           </a:p>
           <a:p>
-            <a:pPr indent="-180000">
+            <a:pPr marL="216000" indent="-180000">
               <a:lnSpc>
                 <a:spcPct val="100000"/>
               </a:lnSpc>
@@ -8487,7 +11504,7 @@
                 <a:uFillTx/>
                 <a:latin typeface="Arial"/>
               </a:rPr>
-              <a:t>Просмотр расписания</a:t>
+              <a:t>Trainer — тренер</a:t>
             </a:r>
             <a:endParaRPr lang="ru-RU" sz="2150" b="0" u="none" strike="noStrike">
               <a:solidFill>
@@ -8499,7 +11516,7 @@
             </a:endParaRPr>
           </a:p>
           <a:p>
-            <a:pPr indent="-180000">
+            <a:pPr marL="216000" indent="-180000">
               <a:lnSpc>
                 <a:spcPct val="100000"/>
               </a:lnSpc>
@@ -8518,7 +11535,7 @@
                 <a:uFillTx/>
                 <a:latin typeface="Arial"/>
               </a:rPr>
-              <a:t>Фильтрация тренировок</a:t>
+              <a:t>WorkoutType — тип занятия</a:t>
             </a:r>
             <a:endParaRPr lang="ru-RU" sz="2150" b="0" u="none" strike="noStrike">
               <a:solidFill>
@@ -8530,7 +11547,7 @@
             </a:endParaRPr>
           </a:p>
           <a:p>
-            <a:pPr indent="-180000">
+            <a:pPr marL="216000" indent="-180000">
               <a:lnSpc>
                 <a:spcPct val="100000"/>
               </a:lnSpc>
@@ -8549,7 +11566,7 @@
                 <a:uFillTx/>
                 <a:latin typeface="Arial"/>
               </a:rPr>
-              <a:t>Просмотр карточки тренера</a:t>
+              <a:t>Workout — тренировка в расписании</a:t>
             </a:r>
             <a:endParaRPr lang="ru-RU" sz="2150" b="0" u="none" strike="noStrike">
               <a:solidFill>
@@ -8561,7 +11578,7 @@
             </a:endParaRPr>
           </a:p>
           <a:p>
-            <a:pPr indent="-180000">
+            <a:pPr marL="216000" indent="-180000">
               <a:lnSpc>
                 <a:spcPct val="100000"/>
               </a:lnSpc>
@@ -8580,7 +11597,7 @@
                 <a:uFillTx/>
                 <a:latin typeface="Arial"/>
               </a:rPr>
-              <a:t>Запись на занятие</a:t>
+              <a:t>Booking — запись пользователя</a:t>
             </a:r>
             <a:endParaRPr lang="ru-RU" sz="2150" b="0" u="none" strike="noStrike">
               <a:solidFill>
@@ -8592,7 +11609,7 @@
             </a:endParaRPr>
           </a:p>
           <a:p>
-            <a:pPr indent="-180000">
+            <a:pPr marL="216000" indent="-180000">
               <a:lnSpc>
                 <a:spcPct val="100000"/>
               </a:lnSpc>
@@ -8611,7 +11628,7 @@
                 <a:uFillTx/>
                 <a:latin typeface="Arial"/>
               </a:rPr>
-              <a:t>Просмотр личного расписания</a:t>
+              <a:t>Abonement и UserAbonement — тарифы и покупки</a:t>
             </a:r>
             <a:endParaRPr lang="ru-RU" sz="2150" b="0" u="none" strike="noStrike">
               <a:solidFill>
@@ -8622,49 +11639,90 @@
               <a:latin typeface="Arial"/>
             </a:endParaRPr>
           </a:p>
-          <a:p>
-            <a:pPr indent="-180000">
-              <a:lnSpc>
-                <a:spcPct val="100000"/>
-              </a:lnSpc>
-              <a:buClr>
-                <a:srgbClr val="111827"/>
-              </a:buClr>
-              <a:buFont typeface="Symbol" charset="2"/>
-              <a:buChar char=""/>
-            </a:pPr>
-            <a:r>
-              <a:rPr lang="ru-RU" sz="2150" b="0" u="none" strike="noStrike">
-                <a:solidFill>
-                  <a:srgbClr val="111827"/>
-                </a:solidFill>
-                <a:effectLst/>
-                <a:uFillTx/>
-                <a:latin typeface="Arial"/>
-              </a:rPr>
-              <a:t>Работа с абонементом</a:t>
-            </a:r>
-            <a:endParaRPr lang="ru-RU" sz="2150" b="0" u="none" strike="noStrike">
-              <a:solidFill>
-                <a:srgbClr val="000000"/>
-              </a:solidFill>
-              <a:effectLst/>
-              <a:uFillTx/>
-              <a:latin typeface="Arial"/>
-            </a:endParaRPr>
-          </a:p>
-        </p:txBody>
-      </p:sp>
-      <p:sp>
-        <p:nvSpPr>
-          <p:cNvPr id="65" name="Footer"/>
+        </p:txBody>
+      </p:sp>
+      <p:sp>
+        <p:nvSpPr>
+          <p:cNvPr id="65" name="ImageFrame"/>
+          <p:cNvSpPr/>
+          <p:nvPr/>
+        </p:nvSpPr>
+        <p:spPr>
+          <a:xfrm>
+            <a:off x="6400800" y="1207080"/>
+            <a:ext cx="4891320" cy="4799880"/>
+          </a:xfrm>
+          <a:prstGeom prst="roundRect">
+            <a:avLst>
+              <a:gd name="adj" fmla="val 16667"/>
+            </a:avLst>
+          </a:prstGeom>
+          <a:solidFill>
+            <a:srgbClr val="FFFFFF"/>
+          </a:solidFill>
+          <a:ln w="12700">
+            <a:solidFill>
+              <a:srgbClr val="CBD5E1"/>
+            </a:solidFill>
+            <a:round/>
+          </a:ln>
+        </p:spPr>
+        <p:style>
+          <a:lnRef idx="0"/>
+          <a:fillRef idx="0"/>
+          <a:effectRef idx="0"/>
+          <a:fontRef idx="minor"/>
+        </p:style>
+        <p:txBody>
+          <a:bodyPr lIns="90000" tIns="45000" rIns="90000" bIns="45000" anchor="t">
+            <a:noAutofit/>
+          </a:bodyPr>
+          <a:p>
+            <a:endParaRPr lang="ru-RU" sz="1800" b="0" u="none" strike="noStrike">
+              <a:solidFill>
+                <a:srgbClr val="000000"/>
+              </a:solidFill>
+              <a:effectLst/>
+              <a:uFillTx/>
+              <a:latin typeface="Arial"/>
+            </a:endParaRPr>
+          </a:p>
+        </p:txBody>
+      </p:sp>
+      <p:pic>
+        <p:nvPicPr>
+          <p:cNvPr id="66" name="diagrams/er_diagram.png"/>
+          <p:cNvPicPr/>
+          <p:nvPr/>
+        </p:nvPicPr>
+        <p:blipFill>
+          <a:blip r:embed="rId1"/>
+          <a:stretch/>
+        </p:blipFill>
+        <p:spPr>
+          <a:xfrm>
+            <a:off x="7020000" y="1353240"/>
+            <a:ext cx="3422880" cy="4479840"/>
+          </a:xfrm>
+          <a:prstGeom prst="rect">
+            <a:avLst/>
+          </a:prstGeom>
+          <a:noFill/>
+          <a:ln w="0">
+            <a:noFill/>
+          </a:ln>
+        </p:spPr>
+      </p:pic>
+      <p:sp>
+        <p:nvSpPr>
+          <p:cNvPr id="67" name="Footer"/>
           <p:cNvSpPr/>
           <p:nvPr/>
         </p:nvSpPr>
         <p:spPr>
           <a:xfrm>
             <a:off x="10625400" y="6473880"/>
-            <a:ext cx="639720" cy="228240"/>
+            <a:ext cx="639360" cy="227880"/>
           </a:xfrm>
           <a:prstGeom prst="rect">
             <a:avLst/>
